--- a/media/exports/reports/2026-06/program-cost.pptx
+++ b/media/exports/reports/2026-06/program-cost.pptx
@@ -316,7 +316,9 @@
     <a:lstStyle/>
     <a:p>
       <a:pPr>
-        <a:defRPr sz="1800"/>
+        <a:defRPr sz="1800">
+          <a:latin typeface="Roboto"/>
+        </a:defRPr>
       </a:pPr>
       <a:endParaRPr lang="en-US"/>
     </a:p>
@@ -526,7 +528,9 @@
     <a:lstStyle/>
     <a:p>
       <a:pPr>
-        <a:defRPr sz="1800"/>
+        <a:defRPr sz="1800">
+          <a:latin typeface="Roboto"/>
+        </a:defRPr>
       </a:pPr>
       <a:endParaRPr lang="en-US"/>
     </a:p>
@@ -804,7 +808,9 @@
     <a:lstStyle/>
     <a:p>
       <a:pPr>
-        <a:defRPr sz="1800"/>
+        <a:defRPr sz="1800">
+          <a:latin typeface="Roboto"/>
+        </a:defRPr>
       </a:pPr>
       <a:endParaRPr/>
     </a:p>
@@ -3835,11 +3841,17 @@
           <a:bodyPr rtlCol="0" anchor="ctr"/>
           <a:lstStyle/>
           <a:p>
+            <a:pPr>
+              <a:defRPr>
+                <a:latin typeface="Roboto"/>
+              </a:defRPr>
+            </a:pPr>
             <a:r>
               <a:rPr sz="1600" b="1">
                 <a:solidFill>
                   <a:srgbClr val="FFFFFF"/>
                 </a:solidFill>
+                <a:latin typeface="Roboto"/>
               </a:rPr>
               <a:t>4th</a:t>
             </a:r>
@@ -3868,14 +3880,19 @@
           </a:bodyPr>
           <a:lstStyle/>
           <a:p>
+            <a:pPr>
+              <a:defRPr>
+                <a:latin typeface="Roboto"/>
+              </a:defRPr>
+            </a:pPr>
             <a:r>
               <a:rPr sz="1800" b="1">
                 <a:solidFill>
                   <a:srgbClr val="25342A"/>
                 </a:solidFill>
-                <a:latin typeface="Arial"/>
-              </a:rPr>
-              <a:t>The 4th Sheet</a:t>
+                <a:latin typeface="Roboto"/>
+              </a:rPr>
+              <a:t>The Fourth Sheet</a:t>
             </a:r>
           </a:p>
         </p:txBody>
@@ -3902,12 +3919,17 @@
           </a:bodyPr>
           <a:lstStyle/>
           <a:p>
+            <a:pPr>
+              <a:defRPr>
+                <a:latin typeface="Roboto"/>
+              </a:defRPr>
+            </a:pPr>
             <a:r>
               <a:rPr sz="1100" b="1">
                 <a:solidFill>
                   <a:srgbClr val="8A7A52"/>
                 </a:solidFill>
-                <a:latin typeface="Arial"/>
+                <a:latin typeface="Roboto"/>
               </a:rPr>
               <a:t>SAMPLE DATA · invented figures for demonstration</a:t>
             </a:r>
@@ -3936,12 +3958,17 @@
           </a:bodyPr>
           <a:lstStyle/>
           <a:p>
+            <a:pPr>
+              <a:defRPr>
+                <a:latin typeface="Roboto"/>
+              </a:defRPr>
+            </a:pPr>
             <a:r>
               <a:rPr sz="3400" b="1">
                 <a:solidFill>
                   <a:srgbClr val="25342A"/>
                 </a:solidFill>
-                <a:latin typeface="Arial"/>
+                <a:latin typeface="Roboto"/>
               </a:rPr>
               <a:t>What does each program really cost?</a:t>
             </a:r>
@@ -3970,12 +3997,17 @@
           </a:bodyPr>
           <a:lstStyle/>
           <a:p>
+            <a:pPr>
+              <a:defRPr>
+                <a:latin typeface="Roboto"/>
+              </a:defRPr>
+            </a:pPr>
             <a:r>
               <a:rPr sz="1600" b="0">
                 <a:solidFill>
                   <a:srgbClr val="5F6F63"/>
                 </a:solidFill>
-                <a:latin typeface="Arial"/>
+                <a:latin typeface="Roboto"/>
               </a:rPr>
               <a:t>Sample Community Services Ltd</a:t>
             </a:r>
@@ -4004,12 +4036,17 @@
           </a:bodyPr>
           <a:lstStyle/>
           <a:p>
+            <a:pPr>
+              <a:defRPr>
+                <a:latin typeface="Roboto"/>
+              </a:defRPr>
+            </a:pPr>
             <a:r>
               <a:rPr sz="1400" b="0">
                 <a:solidFill>
                   <a:srgbClr val="25342A"/>
                 </a:solidFill>
-                <a:latin typeface="Arial"/>
+                <a:latin typeface="Roboto"/>
               </a:rPr>
               <a:t>Period: June 2026. Each program's full cost: what its grant pays for, plus its fair share of the costs no single grant covers (untied program costs and administration, shared by grant spending). Pick a program and every chart and note follows it.</a:t>
             </a:r>
@@ -4038,45 +4075,65 @@
           </a:bodyPr>
           <a:lstStyle/>
           <a:p>
+            <a:pPr>
+              <a:defRPr>
+                <a:latin typeface="Roboto"/>
+              </a:defRPr>
+            </a:pPr>
             <a:r>
               <a:rPr sz="1100" b="0">
                 <a:solidFill>
                   <a:srgbClr val="5F6F63"/>
                 </a:solidFill>
-                <a:latin typeface="Arial"/>
+                <a:latin typeface="Roboto"/>
               </a:rPr>
               <a:t>How final is this data?</a:t>
             </a:r>
           </a:p>
           <a:p>
+            <a:pPr>
+              <a:defRPr>
+                <a:latin typeface="Roboto"/>
+              </a:defRPr>
+            </a:pPr>
             <a:r>
               <a:rPr sz="1100" b="0">
                 <a:solidFill>
                   <a:srgbClr val="5F6F63"/>
                 </a:solidFill>
-                <a:latin typeface="Arial"/>
+                <a:latin typeface="Roboto"/>
               </a:rPr>
               <a:t>May 2026: Locked. May 2026 is locked (closed 2 Jun 2026). These numbers won't change.</a:t>
             </a:r>
           </a:p>
           <a:p>
+            <a:pPr>
+              <a:defRPr>
+                <a:latin typeface="Roboto"/>
+              </a:defRPr>
+            </a:pPr>
             <a:r>
               <a:rPr sz="1100" b="0">
                 <a:solidFill>
                   <a:srgbClr val="5F6F63"/>
                 </a:solidFill>
-                <a:latin typeface="Arial"/>
+                <a:latin typeface="Roboto"/>
               </a:rPr>
               <a:t>June 2026: Locked. June 2026 is locked (closed 2 Jul 2026). These numbers won't change.</a:t>
             </a:r>
           </a:p>
           <a:p>
+            <a:pPr>
+              <a:defRPr>
+                <a:latin typeface="Roboto"/>
+              </a:defRPr>
+            </a:pPr>
             <a:r>
               <a:rPr sz="1100" b="0">
                 <a:solidFill>
                   <a:srgbClr val="5F6F63"/>
                 </a:solidFill>
-                <a:latin typeface="Arial"/>
+                <a:latin typeface="Roboto"/>
               </a:rPr>
               <a:t>October 2026: Incomplete. October 2026 is still in progress: figures to 6 Oct only.</a:t>
             </a:r>
@@ -4105,12 +4162,17 @@
           </a:bodyPr>
           <a:lstStyle/>
           <a:p>
+            <a:pPr>
+              <a:defRPr>
+                <a:latin typeface="Roboto"/>
+              </a:defRPr>
+            </a:pPr>
             <a:r>
               <a:rPr sz="900" b="0">
                 <a:solidFill>
                   <a:srgbClr val="5F6F63"/>
                 </a:solidFill>
-                <a:latin typeface="Arial"/>
+                <a:latin typeface="Roboto"/>
               </a:rPr>
               <a:t>program-cost.pptx</a:t>
             </a:r>
@@ -4139,13 +4201,17 @@
           </a:bodyPr>
           <a:lstStyle/>
           <a:p>
-            <a:pPr algn="ctr"/>
+            <a:pPr algn="ctr">
+              <a:defRPr>
+                <a:latin typeface="Roboto"/>
+              </a:defRPr>
+            </a:pPr>
             <a:r>
               <a:rPr sz="900" b="0">
                 <a:solidFill>
                   <a:srgbClr val="5F6F63"/>
                 </a:solidFill>
-                <a:latin typeface="Arial"/>
+                <a:latin typeface="Roboto"/>
               </a:rPr>
               <a:t>Data retrieved 2pm, Tue 6 Oct 2026 · Sample data</a:t>
             </a:r>
@@ -4174,13 +4240,17 @@
           </a:bodyPr>
           <a:lstStyle/>
           <a:p>
-            <a:pPr algn="r"/>
+            <a:pPr algn="r">
+              <a:defRPr>
+                <a:latin typeface="Roboto"/>
+              </a:defRPr>
+            </a:pPr>
             <a:r>
               <a:rPr sz="900" b="0">
                 <a:solidFill>
                   <a:srgbClr val="5F6F63"/>
                 </a:solidFill>
-                <a:latin typeface="Arial"/>
+                <a:latin typeface="Roboto"/>
               </a:rPr>
               <a:t>Slide 1 of 11</a:t>
             </a:r>
@@ -4244,7 +4314,11 @@
           <a:bodyPr rtlCol="0" anchor="ctr"/>
           <a:lstStyle/>
           <a:p>
-            <a:pPr algn="ctr"/>
+            <a:pPr algn="ctr">
+              <a:defRPr>
+                <a:latin typeface="Roboto"/>
+              </a:defRPr>
+            </a:pPr>
           </a:p>
         </p:txBody>
       </p:sp>
@@ -4270,12 +4344,17 @@
           </a:bodyPr>
           <a:lstStyle/>
           <a:p>
+            <a:pPr>
+              <a:defRPr>
+                <a:latin typeface="Roboto"/>
+              </a:defRPr>
+            </a:pPr>
             <a:r>
               <a:rPr sz="1000" b="0">
                 <a:solidFill>
                   <a:srgbClr val="5F6F63"/>
                 </a:solidFill>
-                <a:latin typeface="Arial"/>
+                <a:latin typeface="Roboto"/>
               </a:rPr>
               <a:t>Sample Community Services Ltd · What does each program really cost?</a:t>
             </a:r>
@@ -4304,12 +4383,17 @@
           </a:bodyPr>
           <a:lstStyle/>
           <a:p>
+            <a:pPr>
+              <a:defRPr>
+                <a:latin typeface="Roboto"/>
+              </a:defRPr>
+            </a:pPr>
             <a:r>
               <a:rPr sz="2400" b="1">
                 <a:solidFill>
                   <a:srgbClr val="25342A"/>
                 </a:solidFill>
-                <a:latin typeface="Arial"/>
+                <a:latin typeface="Roboto"/>
               </a:rPr>
               <a:t>What it shows · Program: Volunteer coordinator</a:t>
             </a:r>
@@ -4357,7 +4441,11 @@
           <a:bodyPr rtlCol="0" anchor="ctr"/>
           <a:lstStyle/>
           <a:p>
-            <a:pPr algn="ctr"/>
+            <a:pPr algn="ctr">
+              <a:defRPr>
+                <a:latin typeface="Roboto"/>
+              </a:defRPr>
+            </a:pPr>
           </a:p>
         </p:txBody>
       </p:sp>
@@ -4383,12 +4471,17 @@
           </a:bodyPr>
           <a:lstStyle/>
           <a:p>
+            <a:pPr>
+              <a:defRPr>
+                <a:latin typeface="Roboto"/>
+              </a:defRPr>
+            </a:pPr>
             <a:r>
               <a:rPr sz="1100" b="1">
                 <a:solidFill>
                   <a:srgbClr val="5F6F63"/>
                 </a:solidFill>
-                <a:latin typeface="Arial"/>
+                <a:latin typeface="Roboto"/>
               </a:rPr>
               <a:t>WHAT IT SHOWS</a:t>
             </a:r>
@@ -4417,12 +4510,17 @@
           </a:bodyPr>
           <a:lstStyle/>
           <a:p>
+            <a:pPr>
+              <a:defRPr>
+                <a:latin typeface="Roboto"/>
+              </a:defRPr>
+            </a:pPr>
             <a:r>
               <a:rPr sz="1600" b="0">
                 <a:solidFill>
                   <a:srgbClr val="25342A"/>
                 </a:solidFill>
-                <a:latin typeface="Arial"/>
+                <a:latin typeface="Roboto"/>
               </a:rPr>
               <a:t>Volunteer coordinator cost $4,717 in full in June: $2,699 paid by the State volunteering grant grant, and $2,018 of shared costs no grant covers. It has spent 98.6% of its budget to date, with $24,165 left and 8 months to go.</a:t>
             </a:r>
@@ -4470,7 +4568,11 @@
           <a:bodyPr rtlCol="0" anchor="ctr"/>
           <a:lstStyle/>
           <a:p>
-            <a:pPr algn="ctr"/>
+            <a:pPr algn="ctr">
+              <a:defRPr>
+                <a:latin typeface="Roboto"/>
+              </a:defRPr>
+            </a:pPr>
           </a:p>
         </p:txBody>
       </p:sp>
@@ -4496,12 +4598,17 @@
           </a:bodyPr>
           <a:lstStyle/>
           <a:p>
+            <a:pPr>
+              <a:defRPr>
+                <a:latin typeface="Roboto"/>
+              </a:defRPr>
+            </a:pPr>
             <a:r>
               <a:rPr sz="1100" b="1">
                 <a:solidFill>
                   <a:srgbClr val="5F6F63"/>
                 </a:solidFill>
-                <a:latin typeface="Arial"/>
+                <a:latin typeface="Roboto"/>
               </a:rPr>
               <a:t>WHAT YOU'D DO ABOUT IT</a:t>
             </a:r>
@@ -4530,12 +4637,17 @@
           </a:bodyPr>
           <a:lstStyle/>
           <a:p>
+            <a:pPr>
+              <a:defRPr>
+                <a:latin typeface="Roboto"/>
+              </a:defRPr>
+            </a:pPr>
             <a:r>
               <a:rPr sz="1600" b="0">
                 <a:solidFill>
                   <a:srgbClr val="25342A"/>
                 </a:solidFill>
-                <a:latin typeface="Arial"/>
+                <a:latin typeface="Roboto"/>
               </a:rPr>
               <a:t>The full cost is $4,717 a month; $2,018 of it is shared cost the grant doesn't pay for. Worth asking for as much of it as the funder allows at renewal.</a:t>
             </a:r>
@@ -4564,12 +4676,17 @@
           </a:bodyPr>
           <a:lstStyle/>
           <a:p>
+            <a:pPr>
+              <a:defRPr>
+                <a:latin typeface="Roboto"/>
+              </a:defRPr>
+            </a:pPr>
             <a:r>
               <a:rPr sz="900" b="0">
                 <a:solidFill>
                   <a:srgbClr val="5F6F63"/>
                 </a:solidFill>
-                <a:latin typeface="Arial"/>
+                <a:latin typeface="Roboto"/>
               </a:rPr>
               <a:t>program-cost.pptx</a:t>
             </a:r>
@@ -4598,13 +4715,17 @@
           </a:bodyPr>
           <a:lstStyle/>
           <a:p>
-            <a:pPr algn="ctr"/>
+            <a:pPr algn="ctr">
+              <a:defRPr>
+                <a:latin typeface="Roboto"/>
+              </a:defRPr>
+            </a:pPr>
             <a:r>
               <a:rPr sz="900" b="0">
                 <a:solidFill>
                   <a:srgbClr val="5F6F63"/>
                 </a:solidFill>
-                <a:latin typeface="Arial"/>
+                <a:latin typeface="Roboto"/>
               </a:rPr>
               <a:t>Data retrieved 2pm, Tue 6 Oct 2026 · Sample data</a:t>
             </a:r>
@@ -4633,13 +4754,17 @@
           </a:bodyPr>
           <a:lstStyle/>
           <a:p>
-            <a:pPr algn="r"/>
+            <a:pPr algn="r">
+              <a:defRPr>
+                <a:latin typeface="Roboto"/>
+              </a:defRPr>
+            </a:pPr>
             <a:r>
               <a:rPr sz="900" b="0">
                 <a:solidFill>
                   <a:srgbClr val="5F6F63"/>
                 </a:solidFill>
-                <a:latin typeface="Arial"/>
+                <a:latin typeface="Roboto"/>
               </a:rPr>
               <a:t>Slide 10 of 11</a:t>
             </a:r>
@@ -4703,7 +4828,11 @@
           <a:bodyPr rtlCol="0" anchor="ctr"/>
           <a:lstStyle/>
           <a:p>
-            <a:pPr algn="ctr"/>
+            <a:pPr algn="ctr">
+              <a:defRPr>
+                <a:latin typeface="Roboto"/>
+              </a:defRPr>
+            </a:pPr>
           </a:p>
         </p:txBody>
       </p:sp>
@@ -4729,12 +4858,17 @@
           </a:bodyPr>
           <a:lstStyle/>
           <a:p>
+            <a:pPr>
+              <a:defRPr>
+                <a:latin typeface="Roboto"/>
+              </a:defRPr>
+            </a:pPr>
             <a:r>
               <a:rPr sz="1000" b="0">
                 <a:solidFill>
                   <a:srgbClr val="5F6F63"/>
                 </a:solidFill>
-                <a:latin typeface="Arial"/>
+                <a:latin typeface="Roboto"/>
               </a:rPr>
               <a:t>Sample Community Services Ltd · What does each program really cost?</a:t>
             </a:r>
@@ -4763,12 +4897,17 @@
           </a:bodyPr>
           <a:lstStyle/>
           <a:p>
+            <a:pPr>
+              <a:defRPr>
+                <a:latin typeface="Roboto"/>
+              </a:defRPr>
+            </a:pPr>
             <a:r>
               <a:rPr sz="2400" b="1">
                 <a:solidFill>
                   <a:srgbClr val="25342A"/>
                 </a:solidFill>
-                <a:latin typeface="Arial"/>
+                <a:latin typeface="Roboto"/>
               </a:rPr>
               <a:t>Grant spending, by month · Spend $ · Every program at once</a:t>
             </a:r>
@@ -4797,12 +4936,17 @@
           </a:bodyPr>
           <a:lstStyle/>
           <a:p>
+            <a:pPr>
+              <a:defRPr>
+                <a:latin typeface="Roboto"/>
+              </a:defRPr>
+            </a:pPr>
             <a:r>
               <a:rPr sz="1200" b="0">
                 <a:solidFill>
                   <a:srgbClr val="5F6F63"/>
                 </a:solidFill>
-                <a:latin typeface="Arial"/>
+                <a:latin typeface="Roboto"/>
               </a:rPr>
               <a:t>Grant spending only (the program's direct cost). All programs includes grants that have finished.</a:t>
             </a:r>
@@ -4849,12 +4993,17 @@
           </a:bodyPr>
           <a:lstStyle/>
           <a:p>
+            <a:pPr>
+              <a:defRPr>
+                <a:latin typeface="Roboto"/>
+              </a:defRPr>
+            </a:pPr>
             <a:r>
               <a:rPr sz="900" b="0">
                 <a:solidFill>
                   <a:srgbClr val="5F6F63"/>
                 </a:solidFill>
-                <a:latin typeface="Arial"/>
+                <a:latin typeface="Roboto"/>
               </a:rPr>
               <a:t>program-cost.pptx</a:t>
             </a:r>
@@ -4883,13 +5032,17 @@
           </a:bodyPr>
           <a:lstStyle/>
           <a:p>
-            <a:pPr algn="ctr"/>
+            <a:pPr algn="ctr">
+              <a:defRPr>
+                <a:latin typeface="Roboto"/>
+              </a:defRPr>
+            </a:pPr>
             <a:r>
               <a:rPr sz="900" b="0">
                 <a:solidFill>
                   <a:srgbClr val="5F6F63"/>
                 </a:solidFill>
-                <a:latin typeface="Arial"/>
+                <a:latin typeface="Roboto"/>
               </a:rPr>
               <a:t>Data retrieved 2pm, Tue 6 Oct 2026 · Sample data</a:t>
             </a:r>
@@ -4918,13 +5071,17 @@
           </a:bodyPr>
           <a:lstStyle/>
           <a:p>
-            <a:pPr algn="r"/>
+            <a:pPr algn="r">
+              <a:defRPr>
+                <a:latin typeface="Roboto"/>
+              </a:defRPr>
+            </a:pPr>
             <a:r>
               <a:rPr sz="900" b="0">
                 <a:solidFill>
                   <a:srgbClr val="5F6F63"/>
                 </a:solidFill>
-                <a:latin typeface="Arial"/>
+                <a:latin typeface="Roboto"/>
               </a:rPr>
               <a:t>Slide 11 of 11</a:t>
             </a:r>
@@ -4988,7 +5145,11 @@
           <a:bodyPr rtlCol="0" anchor="ctr"/>
           <a:lstStyle/>
           <a:p>
-            <a:pPr algn="ctr"/>
+            <a:pPr algn="ctr">
+              <a:defRPr>
+                <a:latin typeface="Roboto"/>
+              </a:defRPr>
+            </a:pPr>
           </a:p>
         </p:txBody>
       </p:sp>
@@ -5014,12 +5175,17 @@
           </a:bodyPr>
           <a:lstStyle/>
           <a:p>
+            <a:pPr>
+              <a:defRPr>
+                <a:latin typeface="Roboto"/>
+              </a:defRPr>
+            </a:pPr>
             <a:r>
               <a:rPr sz="1000" b="0">
                 <a:solidFill>
                   <a:srgbClr val="5F6F63"/>
                 </a:solidFill>
-                <a:latin typeface="Arial"/>
+                <a:latin typeface="Roboto"/>
               </a:rPr>
               <a:t>Sample Community Services Ltd · What does each program really cost?</a:t>
             </a:r>
@@ -5048,12 +5214,17 @@
           </a:bodyPr>
           <a:lstStyle/>
           <a:p>
+            <a:pPr>
+              <a:defRPr>
+                <a:latin typeface="Roboto"/>
+              </a:defRPr>
+            </a:pPr>
             <a:r>
               <a:rPr sz="2400" b="1">
                 <a:solidFill>
                   <a:srgbClr val="25342A"/>
                 </a:solidFill>
-                <a:latin typeface="Arial"/>
+                <a:latin typeface="Roboto"/>
               </a:rPr>
               <a:t>Full cost of each program, June 2026 · $ · Program: All programs</a:t>
             </a:r>
@@ -5100,12 +5271,17 @@
           </a:bodyPr>
           <a:lstStyle/>
           <a:p>
+            <a:pPr>
+              <a:defRPr>
+                <a:latin typeface="Roboto"/>
+              </a:defRPr>
+            </a:pPr>
             <a:r>
               <a:rPr sz="900" b="0">
                 <a:solidFill>
                   <a:srgbClr val="5F6F63"/>
                 </a:solidFill>
-                <a:latin typeface="Arial"/>
+                <a:latin typeface="Roboto"/>
               </a:rPr>
               <a:t>program-cost.pptx</a:t>
             </a:r>
@@ -5134,13 +5310,17 @@
           </a:bodyPr>
           <a:lstStyle/>
           <a:p>
-            <a:pPr algn="ctr"/>
+            <a:pPr algn="ctr">
+              <a:defRPr>
+                <a:latin typeface="Roboto"/>
+              </a:defRPr>
+            </a:pPr>
             <a:r>
               <a:rPr sz="900" b="0">
                 <a:solidFill>
                   <a:srgbClr val="5F6F63"/>
                 </a:solidFill>
-                <a:latin typeface="Arial"/>
+                <a:latin typeface="Roboto"/>
               </a:rPr>
               <a:t>Data retrieved 2pm, Tue 6 Oct 2026 · Sample data</a:t>
             </a:r>
@@ -5169,13 +5349,17 @@
           </a:bodyPr>
           <a:lstStyle/>
           <a:p>
-            <a:pPr algn="r"/>
+            <a:pPr algn="r">
+              <a:defRPr>
+                <a:latin typeface="Roboto"/>
+              </a:defRPr>
+            </a:pPr>
             <a:r>
               <a:rPr sz="900" b="0">
                 <a:solidFill>
                   <a:srgbClr val="5F6F63"/>
                 </a:solidFill>
-                <a:latin typeface="Arial"/>
+                <a:latin typeface="Roboto"/>
               </a:rPr>
               <a:t>Slide 2 of 11</a:t>
             </a:r>
@@ -5239,7 +5423,11 @@
           <a:bodyPr rtlCol="0" anchor="ctr"/>
           <a:lstStyle/>
           <a:p>
-            <a:pPr algn="ctr"/>
+            <a:pPr algn="ctr">
+              <a:defRPr>
+                <a:latin typeface="Roboto"/>
+              </a:defRPr>
+            </a:pPr>
           </a:p>
         </p:txBody>
       </p:sp>
@@ -5265,12 +5453,17 @@
           </a:bodyPr>
           <a:lstStyle/>
           <a:p>
+            <a:pPr>
+              <a:defRPr>
+                <a:latin typeface="Roboto"/>
+              </a:defRPr>
+            </a:pPr>
             <a:r>
               <a:rPr sz="1000" b="0">
                 <a:solidFill>
                   <a:srgbClr val="5F6F63"/>
                 </a:solidFill>
-                <a:latin typeface="Arial"/>
+                <a:latin typeface="Roboto"/>
               </a:rPr>
               <a:t>Sample Community Services Ltd · What does each program really cost?</a:t>
             </a:r>
@@ -5299,12 +5492,17 @@
           </a:bodyPr>
           <a:lstStyle/>
           <a:p>
+            <a:pPr>
+              <a:defRPr>
+                <a:latin typeface="Roboto"/>
+              </a:defRPr>
+            </a:pPr>
             <a:r>
               <a:rPr sz="2400" b="1">
                 <a:solidFill>
                   <a:srgbClr val="25342A"/>
                 </a:solidFill>
-                <a:latin typeface="Arial"/>
+                <a:latin typeface="Roboto"/>
               </a:rPr>
               <a:t>Full cost of each program, June 2026 · % of total · Program: All programs</a:t>
             </a:r>
@@ -5351,12 +5549,17 @@
           </a:bodyPr>
           <a:lstStyle/>
           <a:p>
+            <a:pPr>
+              <a:defRPr>
+                <a:latin typeface="Roboto"/>
+              </a:defRPr>
+            </a:pPr>
             <a:r>
               <a:rPr sz="900" b="0">
                 <a:solidFill>
                   <a:srgbClr val="5F6F63"/>
                 </a:solidFill>
-                <a:latin typeface="Arial"/>
+                <a:latin typeface="Roboto"/>
               </a:rPr>
               <a:t>program-cost.pptx</a:t>
             </a:r>
@@ -5385,13 +5588,17 @@
           </a:bodyPr>
           <a:lstStyle/>
           <a:p>
-            <a:pPr algn="ctr"/>
+            <a:pPr algn="ctr">
+              <a:defRPr>
+                <a:latin typeface="Roboto"/>
+              </a:defRPr>
+            </a:pPr>
             <a:r>
               <a:rPr sz="900" b="0">
                 <a:solidFill>
                   <a:srgbClr val="5F6F63"/>
                 </a:solidFill>
-                <a:latin typeface="Arial"/>
+                <a:latin typeface="Roboto"/>
               </a:rPr>
               <a:t>Data retrieved 2pm, Tue 6 Oct 2026 · Sample data</a:t>
             </a:r>
@@ -5420,13 +5627,17 @@
           </a:bodyPr>
           <a:lstStyle/>
           <a:p>
-            <a:pPr algn="r"/>
+            <a:pPr algn="r">
+              <a:defRPr>
+                <a:latin typeface="Roboto"/>
+              </a:defRPr>
+            </a:pPr>
             <a:r>
               <a:rPr sz="900" b="0">
                 <a:solidFill>
                   <a:srgbClr val="5F6F63"/>
                 </a:solidFill>
-                <a:latin typeface="Arial"/>
+                <a:latin typeface="Roboto"/>
               </a:rPr>
               <a:t>Slide 3 of 11</a:t>
             </a:r>
@@ -5490,7 +5701,11 @@
           <a:bodyPr rtlCol="0" anchor="ctr"/>
           <a:lstStyle/>
           <a:p>
-            <a:pPr algn="ctr"/>
+            <a:pPr algn="ctr">
+              <a:defRPr>
+                <a:latin typeface="Roboto"/>
+              </a:defRPr>
+            </a:pPr>
           </a:p>
         </p:txBody>
       </p:sp>
@@ -5516,12 +5731,17 @@
           </a:bodyPr>
           <a:lstStyle/>
           <a:p>
+            <a:pPr>
+              <a:defRPr>
+                <a:latin typeface="Roboto"/>
+              </a:defRPr>
+            </a:pPr>
             <a:r>
               <a:rPr sz="1000" b="0">
                 <a:solidFill>
                   <a:srgbClr val="5F6F63"/>
                 </a:solidFill>
-                <a:latin typeface="Arial"/>
+                <a:latin typeface="Roboto"/>
               </a:rPr>
               <a:t>Sample Community Services Ltd · What does each program really cost?</a:t>
             </a:r>
@@ -5550,12 +5770,17 @@
           </a:bodyPr>
           <a:lstStyle/>
           <a:p>
+            <a:pPr>
+              <a:defRPr>
+                <a:latin typeface="Roboto"/>
+              </a:defRPr>
+            </a:pPr>
             <a:r>
               <a:rPr sz="2400" b="1">
                 <a:solidFill>
                   <a:srgbClr val="25342A"/>
                 </a:solidFill>
-                <a:latin typeface="Arial"/>
+                <a:latin typeface="Roboto"/>
               </a:rPr>
               <a:t>What it shows · Program: All programs</a:t>
             </a:r>
@@ -5603,7 +5828,11 @@
           <a:bodyPr rtlCol="0" anchor="ctr"/>
           <a:lstStyle/>
           <a:p>
-            <a:pPr algn="ctr"/>
+            <a:pPr algn="ctr">
+              <a:defRPr>
+                <a:latin typeface="Roboto"/>
+              </a:defRPr>
+            </a:pPr>
           </a:p>
         </p:txBody>
       </p:sp>
@@ -5629,12 +5858,17 @@
           </a:bodyPr>
           <a:lstStyle/>
           <a:p>
+            <a:pPr>
+              <a:defRPr>
+                <a:latin typeface="Roboto"/>
+              </a:defRPr>
+            </a:pPr>
             <a:r>
               <a:rPr sz="1100" b="1">
                 <a:solidFill>
                   <a:srgbClr val="5F6F63"/>
                 </a:solidFill>
-                <a:latin typeface="Arial"/>
+                <a:latin typeface="Roboto"/>
               </a:rPr>
               <a:t>WHAT IT SHOWS</a:t>
             </a:r>
@@ -5663,12 +5897,17 @@
           </a:bodyPr>
           <a:lstStyle/>
           <a:p>
+            <a:pPr>
+              <a:defRPr>
+                <a:latin typeface="Roboto"/>
+              </a:defRPr>
+            </a:pPr>
             <a:r>
               <a:rPr sz="1600" b="0">
                 <a:solidFill>
                   <a:srgbClr val="25342A"/>
                 </a:solidFill>
-                <a:latin typeface="Arial"/>
+                <a:latin typeface="Roboto"/>
               </a:rPr>
               <a:t>Housing support is the biggest program: $52,424 in June once its share of untied program costs and administration is added to $29,994 of grant spending. Shared costs add 74.8% on top of grant spending across all programs.</a:t>
             </a:r>
@@ -5716,7 +5955,11 @@
           <a:bodyPr rtlCol="0" anchor="ctr"/>
           <a:lstStyle/>
           <a:p>
-            <a:pPr algn="ctr"/>
+            <a:pPr algn="ctr">
+              <a:defRPr>
+                <a:latin typeface="Roboto"/>
+              </a:defRPr>
+            </a:pPr>
           </a:p>
         </p:txBody>
       </p:sp>
@@ -5742,12 +5985,17 @@
           </a:bodyPr>
           <a:lstStyle/>
           <a:p>
+            <a:pPr>
+              <a:defRPr>
+                <a:latin typeface="Roboto"/>
+              </a:defRPr>
+            </a:pPr>
             <a:r>
               <a:rPr sz="1100" b="1">
                 <a:solidFill>
                   <a:srgbClr val="5F6F63"/>
                 </a:solidFill>
-                <a:latin typeface="Arial"/>
+                <a:latin typeface="Roboto"/>
               </a:rPr>
               <a:t>WHAT YOU'D DO ABOUT IT</a:t>
             </a:r>
@@ -5776,12 +6024,17 @@
           </a:bodyPr>
           <a:lstStyle/>
           <a:p>
+            <a:pPr>
+              <a:defRPr>
+                <a:latin typeface="Roboto"/>
+              </a:defRPr>
+            </a:pPr>
             <a:r>
               <a:rPr sz="1600" b="0">
                 <a:solidFill>
                   <a:srgbClr val="25342A"/>
                 </a:solidFill>
-                <a:latin typeface="Arial"/>
+                <a:latin typeface="Roboto"/>
               </a:rPr>
               <a:t>The full cost (not just the grant line) is the number for renewal applications, where the funder lets you recover a share of overheads. Pick a program above to see it on its own.</a:t>
             </a:r>
@@ -5810,12 +6063,17 @@
           </a:bodyPr>
           <a:lstStyle/>
           <a:p>
+            <a:pPr>
+              <a:defRPr>
+                <a:latin typeface="Roboto"/>
+              </a:defRPr>
+            </a:pPr>
             <a:r>
               <a:rPr sz="900" b="0">
                 <a:solidFill>
                   <a:srgbClr val="5F6F63"/>
                 </a:solidFill>
-                <a:latin typeface="Arial"/>
+                <a:latin typeface="Roboto"/>
               </a:rPr>
               <a:t>program-cost.pptx</a:t>
             </a:r>
@@ -5844,13 +6102,17 @@
           </a:bodyPr>
           <a:lstStyle/>
           <a:p>
-            <a:pPr algn="ctr"/>
+            <a:pPr algn="ctr">
+              <a:defRPr>
+                <a:latin typeface="Roboto"/>
+              </a:defRPr>
+            </a:pPr>
             <a:r>
               <a:rPr sz="900" b="0">
                 <a:solidFill>
                   <a:srgbClr val="5F6F63"/>
                 </a:solidFill>
-                <a:latin typeface="Arial"/>
+                <a:latin typeface="Roboto"/>
               </a:rPr>
               <a:t>Data retrieved 2pm, Tue 6 Oct 2026 · Sample data</a:t>
             </a:r>
@@ -5879,13 +6141,17 @@
           </a:bodyPr>
           <a:lstStyle/>
           <a:p>
-            <a:pPr algn="r"/>
+            <a:pPr algn="r">
+              <a:defRPr>
+                <a:latin typeface="Roboto"/>
+              </a:defRPr>
+            </a:pPr>
             <a:r>
               <a:rPr sz="900" b="0">
                 <a:solidFill>
                   <a:srgbClr val="5F6F63"/>
                 </a:solidFill>
-                <a:latin typeface="Arial"/>
+                <a:latin typeface="Roboto"/>
               </a:rPr>
               <a:t>Slide 4 of 11</a:t>
             </a:r>
@@ -5949,7 +6215,11 @@
           <a:bodyPr rtlCol="0" anchor="ctr"/>
           <a:lstStyle/>
           <a:p>
-            <a:pPr algn="ctr"/>
+            <a:pPr algn="ctr">
+              <a:defRPr>
+                <a:latin typeface="Roboto"/>
+              </a:defRPr>
+            </a:pPr>
           </a:p>
         </p:txBody>
       </p:sp>
@@ -5975,12 +6245,17 @@
           </a:bodyPr>
           <a:lstStyle/>
           <a:p>
+            <a:pPr>
+              <a:defRPr>
+                <a:latin typeface="Roboto"/>
+              </a:defRPr>
+            </a:pPr>
             <a:r>
               <a:rPr sz="1000" b="0">
                 <a:solidFill>
                   <a:srgbClr val="5F6F63"/>
                 </a:solidFill>
-                <a:latin typeface="Arial"/>
+                <a:latin typeface="Roboto"/>
               </a:rPr>
               <a:t>Sample Community Services Ltd · What does each program really cost?</a:t>
             </a:r>
@@ -6009,12 +6284,17 @@
           </a:bodyPr>
           <a:lstStyle/>
           <a:p>
+            <a:pPr>
+              <a:defRPr>
+                <a:latin typeface="Roboto"/>
+              </a:defRPr>
+            </a:pPr>
             <a:r>
               <a:rPr sz="2400" b="1">
                 <a:solidFill>
                   <a:srgbClr val="25342A"/>
                 </a:solidFill>
-                <a:latin typeface="Arial"/>
+                <a:latin typeface="Roboto"/>
               </a:rPr>
               <a:t>What it shows · Program: Housing support</a:t>
             </a:r>
@@ -6062,7 +6342,11 @@
           <a:bodyPr rtlCol="0" anchor="ctr"/>
           <a:lstStyle/>
           <a:p>
-            <a:pPr algn="ctr"/>
+            <a:pPr algn="ctr">
+              <a:defRPr>
+                <a:latin typeface="Roboto"/>
+              </a:defRPr>
+            </a:pPr>
           </a:p>
         </p:txBody>
       </p:sp>
@@ -6088,12 +6372,17 @@
           </a:bodyPr>
           <a:lstStyle/>
           <a:p>
+            <a:pPr>
+              <a:defRPr>
+                <a:latin typeface="Roboto"/>
+              </a:defRPr>
+            </a:pPr>
             <a:r>
               <a:rPr sz="1100" b="1">
                 <a:solidFill>
                   <a:srgbClr val="5F6F63"/>
                 </a:solidFill>
-                <a:latin typeface="Arial"/>
+                <a:latin typeface="Roboto"/>
               </a:rPr>
               <a:t>WHAT IT SHOWS</a:t>
             </a:r>
@@ -6122,12 +6411,17 @@
           </a:bodyPr>
           <a:lstStyle/>
           <a:p>
+            <a:pPr>
+              <a:defRPr>
+                <a:latin typeface="Roboto"/>
+              </a:defRPr>
+            </a:pPr>
             <a:r>
               <a:rPr sz="1600" b="0">
                 <a:solidFill>
                   <a:srgbClr val="25342A"/>
                 </a:solidFill>
-                <a:latin typeface="Arial"/>
+                <a:latin typeface="Roboto"/>
               </a:rPr>
               <a:t>Housing support cost $52,424 in full in June: $29,994 paid by the State Housing Program grant, and $22,430 of shared costs no grant covers. It has spent 92.7% of its budget to date, with $193,097 left and 6 months to go.</a:t>
             </a:r>
@@ -6175,7 +6469,11 @@
           <a:bodyPr rtlCol="0" anchor="ctr"/>
           <a:lstStyle/>
           <a:p>
-            <a:pPr algn="ctr"/>
+            <a:pPr algn="ctr">
+              <a:defRPr>
+                <a:latin typeface="Roboto"/>
+              </a:defRPr>
+            </a:pPr>
           </a:p>
         </p:txBody>
       </p:sp>
@@ -6201,12 +6499,17 @@
           </a:bodyPr>
           <a:lstStyle/>
           <a:p>
+            <a:pPr>
+              <a:defRPr>
+                <a:latin typeface="Roboto"/>
+              </a:defRPr>
+            </a:pPr>
             <a:r>
               <a:rPr sz="1100" b="1">
                 <a:solidFill>
                   <a:srgbClr val="5F6F63"/>
                 </a:solidFill>
-                <a:latin typeface="Arial"/>
+                <a:latin typeface="Roboto"/>
               </a:rPr>
               <a:t>WHAT YOU'D DO ABOUT IT</a:t>
             </a:r>
@@ -6235,12 +6538,17 @@
           </a:bodyPr>
           <a:lstStyle/>
           <a:p>
+            <a:pPr>
+              <a:defRPr>
+                <a:latin typeface="Roboto"/>
+              </a:defRPr>
+            </a:pPr>
             <a:r>
               <a:rPr sz="1600" b="0">
                 <a:solidFill>
                   <a:srgbClr val="25342A"/>
                 </a:solidFill>
-                <a:latin typeface="Arial"/>
+                <a:latin typeface="Roboto"/>
               </a:rPr>
               <a:t>The full cost is $52,424 a month; $22,430 of it is shared cost the grant doesn't pay for. Worth asking for as much of it as the funder allows at renewal.</a:t>
             </a:r>
@@ -6269,12 +6577,17 @@
           </a:bodyPr>
           <a:lstStyle/>
           <a:p>
+            <a:pPr>
+              <a:defRPr>
+                <a:latin typeface="Roboto"/>
+              </a:defRPr>
+            </a:pPr>
             <a:r>
               <a:rPr sz="900" b="0">
                 <a:solidFill>
                   <a:srgbClr val="5F6F63"/>
                 </a:solidFill>
-                <a:latin typeface="Arial"/>
+                <a:latin typeface="Roboto"/>
               </a:rPr>
               <a:t>program-cost.pptx</a:t>
             </a:r>
@@ -6303,13 +6616,17 @@
           </a:bodyPr>
           <a:lstStyle/>
           <a:p>
-            <a:pPr algn="ctr"/>
+            <a:pPr algn="ctr">
+              <a:defRPr>
+                <a:latin typeface="Roboto"/>
+              </a:defRPr>
+            </a:pPr>
             <a:r>
               <a:rPr sz="900" b="0">
                 <a:solidFill>
                   <a:srgbClr val="5F6F63"/>
                 </a:solidFill>
-                <a:latin typeface="Arial"/>
+                <a:latin typeface="Roboto"/>
               </a:rPr>
               <a:t>Data retrieved 2pm, Tue 6 Oct 2026 · Sample data</a:t>
             </a:r>
@@ -6338,13 +6655,17 @@
           </a:bodyPr>
           <a:lstStyle/>
           <a:p>
-            <a:pPr algn="r"/>
+            <a:pPr algn="r">
+              <a:defRPr>
+                <a:latin typeface="Roboto"/>
+              </a:defRPr>
+            </a:pPr>
             <a:r>
               <a:rPr sz="900" b="0">
                 <a:solidFill>
                   <a:srgbClr val="5F6F63"/>
                 </a:solidFill>
-                <a:latin typeface="Arial"/>
+                <a:latin typeface="Roboto"/>
               </a:rPr>
               <a:t>Slide 5 of 11</a:t>
             </a:r>
@@ -6408,7 +6729,11 @@
           <a:bodyPr rtlCol="0" anchor="ctr"/>
           <a:lstStyle/>
           <a:p>
-            <a:pPr algn="ctr"/>
+            <a:pPr algn="ctr">
+              <a:defRPr>
+                <a:latin typeface="Roboto"/>
+              </a:defRPr>
+            </a:pPr>
           </a:p>
         </p:txBody>
       </p:sp>
@@ -6434,12 +6759,17 @@
           </a:bodyPr>
           <a:lstStyle/>
           <a:p>
+            <a:pPr>
+              <a:defRPr>
+                <a:latin typeface="Roboto"/>
+              </a:defRPr>
+            </a:pPr>
             <a:r>
               <a:rPr sz="1000" b="0">
                 <a:solidFill>
                   <a:srgbClr val="5F6F63"/>
                 </a:solidFill>
-                <a:latin typeface="Arial"/>
+                <a:latin typeface="Roboto"/>
               </a:rPr>
               <a:t>Sample Community Services Ltd · What does each program really cost?</a:t>
             </a:r>
@@ -6468,12 +6798,17 @@
           </a:bodyPr>
           <a:lstStyle/>
           <a:p>
+            <a:pPr>
+              <a:defRPr>
+                <a:latin typeface="Roboto"/>
+              </a:defRPr>
+            </a:pPr>
             <a:r>
               <a:rPr sz="2400" b="1">
                 <a:solidFill>
                   <a:srgbClr val="25342A"/>
                 </a:solidFill>
-                <a:latin typeface="Arial"/>
+                <a:latin typeface="Roboto"/>
               </a:rPr>
               <a:t>What it shows · Program: Youth outreach</a:t>
             </a:r>
@@ -6521,7 +6856,11 @@
           <a:bodyPr rtlCol="0" anchor="ctr"/>
           <a:lstStyle/>
           <a:p>
-            <a:pPr algn="ctr"/>
+            <a:pPr algn="ctr">
+              <a:defRPr>
+                <a:latin typeface="Roboto"/>
+              </a:defRPr>
+            </a:pPr>
           </a:p>
         </p:txBody>
       </p:sp>
@@ -6547,12 +6886,17 @@
           </a:bodyPr>
           <a:lstStyle/>
           <a:p>
+            <a:pPr>
+              <a:defRPr>
+                <a:latin typeface="Roboto"/>
+              </a:defRPr>
+            </a:pPr>
             <a:r>
               <a:rPr sz="1100" b="1">
                 <a:solidFill>
                   <a:srgbClr val="5F6F63"/>
                 </a:solidFill>
-                <a:latin typeface="Arial"/>
+                <a:latin typeface="Roboto"/>
               </a:rPr>
               <a:t>WHAT IT SHOWS</a:t>
             </a:r>
@@ -6581,12 +6925,17 @@
           </a:bodyPr>
           <a:lstStyle/>
           <a:p>
+            <a:pPr>
+              <a:defRPr>
+                <a:latin typeface="Roboto"/>
+              </a:defRPr>
+            </a:pPr>
             <a:r>
               <a:rPr sz="1600" b="0">
                 <a:solidFill>
                   <a:srgbClr val="25342A"/>
                 </a:solidFill>
-                <a:latin typeface="Arial"/>
+                <a:latin typeface="Roboto"/>
               </a:rPr>
               <a:t>Youth outreach cost $35,596 in full in June: $20,366 paid by the State Department of Families grant, and $15,230 of shared costs no grant covers. It has spent 99.5% of its budget to date, with $241,274 left and 12 months to go.</a:t>
             </a:r>
@@ -6634,7 +6983,11 @@
           <a:bodyPr rtlCol="0" anchor="ctr"/>
           <a:lstStyle/>
           <a:p>
-            <a:pPr algn="ctr"/>
+            <a:pPr algn="ctr">
+              <a:defRPr>
+                <a:latin typeface="Roboto"/>
+              </a:defRPr>
+            </a:pPr>
           </a:p>
         </p:txBody>
       </p:sp>
@@ -6660,12 +7013,17 @@
           </a:bodyPr>
           <a:lstStyle/>
           <a:p>
+            <a:pPr>
+              <a:defRPr>
+                <a:latin typeface="Roboto"/>
+              </a:defRPr>
+            </a:pPr>
             <a:r>
               <a:rPr sz="1100" b="1">
                 <a:solidFill>
                   <a:srgbClr val="5F6F63"/>
                 </a:solidFill>
-                <a:latin typeface="Arial"/>
+                <a:latin typeface="Roboto"/>
               </a:rPr>
               <a:t>WHAT YOU'D DO ABOUT IT</a:t>
             </a:r>
@@ -6694,12 +7052,17 @@
           </a:bodyPr>
           <a:lstStyle/>
           <a:p>
+            <a:pPr>
+              <a:defRPr>
+                <a:latin typeface="Roboto"/>
+              </a:defRPr>
+            </a:pPr>
             <a:r>
               <a:rPr sz="1600" b="0">
                 <a:solidFill>
                   <a:srgbClr val="25342A"/>
                 </a:solidFill>
-                <a:latin typeface="Arial"/>
+                <a:latin typeface="Roboto"/>
               </a:rPr>
               <a:t>The full cost is $35,596 a month; $15,230 of it is shared cost the grant doesn't pay for. Worth asking for as much of it as the funder allows at renewal.</a:t>
             </a:r>
@@ -6728,12 +7091,17 @@
           </a:bodyPr>
           <a:lstStyle/>
           <a:p>
+            <a:pPr>
+              <a:defRPr>
+                <a:latin typeface="Roboto"/>
+              </a:defRPr>
+            </a:pPr>
             <a:r>
               <a:rPr sz="900" b="0">
                 <a:solidFill>
                   <a:srgbClr val="5F6F63"/>
                 </a:solidFill>
-                <a:latin typeface="Arial"/>
+                <a:latin typeface="Roboto"/>
               </a:rPr>
               <a:t>program-cost.pptx</a:t>
             </a:r>
@@ -6762,13 +7130,17 @@
           </a:bodyPr>
           <a:lstStyle/>
           <a:p>
-            <a:pPr algn="ctr"/>
+            <a:pPr algn="ctr">
+              <a:defRPr>
+                <a:latin typeface="Roboto"/>
+              </a:defRPr>
+            </a:pPr>
             <a:r>
               <a:rPr sz="900" b="0">
                 <a:solidFill>
                   <a:srgbClr val="5F6F63"/>
                 </a:solidFill>
-                <a:latin typeface="Arial"/>
+                <a:latin typeface="Roboto"/>
               </a:rPr>
               <a:t>Data retrieved 2pm, Tue 6 Oct 2026 · Sample data</a:t>
             </a:r>
@@ -6797,13 +7169,17 @@
           </a:bodyPr>
           <a:lstStyle/>
           <a:p>
-            <a:pPr algn="r"/>
+            <a:pPr algn="r">
+              <a:defRPr>
+                <a:latin typeface="Roboto"/>
+              </a:defRPr>
+            </a:pPr>
             <a:r>
               <a:rPr sz="900" b="0">
                 <a:solidFill>
                   <a:srgbClr val="5F6F63"/>
                 </a:solidFill>
-                <a:latin typeface="Arial"/>
+                <a:latin typeface="Roboto"/>
               </a:rPr>
               <a:t>Slide 6 of 11</a:t>
             </a:r>
@@ -6867,7 +7243,11 @@
           <a:bodyPr rtlCol="0" anchor="ctr"/>
           <a:lstStyle/>
           <a:p>
-            <a:pPr algn="ctr"/>
+            <a:pPr algn="ctr">
+              <a:defRPr>
+                <a:latin typeface="Roboto"/>
+              </a:defRPr>
+            </a:pPr>
           </a:p>
         </p:txBody>
       </p:sp>
@@ -6893,12 +7273,17 @@
           </a:bodyPr>
           <a:lstStyle/>
           <a:p>
+            <a:pPr>
+              <a:defRPr>
+                <a:latin typeface="Roboto"/>
+              </a:defRPr>
+            </a:pPr>
             <a:r>
               <a:rPr sz="1000" b="0">
                 <a:solidFill>
                   <a:srgbClr val="5F6F63"/>
                 </a:solidFill>
-                <a:latin typeface="Arial"/>
+                <a:latin typeface="Roboto"/>
               </a:rPr>
               <a:t>Sample Community Services Ltd · What does each program really cost?</a:t>
             </a:r>
@@ -6927,12 +7312,17 @@
           </a:bodyPr>
           <a:lstStyle/>
           <a:p>
+            <a:pPr>
+              <a:defRPr>
+                <a:latin typeface="Roboto"/>
+              </a:defRPr>
+            </a:pPr>
             <a:r>
               <a:rPr sz="2400" b="1">
                 <a:solidFill>
                   <a:srgbClr val="25342A"/>
                 </a:solidFill>
-                <a:latin typeface="Arial"/>
+                <a:latin typeface="Roboto"/>
               </a:rPr>
               <a:t>What it shows · Program: Mental health first aid</a:t>
             </a:r>
@@ -6980,7 +7370,11 @@
           <a:bodyPr rtlCol="0" anchor="ctr"/>
           <a:lstStyle/>
           <a:p>
-            <a:pPr algn="ctr"/>
+            <a:pPr algn="ctr">
+              <a:defRPr>
+                <a:latin typeface="Roboto"/>
+              </a:defRPr>
+            </a:pPr>
           </a:p>
         </p:txBody>
       </p:sp>
@@ -7006,12 +7400,17 @@
           </a:bodyPr>
           <a:lstStyle/>
           <a:p>
+            <a:pPr>
+              <a:defRPr>
+                <a:latin typeface="Roboto"/>
+              </a:defRPr>
+            </a:pPr>
             <a:r>
               <a:rPr sz="1100" b="1">
                 <a:solidFill>
                   <a:srgbClr val="5F6F63"/>
                 </a:solidFill>
-                <a:latin typeface="Arial"/>
+                <a:latin typeface="Roboto"/>
               </a:rPr>
               <a:t>WHAT IT SHOWS</a:t>
             </a:r>
@@ -7040,12 +7439,17 @@
           </a:bodyPr>
           <a:lstStyle/>
           <a:p>
+            <a:pPr>
+              <a:defRPr>
+                <a:latin typeface="Roboto"/>
+              </a:defRPr>
+            </a:pPr>
             <a:r>
               <a:rPr sz="1600" b="0">
                 <a:solidFill>
                   <a:srgbClr val="25342A"/>
                 </a:solidFill>
-                <a:latin typeface="Arial"/>
+                <a:latin typeface="Roboto"/>
               </a:rPr>
               <a:t>Mental health first aid cost $17,123 in full in June: $9,797 paid by the Federal health program grant, and $7,326 of shared costs no grant covers. It has spent 94.4% of its budget to date, with $91,669 left and 9 months to go.</a:t>
             </a:r>
@@ -7093,7 +7497,11 @@
           <a:bodyPr rtlCol="0" anchor="ctr"/>
           <a:lstStyle/>
           <a:p>
-            <a:pPr algn="ctr"/>
+            <a:pPr algn="ctr">
+              <a:defRPr>
+                <a:latin typeface="Roboto"/>
+              </a:defRPr>
+            </a:pPr>
           </a:p>
         </p:txBody>
       </p:sp>
@@ -7119,12 +7527,17 @@
           </a:bodyPr>
           <a:lstStyle/>
           <a:p>
+            <a:pPr>
+              <a:defRPr>
+                <a:latin typeface="Roboto"/>
+              </a:defRPr>
+            </a:pPr>
             <a:r>
               <a:rPr sz="1100" b="1">
                 <a:solidFill>
                   <a:srgbClr val="5F6F63"/>
                 </a:solidFill>
-                <a:latin typeface="Arial"/>
+                <a:latin typeface="Roboto"/>
               </a:rPr>
               <a:t>WHAT YOU'D DO ABOUT IT</a:t>
             </a:r>
@@ -7153,12 +7566,17 @@
           </a:bodyPr>
           <a:lstStyle/>
           <a:p>
+            <a:pPr>
+              <a:defRPr>
+                <a:latin typeface="Roboto"/>
+              </a:defRPr>
+            </a:pPr>
             <a:r>
               <a:rPr sz="1600" b="0">
                 <a:solidFill>
                   <a:srgbClr val="25342A"/>
                 </a:solidFill>
-                <a:latin typeface="Arial"/>
+                <a:latin typeface="Roboto"/>
               </a:rPr>
               <a:t>The full cost is $17,123 a month; $7,326 of it is shared cost the grant doesn't pay for. Worth asking for as much of it as the funder allows at renewal.</a:t>
             </a:r>
@@ -7187,12 +7605,17 @@
           </a:bodyPr>
           <a:lstStyle/>
           <a:p>
+            <a:pPr>
+              <a:defRPr>
+                <a:latin typeface="Roboto"/>
+              </a:defRPr>
+            </a:pPr>
             <a:r>
               <a:rPr sz="900" b="0">
                 <a:solidFill>
                   <a:srgbClr val="5F6F63"/>
                 </a:solidFill>
-                <a:latin typeface="Arial"/>
+                <a:latin typeface="Roboto"/>
               </a:rPr>
               <a:t>program-cost.pptx</a:t>
             </a:r>
@@ -7221,13 +7644,17 @@
           </a:bodyPr>
           <a:lstStyle/>
           <a:p>
-            <a:pPr algn="ctr"/>
+            <a:pPr algn="ctr">
+              <a:defRPr>
+                <a:latin typeface="Roboto"/>
+              </a:defRPr>
+            </a:pPr>
             <a:r>
               <a:rPr sz="900" b="0">
                 <a:solidFill>
                   <a:srgbClr val="5F6F63"/>
                 </a:solidFill>
-                <a:latin typeface="Arial"/>
+                <a:latin typeface="Roboto"/>
               </a:rPr>
               <a:t>Data retrieved 2pm, Tue 6 Oct 2026 · Sample data</a:t>
             </a:r>
@@ -7256,13 +7683,17 @@
           </a:bodyPr>
           <a:lstStyle/>
           <a:p>
-            <a:pPr algn="r"/>
+            <a:pPr algn="r">
+              <a:defRPr>
+                <a:latin typeface="Roboto"/>
+              </a:defRPr>
+            </a:pPr>
             <a:r>
               <a:rPr sz="900" b="0">
                 <a:solidFill>
                   <a:srgbClr val="5F6F63"/>
                 </a:solidFill>
-                <a:latin typeface="Arial"/>
+                <a:latin typeface="Roboto"/>
               </a:rPr>
               <a:t>Slide 7 of 11</a:t>
             </a:r>
@@ -7326,7 +7757,11 @@
           <a:bodyPr rtlCol="0" anchor="ctr"/>
           <a:lstStyle/>
           <a:p>
-            <a:pPr algn="ctr"/>
+            <a:pPr algn="ctr">
+              <a:defRPr>
+                <a:latin typeface="Roboto"/>
+              </a:defRPr>
+            </a:pPr>
           </a:p>
         </p:txBody>
       </p:sp>
@@ -7352,12 +7787,17 @@
           </a:bodyPr>
           <a:lstStyle/>
           <a:p>
+            <a:pPr>
+              <a:defRPr>
+                <a:latin typeface="Roboto"/>
+              </a:defRPr>
+            </a:pPr>
             <a:r>
               <a:rPr sz="1000" b="0">
                 <a:solidFill>
                   <a:srgbClr val="5F6F63"/>
                 </a:solidFill>
-                <a:latin typeface="Arial"/>
+                <a:latin typeface="Roboto"/>
               </a:rPr>
               <a:t>Sample Community Services Ltd · What does each program really cost?</a:t>
             </a:r>
@@ -7386,12 +7826,17 @@
           </a:bodyPr>
           <a:lstStyle/>
           <a:p>
+            <a:pPr>
+              <a:defRPr>
+                <a:latin typeface="Roboto"/>
+              </a:defRPr>
+            </a:pPr>
             <a:r>
               <a:rPr sz="2400" b="1">
                 <a:solidFill>
                   <a:srgbClr val="25342A"/>
                 </a:solidFill>
-                <a:latin typeface="Arial"/>
+                <a:latin typeface="Roboto"/>
               </a:rPr>
               <a:t>What it shows · Program: Digital literacy</a:t>
             </a:r>
@@ -7439,7 +7884,11 @@
           <a:bodyPr rtlCol="0" anchor="ctr"/>
           <a:lstStyle/>
           <a:p>
-            <a:pPr algn="ctr"/>
+            <a:pPr algn="ctr">
+              <a:defRPr>
+                <a:latin typeface="Roboto"/>
+              </a:defRPr>
+            </a:pPr>
           </a:p>
         </p:txBody>
       </p:sp>
@@ -7465,12 +7914,17 @@
           </a:bodyPr>
           <a:lstStyle/>
           <a:p>
+            <a:pPr>
+              <a:defRPr>
+                <a:latin typeface="Roboto"/>
+              </a:defRPr>
+            </a:pPr>
             <a:r>
               <a:rPr sz="1100" b="1">
                 <a:solidFill>
                   <a:srgbClr val="5F6F63"/>
                 </a:solidFill>
-                <a:latin typeface="Arial"/>
+                <a:latin typeface="Roboto"/>
               </a:rPr>
               <a:t>WHAT IT SHOWS</a:t>
             </a:r>
@@ -7499,12 +7953,17 @@
           </a:bodyPr>
           <a:lstStyle/>
           <a:p>
+            <a:pPr>
+              <a:defRPr>
+                <a:latin typeface="Roboto"/>
+              </a:defRPr>
+            </a:pPr>
             <a:r>
               <a:rPr sz="1600" b="0">
                 <a:solidFill>
                   <a:srgbClr val="25342A"/>
                 </a:solidFill>
-                <a:latin typeface="Arial"/>
+                <a:latin typeface="Roboto"/>
               </a:rPr>
               <a:t>Digital literacy cost $7,544 in full in June: $4,316 paid by the Philanthropic foundation grant, and $3,228 of shared costs no grant covers. It has spent 99.3% of its budget to date, with $45,313 left and 9 months to go.</a:t>
             </a:r>
@@ -7552,7 +8011,11 @@
           <a:bodyPr rtlCol="0" anchor="ctr"/>
           <a:lstStyle/>
           <a:p>
-            <a:pPr algn="ctr"/>
+            <a:pPr algn="ctr">
+              <a:defRPr>
+                <a:latin typeface="Roboto"/>
+              </a:defRPr>
+            </a:pPr>
           </a:p>
         </p:txBody>
       </p:sp>
@@ -7578,12 +8041,17 @@
           </a:bodyPr>
           <a:lstStyle/>
           <a:p>
+            <a:pPr>
+              <a:defRPr>
+                <a:latin typeface="Roboto"/>
+              </a:defRPr>
+            </a:pPr>
             <a:r>
               <a:rPr sz="1100" b="1">
                 <a:solidFill>
                   <a:srgbClr val="5F6F63"/>
                 </a:solidFill>
-                <a:latin typeface="Arial"/>
+                <a:latin typeface="Roboto"/>
               </a:rPr>
               <a:t>WHAT YOU'D DO ABOUT IT</a:t>
             </a:r>
@@ -7612,12 +8080,17 @@
           </a:bodyPr>
           <a:lstStyle/>
           <a:p>
+            <a:pPr>
+              <a:defRPr>
+                <a:latin typeface="Roboto"/>
+              </a:defRPr>
+            </a:pPr>
             <a:r>
               <a:rPr sz="1600" b="0">
                 <a:solidFill>
                   <a:srgbClr val="25342A"/>
                 </a:solidFill>
-                <a:latin typeface="Arial"/>
+                <a:latin typeface="Roboto"/>
               </a:rPr>
               <a:t>The full cost is $7,544 a month; $3,228 of it is shared cost the grant doesn't pay for. Worth asking for as much of it as the funder allows at renewal.</a:t>
             </a:r>
@@ -7646,12 +8119,17 @@
           </a:bodyPr>
           <a:lstStyle/>
           <a:p>
+            <a:pPr>
+              <a:defRPr>
+                <a:latin typeface="Roboto"/>
+              </a:defRPr>
+            </a:pPr>
             <a:r>
               <a:rPr sz="900" b="0">
                 <a:solidFill>
                   <a:srgbClr val="5F6F63"/>
                 </a:solidFill>
-                <a:latin typeface="Arial"/>
+                <a:latin typeface="Roboto"/>
               </a:rPr>
               <a:t>program-cost.pptx</a:t>
             </a:r>
@@ -7680,13 +8158,17 @@
           </a:bodyPr>
           <a:lstStyle/>
           <a:p>
-            <a:pPr algn="ctr"/>
+            <a:pPr algn="ctr">
+              <a:defRPr>
+                <a:latin typeface="Roboto"/>
+              </a:defRPr>
+            </a:pPr>
             <a:r>
               <a:rPr sz="900" b="0">
                 <a:solidFill>
                   <a:srgbClr val="5F6F63"/>
                 </a:solidFill>
-                <a:latin typeface="Arial"/>
+                <a:latin typeface="Roboto"/>
               </a:rPr>
               <a:t>Data retrieved 2pm, Tue 6 Oct 2026 · Sample data</a:t>
             </a:r>
@@ -7715,13 +8197,17 @@
           </a:bodyPr>
           <a:lstStyle/>
           <a:p>
-            <a:pPr algn="r"/>
+            <a:pPr algn="r">
+              <a:defRPr>
+                <a:latin typeface="Roboto"/>
+              </a:defRPr>
+            </a:pPr>
             <a:r>
               <a:rPr sz="900" b="0">
                 <a:solidFill>
                   <a:srgbClr val="5F6F63"/>
                 </a:solidFill>
-                <a:latin typeface="Arial"/>
+                <a:latin typeface="Roboto"/>
               </a:rPr>
               <a:t>Slide 8 of 11</a:t>
             </a:r>
@@ -7785,7 +8271,11 @@
           <a:bodyPr rtlCol="0" anchor="ctr"/>
           <a:lstStyle/>
           <a:p>
-            <a:pPr algn="ctr"/>
+            <a:pPr algn="ctr">
+              <a:defRPr>
+                <a:latin typeface="Roboto"/>
+              </a:defRPr>
+            </a:pPr>
           </a:p>
         </p:txBody>
       </p:sp>
@@ -7811,12 +8301,17 @@
           </a:bodyPr>
           <a:lstStyle/>
           <a:p>
+            <a:pPr>
+              <a:defRPr>
+                <a:latin typeface="Roboto"/>
+              </a:defRPr>
+            </a:pPr>
             <a:r>
               <a:rPr sz="1000" b="0">
                 <a:solidFill>
                   <a:srgbClr val="5F6F63"/>
                 </a:solidFill>
-                <a:latin typeface="Arial"/>
+                <a:latin typeface="Roboto"/>
               </a:rPr>
               <a:t>Sample Community Services Ltd · What does each program really cost?</a:t>
             </a:r>
@@ -7845,12 +8340,17 @@
           </a:bodyPr>
           <a:lstStyle/>
           <a:p>
+            <a:pPr>
+              <a:defRPr>
+                <a:latin typeface="Roboto"/>
+              </a:defRPr>
+            </a:pPr>
             <a:r>
               <a:rPr sz="2400" b="1">
                 <a:solidFill>
                   <a:srgbClr val="25342A"/>
                 </a:solidFill>
-                <a:latin typeface="Arial"/>
+                <a:latin typeface="Roboto"/>
               </a:rPr>
               <a:t>What it shows · Program: Community meals (2025-26)</a:t>
             </a:r>
@@ -7898,7 +8398,11 @@
           <a:bodyPr rtlCol="0" anchor="ctr"/>
           <a:lstStyle/>
           <a:p>
-            <a:pPr algn="ctr"/>
+            <a:pPr algn="ctr">
+              <a:defRPr>
+                <a:latin typeface="Roboto"/>
+              </a:defRPr>
+            </a:pPr>
           </a:p>
         </p:txBody>
       </p:sp>
@@ -7924,12 +8428,17 @@
           </a:bodyPr>
           <a:lstStyle/>
           <a:p>
+            <a:pPr>
+              <a:defRPr>
+                <a:latin typeface="Roboto"/>
+              </a:defRPr>
+            </a:pPr>
             <a:r>
               <a:rPr sz="1100" b="1">
                 <a:solidFill>
                   <a:srgbClr val="5F6F63"/>
                 </a:solidFill>
-                <a:latin typeface="Arial"/>
+                <a:latin typeface="Roboto"/>
               </a:rPr>
               <a:t>WHAT IT SHOWS</a:t>
             </a:r>
@@ -7958,12 +8467,17 @@
           </a:bodyPr>
           <a:lstStyle/>
           <a:p>
+            <a:pPr>
+              <a:defRPr>
+                <a:latin typeface="Roboto"/>
+              </a:defRPr>
+            </a:pPr>
             <a:r>
               <a:rPr sz="1600" b="0">
                 <a:solidFill>
                   <a:srgbClr val="25342A"/>
                 </a:solidFill>
-                <a:latin typeface="Arial"/>
+                <a:latin typeface="Roboto"/>
               </a:rPr>
               <a:t>Community meals (2025-26) cost $6,467 in full in June: $3,700 paid by the Local council community grant grant, and $2,767 of shared costs no grant covers. It has spent 97.7% of its budget to date, with $1,000 left and 0 months to go.</a:t>
             </a:r>
@@ -8011,7 +8525,11 @@
           <a:bodyPr rtlCol="0" anchor="ctr"/>
           <a:lstStyle/>
           <a:p>
-            <a:pPr algn="ctr"/>
+            <a:pPr algn="ctr">
+              <a:defRPr>
+                <a:latin typeface="Roboto"/>
+              </a:defRPr>
+            </a:pPr>
           </a:p>
         </p:txBody>
       </p:sp>
@@ -8037,12 +8555,17 @@
           </a:bodyPr>
           <a:lstStyle/>
           <a:p>
+            <a:pPr>
+              <a:defRPr>
+                <a:latin typeface="Roboto"/>
+              </a:defRPr>
+            </a:pPr>
             <a:r>
               <a:rPr sz="1100" b="1">
                 <a:solidFill>
                   <a:srgbClr val="5F6F63"/>
                 </a:solidFill>
-                <a:latin typeface="Arial"/>
+                <a:latin typeface="Roboto"/>
               </a:rPr>
               <a:t>WHAT YOU'D DO ABOUT IT</a:t>
             </a:r>
@@ -8071,12 +8594,17 @@
           </a:bodyPr>
           <a:lstStyle/>
           <a:p>
+            <a:pPr>
+              <a:defRPr>
+                <a:latin typeface="Roboto"/>
+              </a:defRPr>
+            </a:pPr>
             <a:r>
               <a:rPr sz="1600" b="0">
                 <a:solidFill>
                   <a:srgbClr val="25342A"/>
                 </a:solidFill>
-                <a:latin typeface="Arial"/>
+                <a:latin typeface="Roboto"/>
               </a:rPr>
               <a:t>The full cost is $6,467 a month; $2,767 of it is shared cost the grant doesn't pay for. Worth asking for as much of it as the funder allows at renewal.</a:t>
             </a:r>
@@ -8105,12 +8633,17 @@
           </a:bodyPr>
           <a:lstStyle/>
           <a:p>
+            <a:pPr>
+              <a:defRPr>
+                <a:latin typeface="Roboto"/>
+              </a:defRPr>
+            </a:pPr>
             <a:r>
               <a:rPr sz="900" b="0">
                 <a:solidFill>
                   <a:srgbClr val="5F6F63"/>
                 </a:solidFill>
-                <a:latin typeface="Arial"/>
+                <a:latin typeface="Roboto"/>
               </a:rPr>
               <a:t>program-cost.pptx</a:t>
             </a:r>
@@ -8139,13 +8672,17 @@
           </a:bodyPr>
           <a:lstStyle/>
           <a:p>
-            <a:pPr algn="ctr"/>
+            <a:pPr algn="ctr">
+              <a:defRPr>
+                <a:latin typeface="Roboto"/>
+              </a:defRPr>
+            </a:pPr>
             <a:r>
               <a:rPr sz="900" b="0">
                 <a:solidFill>
                   <a:srgbClr val="5F6F63"/>
                 </a:solidFill>
-                <a:latin typeface="Arial"/>
+                <a:latin typeface="Roboto"/>
               </a:rPr>
               <a:t>Data retrieved 2pm, Tue 6 Oct 2026 · Sample data</a:t>
             </a:r>
@@ -8174,13 +8711,17 @@
           </a:bodyPr>
           <a:lstStyle/>
           <a:p>
-            <a:pPr algn="r"/>
+            <a:pPr algn="r">
+              <a:defRPr>
+                <a:latin typeface="Roboto"/>
+              </a:defRPr>
+            </a:pPr>
             <a:r>
               <a:rPr sz="900" b="0">
                 <a:solidFill>
                   <a:srgbClr val="5F6F63"/>
                 </a:solidFill>
-                <a:latin typeface="Arial"/>
+                <a:latin typeface="Roboto"/>
               </a:rPr>
               <a:t>Slide 9 of 11</a:t>
             </a:r>

--- a/media/exports/reports/2026-06/program-cost.pptx
+++ b/media/exports/reports/2026-06/program-cost.pptx
@@ -6,16 +6,13 @@
   </p:sldMasterIdLst>
   <p:sldIdLst>
     <p:sldId id="256" r:id="rId7"/>
-    <p:sldId id="257" r:id="rId8"/>
-    <p:sldId id="258" r:id="rId9"/>
-    <p:sldId id="259" r:id="rId10"/>
-    <p:sldId id="260" r:id="rId11"/>
-    <p:sldId id="261" r:id="rId12"/>
-    <p:sldId id="262" r:id="rId13"/>
-    <p:sldId id="263" r:id="rId14"/>
-    <p:sldId id="264" r:id="rId15"/>
-    <p:sldId id="265" r:id="rId16"/>
-    <p:sldId id="266" r:id="rId17"/>
+    <p:sldId id="257" r:id="rId9"/>
+    <p:sldId id="258" r:id="rId10"/>
+    <p:sldId id="259" r:id="rId11"/>
+    <p:sldId id="260" r:id="rId12"/>
+    <p:sldId id="261" r:id="rId13"/>
+    <p:sldId id="262" r:id="rId14"/>
+    <p:sldId id="263" r:id="rId15"/>
   </p:sldIdLst>
   <p:sldSz cx="12191695" cy="6858000" type="screen4x3"/>
   <p:notesSz cx="6858000" cy="9144000"/>
@@ -121,8 +118,19 @@
 <c:chartSpace xmlns:c="http://schemas.openxmlformats.org/drawingml/2006/chart" xmlns:a="http://schemas.openxmlformats.org/drawingml/2006/main" xmlns:r="http://schemas.openxmlformats.org/officeDocument/2006/relationships">
   <c:date1904 val="0"/>
   <c:chart>
-    <c:autoTitleDeleted val="0"/>
+    <c:autoTitleDeleted val="1"/>
     <c:plotArea>
+      <c:layout>
+        <c:manualLayout>
+          <c:layoutTarget val="inner"/>
+          <c:xMode val="edge"/>
+          <c:yMode val="edge"/>
+          <c:x val="0.3"/>
+          <c:y val="0.03"/>
+          <c:w val="0.58"/>
+          <c:h val="0.88"/>
+        </c:manualLayout>
+      </c:layout>
       <c:barChart>
         <c:barDir val="bar"/>
         <c:grouping val="clustered"/>
@@ -135,7 +143,7 @@
               <c:strCache>
                 <c:ptCount val="1"/>
                 <c:pt idx="0">
-                  <c:v>Value</c:v>
+                  <c:v>$</c:v>
                 </c:pt>
               </c:strCache>
             </c:strRef>
@@ -249,7 +257,7 @@
             <a:lstStyle/>
             <a:p>
               <a:pPr>
-                <a:defRPr sz="1100"/>
+                <a:defRPr sz="1000"/>
               </a:pPr>
             </a:p>
           </c:txPr>
@@ -286,7 +294,7 @@
           <a:lstStyle/>
           <a:p>
             <a:pPr>
-              <a:defRPr sz="1200"/>
+              <a:defRPr sz="1100"/>
             </a:pPr>
           </a:p>
         </c:txPr>
@@ -299,7 +307,10 @@
       </c:catAx>
       <c:valAx>
         <c:axId val="-2113994440"/>
-        <c:scaling/>
+        <c:scaling>
+          <c:max val="60287.6"/>
+          <c:min val="0.0"/>
+        </c:scaling>
         <c:delete/>
         <c:axPos val="b"/>
         <c:majorTickMark val="out"/>
@@ -332,223 +343,21 @@
 <file path=ppt/charts/chart2.xml><?xml version="1.0" encoding="utf-8"?>
 <c:chartSpace xmlns:c="http://schemas.openxmlformats.org/drawingml/2006/chart" xmlns:a="http://schemas.openxmlformats.org/drawingml/2006/main" xmlns:r="http://schemas.openxmlformats.org/officeDocument/2006/relationships">
   <c:date1904 val="0"/>
-  <c:chart>
-    <c:autoTitleDeleted val="0"/>
-    <c:plotArea>
-      <c:barChart>
-        <c:barDir val="bar"/>
-        <c:grouping val="clustered"/>
-        <c:ser>
-          <c:idx val="0"/>
-          <c:order val="0"/>
-          <c:tx>
-            <c:strRef>
-              <c:f>Sheet1!$B$1</c:f>
-              <c:strCache>
-                <c:ptCount val="1"/>
-                <c:pt idx="0">
-                  <c:v>Value</c:v>
-                </c:pt>
-              </c:strCache>
-            </c:strRef>
-          </c:tx>
-          <c:dPt>
-            <c:idx val="0"/>
-            <c:spPr>
-              <a:solidFill>
-                <a:srgbClr val="0E9F6E"/>
-              </a:solidFill>
-            </c:spPr>
-          </c:dPt>
-          <c:dPt>
-            <c:idx val="1"/>
-            <c:spPr>
-              <a:solidFill>
-                <a:srgbClr val="0E9F6E"/>
-              </a:solidFill>
-            </c:spPr>
-          </c:dPt>
-          <c:dPt>
-            <c:idx val="2"/>
-            <c:spPr>
-              <a:solidFill>
-                <a:srgbClr val="0E9F6E"/>
-              </a:solidFill>
-            </c:spPr>
-          </c:dPt>
-          <c:dPt>
-            <c:idx val="3"/>
-            <c:spPr>
-              <a:solidFill>
-                <a:srgbClr val="0E9F6E"/>
-              </a:solidFill>
-            </c:spPr>
-          </c:dPt>
-          <c:dPt>
-            <c:idx val="4"/>
-            <c:spPr>
-              <a:solidFill>
-                <a:srgbClr val="0E9F6E"/>
-              </a:solidFill>
-            </c:spPr>
-          </c:dPt>
-          <c:dPt>
-            <c:idx val="5"/>
-            <c:spPr>
-              <a:solidFill>
-                <a:srgbClr val="0E9F6E"/>
-              </a:solidFill>
-            </c:spPr>
-          </c:dPt>
-          <c:cat>
-            <c:strRef>
-              <c:f>Sheet1!$A$2:$A$7</c:f>
-              <c:strCache>
-                <c:ptCount val="6"/>
-                <c:pt idx="0">
-                  <c:v>Volunteer coordinator</c:v>
-                </c:pt>
-                <c:pt idx="1">
-                  <c:v>Community meals (2025-26)</c:v>
-                </c:pt>
-                <c:pt idx="2">
-                  <c:v>Digital literacy</c:v>
-                </c:pt>
-                <c:pt idx="3">
-                  <c:v>Mental health first aid</c:v>
-                </c:pt>
-                <c:pt idx="4">
-                  <c:v>Youth outreach</c:v>
-                </c:pt>
-                <c:pt idx="5">
-                  <c:v>Housing support</c:v>
-                </c:pt>
-              </c:strCache>
-            </c:strRef>
-          </c:cat>
-          <c:val>
-            <c:numRef>
-              <c:f>Sheet1!$B$2:$B$7</c:f>
-              <c:numCache>
-                <c:formatCode>0.0"%";[Red](0.0"%")</c:formatCode>
-                <c:ptCount val="6"/>
-                <c:pt idx="0">
-                  <c:v>3.8</c:v>
-                </c:pt>
-                <c:pt idx="1">
-                  <c:v>5.2</c:v>
-                </c:pt>
-                <c:pt idx="2">
-                  <c:v>6.1</c:v>
-                </c:pt>
-                <c:pt idx="3">
-                  <c:v>13.8</c:v>
-                </c:pt>
-                <c:pt idx="4">
-                  <c:v>28.7</c:v>
-                </c:pt>
-                <c:pt idx="5">
-                  <c:v>42.3</c:v>
-                </c:pt>
-              </c:numCache>
-            </c:numRef>
-          </c:val>
-        </c:ser>
-        <c:dLbls>
-          <c:numFmt formatCode="0.0&quot;%&quot;;[Red](0.0&quot;%&quot;)" sourceLinked="0"/>
-          <c:txPr>
-            <a:bodyPr/>
-            <a:lstStyle/>
-            <a:p>
-              <a:pPr>
-                <a:defRPr sz="1100"/>
-              </a:pPr>
-            </a:p>
-          </c:txPr>
-          <c:dLblPos val="outEnd"/>
-          <c:showLegendKey val="0"/>
-          <c:showVal val="1"/>
-          <c:showCatName val="0"/>
-          <c:showSerName val="0"/>
-          <c:showPercent val="0"/>
-          <c:showBubbleSize val="0"/>
-          <c:showLeaderLines val="1"/>
-        </c:dLbls>
-        <c:gapWidth val="60"/>
-        <c:axId val="-2068027336"/>
-        <c:axId val="-2113994440"/>
-      </c:barChart>
-      <c:catAx>
-        <c:axId val="-2068027336"/>
-        <c:scaling>
-          <c:orientation val="minMax"/>
-        </c:scaling>
-        <c:delete val="0"/>
-        <c:axPos val="l"/>
-        <c:majorTickMark val="out"/>
-        <c:minorTickMark val="none"/>
-        <c:tickLblPos val="nextTo"/>
-        <c:spPr>
-          <a:ln>
-            <a:noFill/>
-          </a:ln>
-        </c:spPr>
-        <c:txPr>
-          <a:bodyPr/>
-          <a:lstStyle/>
-          <a:p>
-            <a:pPr>
-              <a:defRPr sz="1200"/>
-            </a:pPr>
-          </a:p>
-        </c:txPr>
-        <c:crossAx val="-2113994440"/>
-        <c:crosses val="autoZero"/>
-        <c:auto val="1"/>
-        <c:lblAlgn val="ctr"/>
-        <c:lblOffset val="100"/>
-        <c:noMultiLvlLbl val="0"/>
-      </c:catAx>
-      <c:valAx>
-        <c:axId val="-2113994440"/>
-        <c:scaling/>
-        <c:delete/>
-        <c:axPos val="b"/>
-        <c:majorTickMark val="out"/>
-        <c:minorTickMark val="none"/>
-        <c:tickLblPos val="nextTo"/>
-        <c:crossAx val="-2068027336"/>
-        <c:crosses val="autoZero"/>
-      </c:valAx>
-    </c:plotArea>
-    <c:dispBlanksAs val="gap"/>
-  </c:chart>
-  <c:txPr>
-    <a:bodyPr/>
-    <a:lstStyle/>
-    <a:p>
-      <a:pPr>
-        <a:defRPr sz="1800">
-          <a:latin typeface="Roboto"/>
-        </a:defRPr>
-      </a:pPr>
-      <a:endParaRPr lang="en-US"/>
-    </a:p>
-  </c:txPr>
-  <c:externalData r:id="rId1">
-    <c:autoUpdate val="0"/>
-  </c:externalData>
-</c:chartSpace>
-</file>
-
-<file path=ppt/charts/chart3.xml><?xml version="1.0" encoding="utf-8"?>
-<c:chartSpace xmlns:c="http://schemas.openxmlformats.org/drawingml/2006/chart" xmlns:a="http://schemas.openxmlformats.org/drawingml/2006/main" xmlns:r="http://schemas.openxmlformats.org/officeDocument/2006/relationships">
-  <c:date1904 val="0"/>
   <c:roundedCorners val="0"/>
   <c:chart>
-    <c:autoTitleDeleted val="0"/>
+    <c:autoTitleDeleted val="1"/>
     <c:plotArea>
-      <c:layout/>
+      <c:layout>
+        <c:manualLayout>
+          <c:layoutTarget val="inner"/>
+          <c:xMode val="edge"/>
+          <c:yMode val="edge"/>
+          <c:x val="0.11"/>
+          <c:y val="0.05"/>
+          <c:w val="0.86"/>
+          <c:h val="0.8"/>
+        </c:manualLayout>
+      </c:layout>
       <c:areaChart>
         <c:grouping val="standard"/>
         <c:varyColors val="0"/>
@@ -561,7 +370,7 @@
               <c:strCache>
                 <c:ptCount val="1"/>
                 <c:pt idx="0">
-                  <c:v>Value</c:v>
+                  <c:v>Spend $</c:v>
                 </c:pt>
               </c:strCache>
             </c:strRef>
@@ -656,67 +465,67 @@
                 <c:formatCode>$#,##0;[Red]($#,##0);"-"</c:formatCode>
                 <c:ptCount val="21"/>
                 <c:pt idx="0">
-                  <c:v>26600</c:v>
+                  <c:v>0</c:v>
                 </c:pt>
                 <c:pt idx="1">
-                  <c:v>31800</c:v>
+                  <c:v>0</c:v>
                 </c:pt>
                 <c:pt idx="2">
-                  <c:v>29700</c:v>
+                  <c:v>0</c:v>
                 </c:pt>
                 <c:pt idx="3">
-                  <c:v>62700</c:v>
+                  <c:v>0</c:v>
                 </c:pt>
                 <c:pt idx="4">
-                  <c:v>61700</c:v>
+                  <c:v>0</c:v>
                 </c:pt>
                 <c:pt idx="5">
-                  <c:v>54500</c:v>
+                  <c:v>0</c:v>
                 </c:pt>
                 <c:pt idx="6">
-                  <c:v>61500</c:v>
+                  <c:v>0</c:v>
                 </c:pt>
                 <c:pt idx="7">
-                  <c:v>61700</c:v>
+                  <c:v>0</c:v>
                 </c:pt>
                 <c:pt idx="8">
-                  <c:v>52200</c:v>
+                  <c:v>0</c:v>
                 </c:pt>
                 <c:pt idx="9">
-                  <c:v>59063</c:v>
+                  <c:v>0</c:v>
                 </c:pt>
                 <c:pt idx="10">
-                  <c:v>61544</c:v>
+                  <c:v>0</c:v>
                 </c:pt>
                 <c:pt idx="11">
-                  <c:v>62137</c:v>
+                  <c:v>0</c:v>
                 </c:pt>
                 <c:pt idx="12">
-                  <c:v>69185</c:v>
+                  <c:v>0</c:v>
                 </c:pt>
                 <c:pt idx="13">
-                  <c:v>70164</c:v>
+                  <c:v>0</c:v>
                 </c:pt>
                 <c:pt idx="14">
-                  <c:v>68793</c:v>
+                  <c:v>0</c:v>
                 </c:pt>
                 <c:pt idx="15">
-                  <c:v>59785</c:v>
+                  <c:v>30502</c:v>
                 </c:pt>
                 <c:pt idx="16">
-                  <c:v>55759</c:v>
+                  <c:v>26508</c:v>
                 </c:pt>
                 <c:pt idx="17">
-                  <c:v>53806</c:v>
+                  <c:v>24832</c:v>
                 </c:pt>
                 <c:pt idx="18">
-                  <c:v>66729</c:v>
+                  <c:v>23730</c:v>
                 </c:pt>
                 <c:pt idx="19">
-                  <c:v>72245</c:v>
+                  <c:v>31337</c:v>
                 </c:pt>
                 <c:pt idx="20">
-                  <c:v>70872</c:v>
+                  <c:v>29994</c:v>
                 </c:pt>
               </c:numCache>
             </c:numRef>
@@ -758,12 +567,15 @@
         <c:auto val="1"/>
         <c:lblAlgn val="ctr"/>
         <c:lblOffset val="100"/>
+        <c:tickLblSkip val="3"/>
         <c:noMultiLvlLbl val="0"/>
       </c:catAx>
       <c:valAx>
         <c:axId val="-2100718248"/>
         <c:scaling>
           <c:orientation val="minMax"/>
+          <c:max val="40000.0"/>
+          <c:min val="0.0"/>
         </c:scaling>
         <c:delete val="0"/>
         <c:axPos val="l"/>
@@ -797,6 +609,7 @@
         <c:crossAx val="-2101159928"/>
         <c:crosses val="autoZero"/>
         <c:crossBetween val="midCat"/>
+        <c:majorUnit val="10000.0"/>
       </c:valAx>
     </c:plotArea>
     <c:plotVisOnly val="1"/>
@@ -819,6 +632,2386 @@
     <c:autoUpdate val="0"/>
   </c:externalData>
 </c:chartSpace>
+</file>
+
+<file path=ppt/charts/chart3.xml><?xml version="1.0" encoding="utf-8"?>
+<c:chartSpace xmlns:c="http://schemas.openxmlformats.org/drawingml/2006/chart" xmlns:a="http://schemas.openxmlformats.org/drawingml/2006/main" xmlns:r="http://schemas.openxmlformats.org/officeDocument/2006/relationships">
+  <c:date1904 val="0"/>
+  <c:roundedCorners val="0"/>
+  <c:chart>
+    <c:autoTitleDeleted val="1"/>
+    <c:plotArea>
+      <c:layout>
+        <c:manualLayout>
+          <c:layoutTarget val="inner"/>
+          <c:xMode val="edge"/>
+          <c:yMode val="edge"/>
+          <c:x val="0.11"/>
+          <c:y val="0.05"/>
+          <c:w val="0.86"/>
+          <c:h val="0.8"/>
+        </c:manualLayout>
+      </c:layout>
+      <c:areaChart>
+        <c:grouping val="standard"/>
+        <c:varyColors val="0"/>
+        <c:ser>
+          <c:idx val="0"/>
+          <c:order val="0"/>
+          <c:tx>
+            <c:strRef>
+              <c:f>Sheet1!$B$1</c:f>
+              <c:strCache>
+                <c:ptCount val="1"/>
+                <c:pt idx="0">
+                  <c:v>Spend $</c:v>
+                </c:pt>
+              </c:strCache>
+            </c:strRef>
+          </c:tx>
+          <c:spPr>
+            <a:solidFill>
+              <a:srgbClr val="0E9F6E">
+                <a:alpha val="25000"/>
+              </a:srgbClr>
+            </a:solidFill>
+            <a:ln w="31750">
+              <a:solidFill>
+                <a:srgbClr val="0E9F6E"/>
+              </a:solidFill>
+            </a:ln>
+          </c:spPr>
+          <c:cat>
+            <c:strRef>
+              <c:f>Sheet1!$A$2:$A$22</c:f>
+              <c:strCache>
+                <c:ptCount val="21"/>
+                <c:pt idx="0">
+                  <c:v>Oct 24</c:v>
+                </c:pt>
+                <c:pt idx="1">
+                  <c:v>Nov 24</c:v>
+                </c:pt>
+                <c:pt idx="2">
+                  <c:v>Dec 24</c:v>
+                </c:pt>
+                <c:pt idx="3">
+                  <c:v>Jan 25</c:v>
+                </c:pt>
+                <c:pt idx="4">
+                  <c:v>Feb 25</c:v>
+                </c:pt>
+                <c:pt idx="5">
+                  <c:v>Mar 25</c:v>
+                </c:pt>
+                <c:pt idx="6">
+                  <c:v>Apr 25</c:v>
+                </c:pt>
+                <c:pt idx="7">
+                  <c:v>May 25</c:v>
+                </c:pt>
+                <c:pt idx="8">
+                  <c:v>Jun 25</c:v>
+                </c:pt>
+                <c:pt idx="9">
+                  <c:v>Jul 25</c:v>
+                </c:pt>
+                <c:pt idx="10">
+                  <c:v>Aug 25</c:v>
+                </c:pt>
+                <c:pt idx="11">
+                  <c:v>Sep 25</c:v>
+                </c:pt>
+                <c:pt idx="12">
+                  <c:v>Oct 25</c:v>
+                </c:pt>
+                <c:pt idx="13">
+                  <c:v>Nov 25</c:v>
+                </c:pt>
+                <c:pt idx="14">
+                  <c:v>Dec 25</c:v>
+                </c:pt>
+                <c:pt idx="15">
+                  <c:v>Jan 26</c:v>
+                </c:pt>
+                <c:pt idx="16">
+                  <c:v>Feb 26</c:v>
+                </c:pt>
+                <c:pt idx="17">
+                  <c:v>Mar 26</c:v>
+                </c:pt>
+                <c:pt idx="18">
+                  <c:v>Apr 26</c:v>
+                </c:pt>
+                <c:pt idx="19">
+                  <c:v>May 26</c:v>
+                </c:pt>
+                <c:pt idx="20">
+                  <c:v>Jun 26</c:v>
+                </c:pt>
+              </c:strCache>
+            </c:strRef>
+          </c:cat>
+          <c:val>
+            <c:numRef>
+              <c:f>Sheet1!$B$2:$B$22</c:f>
+              <c:numCache>
+                <c:formatCode>$#,##0;[Red]($#,##0);"-"</c:formatCode>
+                <c:ptCount val="21"/>
+                <c:pt idx="0">
+                  <c:v>0</c:v>
+                </c:pt>
+                <c:pt idx="1">
+                  <c:v>0</c:v>
+                </c:pt>
+                <c:pt idx="2">
+                  <c:v>0</c:v>
+                </c:pt>
+                <c:pt idx="3">
+                  <c:v>0</c:v>
+                </c:pt>
+                <c:pt idx="4">
+                  <c:v>0</c:v>
+                </c:pt>
+                <c:pt idx="5">
+                  <c:v>0</c:v>
+                </c:pt>
+                <c:pt idx="6">
+                  <c:v>0</c:v>
+                </c:pt>
+                <c:pt idx="7">
+                  <c:v>0</c:v>
+                </c:pt>
+                <c:pt idx="8">
+                  <c:v>0</c:v>
+                </c:pt>
+                <c:pt idx="9">
+                  <c:v>17363</c:v>
+                </c:pt>
+                <c:pt idx="10">
+                  <c:v>21144</c:v>
+                </c:pt>
+                <c:pt idx="11">
+                  <c:v>17537</c:v>
+                </c:pt>
+                <c:pt idx="12">
+                  <c:v>21925</c:v>
+                </c:pt>
+                <c:pt idx="13">
+                  <c:v>21079</c:v>
+                </c:pt>
+                <c:pt idx="14">
+                  <c:v>19272</c:v>
+                </c:pt>
+                <c:pt idx="15">
+                  <c:v>21157</c:v>
+                </c:pt>
+                <c:pt idx="16">
+                  <c:v>20743</c:v>
+                </c:pt>
+                <c:pt idx="17">
+                  <c:v>16515</c:v>
+                </c:pt>
+                <c:pt idx="18">
+                  <c:v>20451</c:v>
+                </c:pt>
+                <c:pt idx="19">
+                  <c:v>21174</c:v>
+                </c:pt>
+                <c:pt idx="20">
+                  <c:v>20366</c:v>
+                </c:pt>
+              </c:numCache>
+            </c:numRef>
+          </c:val>
+        </c:ser>
+        <c:dLbls>
+          <c:showLegendKey val="0"/>
+          <c:showVal val="0"/>
+          <c:showCatName val="0"/>
+          <c:showSerName val="0"/>
+          <c:showPercent val="0"/>
+          <c:showBubbleSize val="0"/>
+        </c:dLbls>
+        <c:axId val="-2101159928"/>
+        <c:axId val="-2100718248"/>
+      </c:areaChart>
+      <c:catAx>
+        <c:axId val="-2101159928"/>
+        <c:scaling>
+          <c:orientation val="minMax"/>
+        </c:scaling>
+        <c:delete val="0"/>
+        <c:axPos val="b"/>
+        <c:numFmt formatCode="General" sourceLinked="1"/>
+        <c:majorTickMark val="out"/>
+        <c:minorTickMark val="none"/>
+        <c:tickLblPos val="nextTo"/>
+        <c:txPr>
+          <a:bodyPr/>
+          <a:lstStyle/>
+          <a:p>
+            <a:pPr>
+              <a:defRPr sz="1000"/>
+            </a:pPr>
+          </a:p>
+        </c:txPr>
+        <c:crossAx val="-2100718248"/>
+        <c:crosses val="autoZero"/>
+        <c:auto val="1"/>
+        <c:lblAlgn val="ctr"/>
+        <c:lblOffset val="100"/>
+        <c:tickLblSkip val="3"/>
+        <c:noMultiLvlLbl val="0"/>
+      </c:catAx>
+      <c:valAx>
+        <c:axId val="-2100718248"/>
+        <c:scaling>
+          <c:orientation val="minMax"/>
+          <c:max val="25000.0"/>
+          <c:min val="0.0"/>
+        </c:scaling>
+        <c:delete val="0"/>
+        <c:axPos val="l"/>
+        <c:majorGridlines>
+          <c:spPr>
+            <a:ln>
+              <a:solidFill>
+                <a:srgbClr val="E6EAE7"/>
+              </a:solidFill>
+            </a:ln>
+          </c:spPr>
+        </c:majorGridlines>
+        <c:numFmt formatCode="$#,##0;[Red]($#,##0);&quot;-&quot;" sourceLinked="0"/>
+        <c:majorTickMark val="out"/>
+        <c:minorTickMark val="none"/>
+        <c:tickLblPos val="nextTo"/>
+        <c:spPr>
+          <a:ln>
+            <a:noFill/>
+          </a:ln>
+        </c:spPr>
+        <c:txPr>
+          <a:bodyPr/>
+          <a:lstStyle/>
+          <a:p>
+            <a:pPr>
+              <a:defRPr sz="1000"/>
+            </a:pPr>
+          </a:p>
+        </c:txPr>
+        <c:crossAx val="-2101159928"/>
+        <c:crosses val="autoZero"/>
+        <c:crossBetween val="midCat"/>
+        <c:majorUnit val="5000.0"/>
+      </c:valAx>
+    </c:plotArea>
+    <c:plotVisOnly val="1"/>
+    <c:dispBlanksAs val="zero"/>
+    <c:showDLblsOverMax val="0"/>
+  </c:chart>
+  <c:txPr>
+    <a:bodyPr/>
+    <a:lstStyle/>
+    <a:p>
+      <a:pPr>
+        <a:defRPr sz="1800">
+          <a:latin typeface="Roboto"/>
+        </a:defRPr>
+      </a:pPr>
+      <a:endParaRPr/>
+    </a:p>
+  </c:txPr>
+  <c:externalData r:id="rId1">
+    <c:autoUpdate val="0"/>
+  </c:externalData>
+</c:chartSpace>
+</file>
+
+<file path=ppt/charts/chart4.xml><?xml version="1.0" encoding="utf-8"?>
+<c:chartSpace xmlns:c="http://schemas.openxmlformats.org/drawingml/2006/chart" xmlns:a="http://schemas.openxmlformats.org/drawingml/2006/main" xmlns:r="http://schemas.openxmlformats.org/officeDocument/2006/relationships">
+  <c:date1904 val="0"/>
+  <c:roundedCorners val="0"/>
+  <c:chart>
+    <c:autoTitleDeleted val="1"/>
+    <c:plotArea>
+      <c:layout>
+        <c:manualLayout>
+          <c:layoutTarget val="inner"/>
+          <c:xMode val="edge"/>
+          <c:yMode val="edge"/>
+          <c:x val="0.11"/>
+          <c:y val="0.05"/>
+          <c:w val="0.86"/>
+          <c:h val="0.8"/>
+        </c:manualLayout>
+      </c:layout>
+      <c:areaChart>
+        <c:grouping val="standard"/>
+        <c:varyColors val="0"/>
+        <c:ser>
+          <c:idx val="0"/>
+          <c:order val="0"/>
+          <c:tx>
+            <c:strRef>
+              <c:f>Sheet1!$B$1</c:f>
+              <c:strCache>
+                <c:ptCount val="1"/>
+                <c:pt idx="0">
+                  <c:v>Spend $</c:v>
+                </c:pt>
+              </c:strCache>
+            </c:strRef>
+          </c:tx>
+          <c:spPr>
+            <a:solidFill>
+              <a:srgbClr val="0E9F6E">
+                <a:alpha val="25000"/>
+              </a:srgbClr>
+            </a:solidFill>
+            <a:ln w="31750">
+              <a:solidFill>
+                <a:srgbClr val="0E9F6E"/>
+              </a:solidFill>
+            </a:ln>
+          </c:spPr>
+          <c:cat>
+            <c:strRef>
+              <c:f>Sheet1!$A$2:$A$22</c:f>
+              <c:strCache>
+                <c:ptCount val="21"/>
+                <c:pt idx="0">
+                  <c:v>Oct 24</c:v>
+                </c:pt>
+                <c:pt idx="1">
+                  <c:v>Nov 24</c:v>
+                </c:pt>
+                <c:pt idx="2">
+                  <c:v>Dec 24</c:v>
+                </c:pt>
+                <c:pt idx="3">
+                  <c:v>Jan 25</c:v>
+                </c:pt>
+                <c:pt idx="4">
+                  <c:v>Feb 25</c:v>
+                </c:pt>
+                <c:pt idx="5">
+                  <c:v>Mar 25</c:v>
+                </c:pt>
+                <c:pt idx="6">
+                  <c:v>Apr 25</c:v>
+                </c:pt>
+                <c:pt idx="7">
+                  <c:v>May 25</c:v>
+                </c:pt>
+                <c:pt idx="8">
+                  <c:v>Jun 25</c:v>
+                </c:pt>
+                <c:pt idx="9">
+                  <c:v>Jul 25</c:v>
+                </c:pt>
+                <c:pt idx="10">
+                  <c:v>Aug 25</c:v>
+                </c:pt>
+                <c:pt idx="11">
+                  <c:v>Sep 25</c:v>
+                </c:pt>
+                <c:pt idx="12">
+                  <c:v>Oct 25</c:v>
+                </c:pt>
+                <c:pt idx="13">
+                  <c:v>Nov 25</c:v>
+                </c:pt>
+                <c:pt idx="14">
+                  <c:v>Dec 25</c:v>
+                </c:pt>
+                <c:pt idx="15">
+                  <c:v>Jan 26</c:v>
+                </c:pt>
+                <c:pt idx="16">
+                  <c:v>Feb 26</c:v>
+                </c:pt>
+                <c:pt idx="17">
+                  <c:v>Mar 26</c:v>
+                </c:pt>
+                <c:pt idx="18">
+                  <c:v>Apr 26</c:v>
+                </c:pt>
+                <c:pt idx="19">
+                  <c:v>May 26</c:v>
+                </c:pt>
+                <c:pt idx="20">
+                  <c:v>Jun 26</c:v>
+                </c:pt>
+              </c:strCache>
+            </c:strRef>
+          </c:cat>
+          <c:val>
+            <c:numRef>
+              <c:f>Sheet1!$B$2:$B$22</c:f>
+              <c:numCache>
+                <c:formatCode>$#,##0;[Red]($#,##0);"-"</c:formatCode>
+                <c:ptCount val="21"/>
+                <c:pt idx="0">
+                  <c:v>0</c:v>
+                </c:pt>
+                <c:pt idx="1">
+                  <c:v>0</c:v>
+                </c:pt>
+                <c:pt idx="2">
+                  <c:v>0</c:v>
+                </c:pt>
+                <c:pt idx="3">
+                  <c:v>0</c:v>
+                </c:pt>
+                <c:pt idx="4">
+                  <c:v>0</c:v>
+                </c:pt>
+                <c:pt idx="5">
+                  <c:v>0</c:v>
+                </c:pt>
+                <c:pt idx="6">
+                  <c:v>0</c:v>
+                </c:pt>
+                <c:pt idx="7">
+                  <c:v>0</c:v>
+                </c:pt>
+                <c:pt idx="8">
+                  <c:v>0</c:v>
+                </c:pt>
+                <c:pt idx="9">
+                  <c:v>0</c:v>
+                </c:pt>
+                <c:pt idx="10">
+                  <c:v>0</c:v>
+                </c:pt>
+                <c:pt idx="11">
+                  <c:v>0</c:v>
+                </c:pt>
+                <c:pt idx="12">
+                  <c:v>0</c:v>
+                </c:pt>
+                <c:pt idx="13">
+                  <c:v>0</c:v>
+                </c:pt>
+                <c:pt idx="14">
+                  <c:v>0</c:v>
+                </c:pt>
+                <c:pt idx="15">
+                  <c:v>0</c:v>
+                </c:pt>
+                <c:pt idx="16">
+                  <c:v>0</c:v>
+                </c:pt>
+                <c:pt idx="17">
+                  <c:v>0</c:v>
+                </c:pt>
+                <c:pt idx="18">
+                  <c:v>9584</c:v>
+                </c:pt>
+                <c:pt idx="19">
+                  <c:v>8950</c:v>
+                </c:pt>
+                <c:pt idx="20">
+                  <c:v>9797</c:v>
+                </c:pt>
+              </c:numCache>
+            </c:numRef>
+          </c:val>
+        </c:ser>
+        <c:dLbls>
+          <c:showLegendKey val="0"/>
+          <c:showVal val="0"/>
+          <c:showCatName val="0"/>
+          <c:showSerName val="0"/>
+          <c:showPercent val="0"/>
+          <c:showBubbleSize val="0"/>
+        </c:dLbls>
+        <c:axId val="-2101159928"/>
+        <c:axId val="-2100718248"/>
+      </c:areaChart>
+      <c:catAx>
+        <c:axId val="-2101159928"/>
+        <c:scaling>
+          <c:orientation val="minMax"/>
+        </c:scaling>
+        <c:delete val="0"/>
+        <c:axPos val="b"/>
+        <c:numFmt formatCode="General" sourceLinked="1"/>
+        <c:majorTickMark val="out"/>
+        <c:minorTickMark val="none"/>
+        <c:tickLblPos val="nextTo"/>
+        <c:txPr>
+          <a:bodyPr/>
+          <a:lstStyle/>
+          <a:p>
+            <a:pPr>
+              <a:defRPr sz="1000"/>
+            </a:pPr>
+          </a:p>
+        </c:txPr>
+        <c:crossAx val="-2100718248"/>
+        <c:crosses val="autoZero"/>
+        <c:auto val="1"/>
+        <c:lblAlgn val="ctr"/>
+        <c:lblOffset val="100"/>
+        <c:tickLblSkip val="3"/>
+        <c:noMultiLvlLbl val="0"/>
+      </c:catAx>
+      <c:valAx>
+        <c:axId val="-2100718248"/>
+        <c:scaling>
+          <c:orientation val="minMax"/>
+          <c:max val="12000.0"/>
+          <c:min val="0.0"/>
+        </c:scaling>
+        <c:delete val="0"/>
+        <c:axPos val="l"/>
+        <c:majorGridlines>
+          <c:spPr>
+            <a:ln>
+              <a:solidFill>
+                <a:srgbClr val="E6EAE7"/>
+              </a:solidFill>
+            </a:ln>
+          </c:spPr>
+        </c:majorGridlines>
+        <c:numFmt formatCode="$#,##0;[Red]($#,##0);&quot;-&quot;" sourceLinked="0"/>
+        <c:majorTickMark val="out"/>
+        <c:minorTickMark val="none"/>
+        <c:tickLblPos val="nextTo"/>
+        <c:spPr>
+          <a:ln>
+            <a:noFill/>
+          </a:ln>
+        </c:spPr>
+        <c:txPr>
+          <a:bodyPr/>
+          <a:lstStyle/>
+          <a:p>
+            <a:pPr>
+              <a:defRPr sz="1000"/>
+            </a:pPr>
+          </a:p>
+        </c:txPr>
+        <c:crossAx val="-2101159928"/>
+        <c:crosses val="autoZero"/>
+        <c:crossBetween val="midCat"/>
+        <c:majorUnit val="2000.0"/>
+      </c:valAx>
+    </c:plotArea>
+    <c:plotVisOnly val="1"/>
+    <c:dispBlanksAs val="zero"/>
+    <c:showDLblsOverMax val="0"/>
+  </c:chart>
+  <c:txPr>
+    <a:bodyPr/>
+    <a:lstStyle/>
+    <a:p>
+      <a:pPr>
+        <a:defRPr sz="1800">
+          <a:latin typeface="Roboto"/>
+        </a:defRPr>
+      </a:pPr>
+      <a:endParaRPr/>
+    </a:p>
+  </c:txPr>
+  <c:externalData r:id="rId1">
+    <c:autoUpdate val="0"/>
+  </c:externalData>
+</c:chartSpace>
+</file>
+
+<file path=ppt/charts/chart5.xml><?xml version="1.0" encoding="utf-8"?>
+<c:chartSpace xmlns:c="http://schemas.openxmlformats.org/drawingml/2006/chart" xmlns:a="http://schemas.openxmlformats.org/drawingml/2006/main" xmlns:r="http://schemas.openxmlformats.org/officeDocument/2006/relationships">
+  <c:date1904 val="0"/>
+  <c:roundedCorners val="0"/>
+  <c:chart>
+    <c:autoTitleDeleted val="1"/>
+    <c:plotArea>
+      <c:layout>
+        <c:manualLayout>
+          <c:layoutTarget val="inner"/>
+          <c:xMode val="edge"/>
+          <c:yMode val="edge"/>
+          <c:x val="0.11"/>
+          <c:y val="0.05"/>
+          <c:w val="0.86"/>
+          <c:h val="0.8"/>
+        </c:manualLayout>
+      </c:layout>
+      <c:areaChart>
+        <c:grouping val="standard"/>
+        <c:varyColors val="0"/>
+        <c:ser>
+          <c:idx val="0"/>
+          <c:order val="0"/>
+          <c:tx>
+            <c:strRef>
+              <c:f>Sheet1!$B$1</c:f>
+              <c:strCache>
+                <c:ptCount val="1"/>
+                <c:pt idx="0">
+                  <c:v>Spend $</c:v>
+                </c:pt>
+              </c:strCache>
+            </c:strRef>
+          </c:tx>
+          <c:spPr>
+            <a:solidFill>
+              <a:srgbClr val="0E9F6E">
+                <a:alpha val="25000"/>
+              </a:srgbClr>
+            </a:solidFill>
+            <a:ln w="31750">
+              <a:solidFill>
+                <a:srgbClr val="0E9F6E"/>
+              </a:solidFill>
+            </a:ln>
+          </c:spPr>
+          <c:cat>
+            <c:strRef>
+              <c:f>Sheet1!$A$2:$A$22</c:f>
+              <c:strCache>
+                <c:ptCount val="21"/>
+                <c:pt idx="0">
+                  <c:v>Oct 24</c:v>
+                </c:pt>
+                <c:pt idx="1">
+                  <c:v>Nov 24</c:v>
+                </c:pt>
+                <c:pt idx="2">
+                  <c:v>Dec 24</c:v>
+                </c:pt>
+                <c:pt idx="3">
+                  <c:v>Jan 25</c:v>
+                </c:pt>
+                <c:pt idx="4">
+                  <c:v>Feb 25</c:v>
+                </c:pt>
+                <c:pt idx="5">
+                  <c:v>Mar 25</c:v>
+                </c:pt>
+                <c:pt idx="6">
+                  <c:v>Apr 25</c:v>
+                </c:pt>
+                <c:pt idx="7">
+                  <c:v>May 25</c:v>
+                </c:pt>
+                <c:pt idx="8">
+                  <c:v>Jun 25</c:v>
+                </c:pt>
+                <c:pt idx="9">
+                  <c:v>Jul 25</c:v>
+                </c:pt>
+                <c:pt idx="10">
+                  <c:v>Aug 25</c:v>
+                </c:pt>
+                <c:pt idx="11">
+                  <c:v>Sep 25</c:v>
+                </c:pt>
+                <c:pt idx="12">
+                  <c:v>Oct 25</c:v>
+                </c:pt>
+                <c:pt idx="13">
+                  <c:v>Nov 25</c:v>
+                </c:pt>
+                <c:pt idx="14">
+                  <c:v>Dec 25</c:v>
+                </c:pt>
+                <c:pt idx="15">
+                  <c:v>Jan 26</c:v>
+                </c:pt>
+                <c:pt idx="16">
+                  <c:v>Feb 26</c:v>
+                </c:pt>
+                <c:pt idx="17">
+                  <c:v>Mar 26</c:v>
+                </c:pt>
+                <c:pt idx="18">
+                  <c:v>Apr 26</c:v>
+                </c:pt>
+                <c:pt idx="19">
+                  <c:v>May 26</c:v>
+                </c:pt>
+                <c:pt idx="20">
+                  <c:v>Jun 26</c:v>
+                </c:pt>
+              </c:strCache>
+            </c:strRef>
+          </c:cat>
+          <c:val>
+            <c:numRef>
+              <c:f>Sheet1!$B$2:$B$22</c:f>
+              <c:numCache>
+                <c:formatCode>$#,##0;[Red]($#,##0);"-"</c:formatCode>
+                <c:ptCount val="21"/>
+                <c:pt idx="0">
+                  <c:v>0</c:v>
+                </c:pt>
+                <c:pt idx="1">
+                  <c:v>0</c:v>
+                </c:pt>
+                <c:pt idx="2">
+                  <c:v>0</c:v>
+                </c:pt>
+                <c:pt idx="3">
+                  <c:v>0</c:v>
+                </c:pt>
+                <c:pt idx="4">
+                  <c:v>0</c:v>
+                </c:pt>
+                <c:pt idx="5">
+                  <c:v>0</c:v>
+                </c:pt>
+                <c:pt idx="6">
+                  <c:v>0</c:v>
+                </c:pt>
+                <c:pt idx="7">
+                  <c:v>0</c:v>
+                </c:pt>
+                <c:pt idx="8">
+                  <c:v>0</c:v>
+                </c:pt>
+                <c:pt idx="9">
+                  <c:v>0</c:v>
+                </c:pt>
+                <c:pt idx="10">
+                  <c:v>0</c:v>
+                </c:pt>
+                <c:pt idx="11">
+                  <c:v>0</c:v>
+                </c:pt>
+                <c:pt idx="12">
+                  <c:v>5160</c:v>
+                </c:pt>
+                <c:pt idx="13">
+                  <c:v>4585</c:v>
+                </c:pt>
+                <c:pt idx="14">
+                  <c:v>5221</c:v>
+                </c:pt>
+                <c:pt idx="15">
+                  <c:v>4426</c:v>
+                </c:pt>
+                <c:pt idx="16">
+                  <c:v>5408</c:v>
+                </c:pt>
+                <c:pt idx="17">
+                  <c:v>5427</c:v>
+                </c:pt>
+                <c:pt idx="18">
+                  <c:v>5509</c:v>
+                </c:pt>
+                <c:pt idx="19">
+                  <c:v>4635</c:v>
+                </c:pt>
+                <c:pt idx="20">
+                  <c:v>4316</c:v>
+                </c:pt>
+              </c:numCache>
+            </c:numRef>
+          </c:val>
+        </c:ser>
+        <c:dLbls>
+          <c:showLegendKey val="0"/>
+          <c:showVal val="0"/>
+          <c:showCatName val="0"/>
+          <c:showSerName val="0"/>
+          <c:showPercent val="0"/>
+          <c:showBubbleSize val="0"/>
+        </c:dLbls>
+        <c:axId val="-2101159928"/>
+        <c:axId val="-2100718248"/>
+      </c:areaChart>
+      <c:catAx>
+        <c:axId val="-2101159928"/>
+        <c:scaling>
+          <c:orientation val="minMax"/>
+        </c:scaling>
+        <c:delete val="0"/>
+        <c:axPos val="b"/>
+        <c:numFmt formatCode="General" sourceLinked="1"/>
+        <c:majorTickMark val="out"/>
+        <c:minorTickMark val="none"/>
+        <c:tickLblPos val="nextTo"/>
+        <c:txPr>
+          <a:bodyPr/>
+          <a:lstStyle/>
+          <a:p>
+            <a:pPr>
+              <a:defRPr sz="1000"/>
+            </a:pPr>
+          </a:p>
+        </c:txPr>
+        <c:crossAx val="-2100718248"/>
+        <c:crosses val="autoZero"/>
+        <c:auto val="1"/>
+        <c:lblAlgn val="ctr"/>
+        <c:lblOffset val="100"/>
+        <c:tickLblSkip val="3"/>
+        <c:noMultiLvlLbl val="0"/>
+      </c:catAx>
+      <c:valAx>
+        <c:axId val="-2100718248"/>
+        <c:scaling>
+          <c:orientation val="minMax"/>
+          <c:max val="6000.0"/>
+          <c:min val="0.0"/>
+        </c:scaling>
+        <c:delete val="0"/>
+        <c:axPos val="l"/>
+        <c:majorGridlines>
+          <c:spPr>
+            <a:ln>
+              <a:solidFill>
+                <a:srgbClr val="E6EAE7"/>
+              </a:solidFill>
+            </a:ln>
+          </c:spPr>
+        </c:majorGridlines>
+        <c:numFmt formatCode="$#,##0;[Red]($#,##0);&quot;-&quot;" sourceLinked="0"/>
+        <c:majorTickMark val="out"/>
+        <c:minorTickMark val="none"/>
+        <c:tickLblPos val="nextTo"/>
+        <c:spPr>
+          <a:ln>
+            <a:noFill/>
+          </a:ln>
+        </c:spPr>
+        <c:txPr>
+          <a:bodyPr/>
+          <a:lstStyle/>
+          <a:p>
+            <a:pPr>
+              <a:defRPr sz="1000"/>
+            </a:pPr>
+          </a:p>
+        </c:txPr>
+        <c:crossAx val="-2101159928"/>
+        <c:crosses val="autoZero"/>
+        <c:crossBetween val="midCat"/>
+        <c:majorUnit val="2000.0"/>
+      </c:valAx>
+    </c:plotArea>
+    <c:plotVisOnly val="1"/>
+    <c:dispBlanksAs val="zero"/>
+    <c:showDLblsOverMax val="0"/>
+  </c:chart>
+  <c:txPr>
+    <a:bodyPr/>
+    <a:lstStyle/>
+    <a:p>
+      <a:pPr>
+        <a:defRPr sz="1800">
+          <a:latin typeface="Roboto"/>
+        </a:defRPr>
+      </a:pPr>
+      <a:endParaRPr/>
+    </a:p>
+  </c:txPr>
+  <c:externalData r:id="rId1">
+    <c:autoUpdate val="0"/>
+  </c:externalData>
+</c:chartSpace>
+</file>
+
+<file path=ppt/charts/chart6.xml><?xml version="1.0" encoding="utf-8"?>
+<c:chartSpace xmlns:c="http://schemas.openxmlformats.org/drawingml/2006/chart" xmlns:a="http://schemas.openxmlformats.org/drawingml/2006/main" xmlns:r="http://schemas.openxmlformats.org/officeDocument/2006/relationships">
+  <c:date1904 val="0"/>
+  <c:roundedCorners val="0"/>
+  <c:chart>
+    <c:autoTitleDeleted val="1"/>
+    <c:plotArea>
+      <c:layout>
+        <c:manualLayout>
+          <c:layoutTarget val="inner"/>
+          <c:xMode val="edge"/>
+          <c:yMode val="edge"/>
+          <c:x val="0.11"/>
+          <c:y val="0.05"/>
+          <c:w val="0.86"/>
+          <c:h val="0.8"/>
+        </c:manualLayout>
+      </c:layout>
+      <c:areaChart>
+        <c:grouping val="standard"/>
+        <c:varyColors val="0"/>
+        <c:ser>
+          <c:idx val="0"/>
+          <c:order val="0"/>
+          <c:tx>
+            <c:strRef>
+              <c:f>Sheet1!$B$1</c:f>
+              <c:strCache>
+                <c:ptCount val="1"/>
+                <c:pt idx="0">
+                  <c:v>Spend $</c:v>
+                </c:pt>
+              </c:strCache>
+            </c:strRef>
+          </c:tx>
+          <c:spPr>
+            <a:solidFill>
+              <a:srgbClr val="0E9F6E">
+                <a:alpha val="25000"/>
+              </a:srgbClr>
+            </a:solidFill>
+            <a:ln w="31750">
+              <a:solidFill>
+                <a:srgbClr val="0E9F6E"/>
+              </a:solidFill>
+            </a:ln>
+          </c:spPr>
+          <c:cat>
+            <c:strRef>
+              <c:f>Sheet1!$A$2:$A$22</c:f>
+              <c:strCache>
+                <c:ptCount val="21"/>
+                <c:pt idx="0">
+                  <c:v>Oct 24</c:v>
+                </c:pt>
+                <c:pt idx="1">
+                  <c:v>Nov 24</c:v>
+                </c:pt>
+                <c:pt idx="2">
+                  <c:v>Dec 24</c:v>
+                </c:pt>
+                <c:pt idx="3">
+                  <c:v>Jan 25</c:v>
+                </c:pt>
+                <c:pt idx="4">
+                  <c:v>Feb 25</c:v>
+                </c:pt>
+                <c:pt idx="5">
+                  <c:v>Mar 25</c:v>
+                </c:pt>
+                <c:pt idx="6">
+                  <c:v>Apr 25</c:v>
+                </c:pt>
+                <c:pt idx="7">
+                  <c:v>May 25</c:v>
+                </c:pt>
+                <c:pt idx="8">
+                  <c:v>Jun 25</c:v>
+                </c:pt>
+                <c:pt idx="9">
+                  <c:v>Jul 25</c:v>
+                </c:pt>
+                <c:pt idx="10">
+                  <c:v>Aug 25</c:v>
+                </c:pt>
+                <c:pt idx="11">
+                  <c:v>Sep 25</c:v>
+                </c:pt>
+                <c:pt idx="12">
+                  <c:v>Oct 25</c:v>
+                </c:pt>
+                <c:pt idx="13">
+                  <c:v>Nov 25</c:v>
+                </c:pt>
+                <c:pt idx="14">
+                  <c:v>Dec 25</c:v>
+                </c:pt>
+                <c:pt idx="15">
+                  <c:v>Jan 26</c:v>
+                </c:pt>
+                <c:pt idx="16">
+                  <c:v>Feb 26</c:v>
+                </c:pt>
+                <c:pt idx="17">
+                  <c:v>Mar 26</c:v>
+                </c:pt>
+                <c:pt idx="18">
+                  <c:v>Apr 26</c:v>
+                </c:pt>
+                <c:pt idx="19">
+                  <c:v>May 26</c:v>
+                </c:pt>
+                <c:pt idx="20">
+                  <c:v>Jun 26</c:v>
+                </c:pt>
+              </c:strCache>
+            </c:strRef>
+          </c:cat>
+          <c:val>
+            <c:numRef>
+              <c:f>Sheet1!$B$2:$B$22</c:f>
+              <c:numCache>
+                <c:formatCode>$#,##0;[Red]($#,##0);"-"</c:formatCode>
+                <c:ptCount val="21"/>
+                <c:pt idx="0">
+                  <c:v>0</c:v>
+                </c:pt>
+                <c:pt idx="1">
+                  <c:v>0</c:v>
+                </c:pt>
+                <c:pt idx="2">
+                  <c:v>0</c:v>
+                </c:pt>
+                <c:pt idx="3">
+                  <c:v>0</c:v>
+                </c:pt>
+                <c:pt idx="4">
+                  <c:v>0</c:v>
+                </c:pt>
+                <c:pt idx="5">
+                  <c:v>0</c:v>
+                </c:pt>
+                <c:pt idx="6">
+                  <c:v>0</c:v>
+                </c:pt>
+                <c:pt idx="7">
+                  <c:v>0</c:v>
+                </c:pt>
+                <c:pt idx="8">
+                  <c:v>0</c:v>
+                </c:pt>
+                <c:pt idx="9">
+                  <c:v>3400</c:v>
+                </c:pt>
+                <c:pt idx="10">
+                  <c:v>3500</c:v>
+                </c:pt>
+                <c:pt idx="11">
+                  <c:v>4000</c:v>
+                </c:pt>
+                <c:pt idx="12">
+                  <c:v>3200</c:v>
+                </c:pt>
+                <c:pt idx="13">
+                  <c:v>3100</c:v>
+                </c:pt>
+                <c:pt idx="14">
+                  <c:v>3800</c:v>
+                </c:pt>
+                <c:pt idx="15">
+                  <c:v>3700</c:v>
+                </c:pt>
+                <c:pt idx="16">
+                  <c:v>3100</c:v>
+                </c:pt>
+                <c:pt idx="17">
+                  <c:v>4100</c:v>
+                </c:pt>
+                <c:pt idx="18">
+                  <c:v>3900</c:v>
+                </c:pt>
+                <c:pt idx="19">
+                  <c:v>3500</c:v>
+                </c:pt>
+                <c:pt idx="20">
+                  <c:v>3700</c:v>
+                </c:pt>
+              </c:numCache>
+            </c:numRef>
+          </c:val>
+        </c:ser>
+        <c:dLbls>
+          <c:showLegendKey val="0"/>
+          <c:showVal val="0"/>
+          <c:showCatName val="0"/>
+          <c:showSerName val="0"/>
+          <c:showPercent val="0"/>
+          <c:showBubbleSize val="0"/>
+        </c:dLbls>
+        <c:axId val="-2101159928"/>
+        <c:axId val="-2100718248"/>
+      </c:areaChart>
+      <c:catAx>
+        <c:axId val="-2101159928"/>
+        <c:scaling>
+          <c:orientation val="minMax"/>
+        </c:scaling>
+        <c:delete val="0"/>
+        <c:axPos val="b"/>
+        <c:numFmt formatCode="General" sourceLinked="1"/>
+        <c:majorTickMark val="out"/>
+        <c:minorTickMark val="none"/>
+        <c:tickLblPos val="nextTo"/>
+        <c:txPr>
+          <a:bodyPr/>
+          <a:lstStyle/>
+          <a:p>
+            <a:pPr>
+              <a:defRPr sz="1000"/>
+            </a:pPr>
+          </a:p>
+        </c:txPr>
+        <c:crossAx val="-2100718248"/>
+        <c:crosses val="autoZero"/>
+        <c:auto val="1"/>
+        <c:lblAlgn val="ctr"/>
+        <c:lblOffset val="100"/>
+        <c:tickLblSkip val="3"/>
+        <c:noMultiLvlLbl val="0"/>
+      </c:catAx>
+      <c:valAx>
+        <c:axId val="-2100718248"/>
+        <c:scaling>
+          <c:orientation val="minMax"/>
+          <c:max val="5000.0"/>
+          <c:min val="0.0"/>
+        </c:scaling>
+        <c:delete val="0"/>
+        <c:axPos val="l"/>
+        <c:majorGridlines>
+          <c:spPr>
+            <a:ln>
+              <a:solidFill>
+                <a:srgbClr val="E6EAE7"/>
+              </a:solidFill>
+            </a:ln>
+          </c:spPr>
+        </c:majorGridlines>
+        <c:numFmt formatCode="$#,##0;[Red]($#,##0);&quot;-&quot;" sourceLinked="0"/>
+        <c:majorTickMark val="out"/>
+        <c:minorTickMark val="none"/>
+        <c:tickLblPos val="nextTo"/>
+        <c:spPr>
+          <a:ln>
+            <a:noFill/>
+          </a:ln>
+        </c:spPr>
+        <c:txPr>
+          <a:bodyPr/>
+          <a:lstStyle/>
+          <a:p>
+            <a:pPr>
+              <a:defRPr sz="1000"/>
+            </a:pPr>
+          </a:p>
+        </c:txPr>
+        <c:crossAx val="-2101159928"/>
+        <c:crosses val="autoZero"/>
+        <c:crossBetween val="midCat"/>
+        <c:majorUnit val="1000.0"/>
+      </c:valAx>
+    </c:plotArea>
+    <c:plotVisOnly val="1"/>
+    <c:dispBlanksAs val="zero"/>
+    <c:showDLblsOverMax val="0"/>
+  </c:chart>
+  <c:txPr>
+    <a:bodyPr/>
+    <a:lstStyle/>
+    <a:p>
+      <a:pPr>
+        <a:defRPr sz="1800">
+          <a:latin typeface="Roboto"/>
+        </a:defRPr>
+      </a:pPr>
+      <a:endParaRPr/>
+    </a:p>
+  </c:txPr>
+  <c:externalData r:id="rId1">
+    <c:autoUpdate val="0"/>
+  </c:externalData>
+</c:chartSpace>
+</file>
+
+<file path=ppt/charts/chart7.xml><?xml version="1.0" encoding="utf-8"?>
+<c:chartSpace xmlns:c="http://schemas.openxmlformats.org/drawingml/2006/chart" xmlns:a="http://schemas.openxmlformats.org/drawingml/2006/main" xmlns:r="http://schemas.openxmlformats.org/officeDocument/2006/relationships">
+  <c:date1904 val="0"/>
+  <c:roundedCorners val="0"/>
+  <c:chart>
+    <c:autoTitleDeleted val="1"/>
+    <c:plotArea>
+      <c:layout>
+        <c:manualLayout>
+          <c:layoutTarget val="inner"/>
+          <c:xMode val="edge"/>
+          <c:yMode val="edge"/>
+          <c:x val="0.11"/>
+          <c:y val="0.05"/>
+          <c:w val="0.86"/>
+          <c:h val="0.8"/>
+        </c:manualLayout>
+      </c:layout>
+      <c:areaChart>
+        <c:grouping val="standard"/>
+        <c:varyColors val="0"/>
+        <c:ser>
+          <c:idx val="0"/>
+          <c:order val="0"/>
+          <c:tx>
+            <c:strRef>
+              <c:f>Sheet1!$B$1</c:f>
+              <c:strCache>
+                <c:ptCount val="1"/>
+                <c:pt idx="0">
+                  <c:v>Spend $</c:v>
+                </c:pt>
+              </c:strCache>
+            </c:strRef>
+          </c:tx>
+          <c:spPr>
+            <a:solidFill>
+              <a:srgbClr val="0E9F6E">
+                <a:alpha val="25000"/>
+              </a:srgbClr>
+            </a:solidFill>
+            <a:ln w="31750">
+              <a:solidFill>
+                <a:srgbClr val="0E9F6E"/>
+              </a:solidFill>
+            </a:ln>
+          </c:spPr>
+          <c:cat>
+            <c:strRef>
+              <c:f>Sheet1!$A$2:$A$22</c:f>
+              <c:strCache>
+                <c:ptCount val="21"/>
+                <c:pt idx="0">
+                  <c:v>Oct 24</c:v>
+                </c:pt>
+                <c:pt idx="1">
+                  <c:v>Nov 24</c:v>
+                </c:pt>
+                <c:pt idx="2">
+                  <c:v>Dec 24</c:v>
+                </c:pt>
+                <c:pt idx="3">
+                  <c:v>Jan 25</c:v>
+                </c:pt>
+                <c:pt idx="4">
+                  <c:v>Feb 25</c:v>
+                </c:pt>
+                <c:pt idx="5">
+                  <c:v>Mar 25</c:v>
+                </c:pt>
+                <c:pt idx="6">
+                  <c:v>Apr 25</c:v>
+                </c:pt>
+                <c:pt idx="7">
+                  <c:v>May 25</c:v>
+                </c:pt>
+                <c:pt idx="8">
+                  <c:v>Jun 25</c:v>
+                </c:pt>
+                <c:pt idx="9">
+                  <c:v>Jul 25</c:v>
+                </c:pt>
+                <c:pt idx="10">
+                  <c:v>Aug 25</c:v>
+                </c:pt>
+                <c:pt idx="11">
+                  <c:v>Sep 25</c:v>
+                </c:pt>
+                <c:pt idx="12">
+                  <c:v>Oct 25</c:v>
+                </c:pt>
+                <c:pt idx="13">
+                  <c:v>Nov 25</c:v>
+                </c:pt>
+                <c:pt idx="14">
+                  <c:v>Dec 25</c:v>
+                </c:pt>
+                <c:pt idx="15">
+                  <c:v>Jan 26</c:v>
+                </c:pt>
+                <c:pt idx="16">
+                  <c:v>Feb 26</c:v>
+                </c:pt>
+                <c:pt idx="17">
+                  <c:v>Mar 26</c:v>
+                </c:pt>
+                <c:pt idx="18">
+                  <c:v>Apr 26</c:v>
+                </c:pt>
+                <c:pt idx="19">
+                  <c:v>May 26</c:v>
+                </c:pt>
+                <c:pt idx="20">
+                  <c:v>Jun 26</c:v>
+                </c:pt>
+              </c:strCache>
+            </c:strRef>
+          </c:cat>
+          <c:val>
+            <c:numRef>
+              <c:f>Sheet1!$B$2:$B$22</c:f>
+              <c:numCache>
+                <c:formatCode>$#,##0;[Red]($#,##0);"-"</c:formatCode>
+                <c:ptCount val="21"/>
+                <c:pt idx="0">
+                  <c:v>0</c:v>
+                </c:pt>
+                <c:pt idx="1">
+                  <c:v>0</c:v>
+                </c:pt>
+                <c:pt idx="2">
+                  <c:v>0</c:v>
+                </c:pt>
+                <c:pt idx="3">
+                  <c:v>0</c:v>
+                </c:pt>
+                <c:pt idx="4">
+                  <c:v>0</c:v>
+                </c:pt>
+                <c:pt idx="5">
+                  <c:v>0</c:v>
+                </c:pt>
+                <c:pt idx="6">
+                  <c:v>0</c:v>
+                </c:pt>
+                <c:pt idx="7">
+                  <c:v>0</c:v>
+                </c:pt>
+                <c:pt idx="8">
+                  <c:v>0</c:v>
+                </c:pt>
+                <c:pt idx="9">
+                  <c:v>0</c:v>
+                </c:pt>
+                <c:pt idx="10">
+                  <c:v>0</c:v>
+                </c:pt>
+                <c:pt idx="11">
+                  <c:v>0</c:v>
+                </c:pt>
+                <c:pt idx="12">
+                  <c:v>0</c:v>
+                </c:pt>
+                <c:pt idx="13">
+                  <c:v>0</c:v>
+                </c:pt>
+                <c:pt idx="14">
+                  <c:v>0</c:v>
+                </c:pt>
+                <c:pt idx="15">
+                  <c:v>0</c:v>
+                </c:pt>
+                <c:pt idx="16">
+                  <c:v>0</c:v>
+                </c:pt>
+                <c:pt idx="17">
+                  <c:v>2932</c:v>
+                </c:pt>
+                <c:pt idx="18">
+                  <c:v>3555</c:v>
+                </c:pt>
+                <c:pt idx="19">
+                  <c:v>2649</c:v>
+                </c:pt>
+                <c:pt idx="20">
+                  <c:v>2699</c:v>
+                </c:pt>
+              </c:numCache>
+            </c:numRef>
+          </c:val>
+        </c:ser>
+        <c:dLbls>
+          <c:showLegendKey val="0"/>
+          <c:showVal val="0"/>
+          <c:showCatName val="0"/>
+          <c:showSerName val="0"/>
+          <c:showPercent val="0"/>
+          <c:showBubbleSize val="0"/>
+        </c:dLbls>
+        <c:axId val="-2101159928"/>
+        <c:axId val="-2100718248"/>
+      </c:areaChart>
+      <c:catAx>
+        <c:axId val="-2101159928"/>
+        <c:scaling>
+          <c:orientation val="minMax"/>
+        </c:scaling>
+        <c:delete val="0"/>
+        <c:axPos val="b"/>
+        <c:numFmt formatCode="General" sourceLinked="1"/>
+        <c:majorTickMark val="out"/>
+        <c:minorTickMark val="none"/>
+        <c:tickLblPos val="nextTo"/>
+        <c:txPr>
+          <a:bodyPr/>
+          <a:lstStyle/>
+          <a:p>
+            <a:pPr>
+              <a:defRPr sz="1000"/>
+            </a:pPr>
+          </a:p>
+        </c:txPr>
+        <c:crossAx val="-2100718248"/>
+        <c:crosses val="autoZero"/>
+        <c:auto val="1"/>
+        <c:lblAlgn val="ctr"/>
+        <c:lblOffset val="100"/>
+        <c:tickLblSkip val="3"/>
+        <c:noMultiLvlLbl val="0"/>
+      </c:catAx>
+      <c:valAx>
+        <c:axId val="-2100718248"/>
+        <c:scaling>
+          <c:orientation val="minMax"/>
+          <c:max val="4000.0"/>
+          <c:min val="0.0"/>
+        </c:scaling>
+        <c:delete val="0"/>
+        <c:axPos val="l"/>
+        <c:majorGridlines>
+          <c:spPr>
+            <a:ln>
+              <a:solidFill>
+                <a:srgbClr val="E6EAE7"/>
+              </a:solidFill>
+            </a:ln>
+          </c:spPr>
+        </c:majorGridlines>
+        <c:numFmt formatCode="$#,##0;[Red]($#,##0);&quot;-&quot;" sourceLinked="0"/>
+        <c:majorTickMark val="out"/>
+        <c:minorTickMark val="none"/>
+        <c:tickLblPos val="nextTo"/>
+        <c:spPr>
+          <a:ln>
+            <a:noFill/>
+          </a:ln>
+        </c:spPr>
+        <c:txPr>
+          <a:bodyPr/>
+          <a:lstStyle/>
+          <a:p>
+            <a:pPr>
+              <a:defRPr sz="1000"/>
+            </a:pPr>
+          </a:p>
+        </c:txPr>
+        <c:crossAx val="-2101159928"/>
+        <c:crosses val="autoZero"/>
+        <c:crossBetween val="midCat"/>
+        <c:majorUnit val="1000.0"/>
+      </c:valAx>
+    </c:plotArea>
+    <c:plotVisOnly val="1"/>
+    <c:dispBlanksAs val="zero"/>
+    <c:showDLblsOverMax val="0"/>
+  </c:chart>
+  <c:txPr>
+    <a:bodyPr/>
+    <a:lstStyle/>
+    <a:p>
+      <a:pPr>
+        <a:defRPr sz="1800">
+          <a:latin typeface="Roboto"/>
+        </a:defRPr>
+      </a:pPr>
+      <a:endParaRPr/>
+    </a:p>
+  </c:txPr>
+  <c:externalData r:id="rId1">
+    <c:autoUpdate val="0"/>
+  </c:externalData>
+</c:chartSpace>
+</file>
+
+<file path=ppt/notesMasters/notesMaster1.xml><?xml version="1.0" encoding="utf-8"?>
+<p:notesMaster xmlns:a="http://schemas.openxmlformats.org/drawingml/2006/main" xmlns:p="http://schemas.openxmlformats.org/presentationml/2006/main" xmlns:r="http://schemas.openxmlformats.org/officeDocument/2006/relationships">
+  <p:cSld>
+    <p:bg>
+      <p:bgRef idx="1001">
+        <a:schemeClr val="bg1"/>
+      </p:bgRef>
+    </p:bg>
+    <p:spTree>
+      <p:nvGrpSpPr>
+        <p:cNvPr id="1" name=""/>
+        <p:cNvGrpSpPr/>
+        <p:nvPr/>
+      </p:nvGrpSpPr>
+      <p:grpSpPr>
+        <a:xfrm>
+          <a:off x="0" y="0"/>
+          <a:ext cx="0" cy="0"/>
+          <a:chOff x="0" y="0"/>
+          <a:chExt cx="0" cy="0"/>
+        </a:xfrm>
+      </p:grpSpPr>
+      <p:sp>
+        <p:nvSpPr>
+          <p:cNvPr id="2" name="Header Placeholder 1"/>
+          <p:cNvSpPr>
+            <a:spLocks noGrp="1"/>
+          </p:cNvSpPr>
+          <p:nvPr>
+            <p:ph type="hdr" sz="quarter"/>
+          </p:nvPr>
+        </p:nvSpPr>
+        <p:spPr>
+          <a:xfrm>
+            <a:off x="0" y="0"/>
+            <a:ext cx="2971800" cy="457200"/>
+          </a:xfrm>
+          <a:prstGeom prst="rect">
+            <a:avLst/>
+          </a:prstGeom>
+        </p:spPr>
+        <p:txBody>
+          <a:bodyPr vert="horz" lIns="91440" tIns="45720" rIns="91440" bIns="45720" rtlCol="0"/>
+          <a:lstStyle>
+            <a:lvl1pPr algn="l">
+              <a:defRPr sz="1200"/>
+            </a:lvl1pPr>
+          </a:lstStyle>
+          <a:p>
+            <a:endParaRPr lang="en-US"/>
+          </a:p>
+        </p:txBody>
+      </p:sp>
+      <p:sp>
+        <p:nvSpPr>
+          <p:cNvPr id="3" name="Date Placeholder 2"/>
+          <p:cNvSpPr>
+            <a:spLocks noGrp="1"/>
+          </p:cNvSpPr>
+          <p:nvPr>
+            <p:ph type="dt" idx="1"/>
+          </p:nvPr>
+        </p:nvSpPr>
+        <p:spPr>
+          <a:xfrm>
+            <a:off x="3884613" y="0"/>
+            <a:ext cx="2971800" cy="457200"/>
+          </a:xfrm>
+          <a:prstGeom prst="rect">
+            <a:avLst/>
+          </a:prstGeom>
+        </p:spPr>
+        <p:txBody>
+          <a:bodyPr vert="horz" lIns="91440" tIns="45720" rIns="91440" bIns="45720" rtlCol="0"/>
+          <a:lstStyle>
+            <a:lvl1pPr algn="r">
+              <a:defRPr sz="1200"/>
+            </a:lvl1pPr>
+          </a:lstStyle>
+          <a:p>
+            <a:fld id="{0F89C1C7-3DCD-1040-A9CF-14679D8B5DDD}" type="datetimeFigureOut">
+              <a:rPr lang="en-US" smtClean="0"/>
+              <a:t>10/17/16</a:t>
+            </a:fld>
+            <a:endParaRPr lang="en-US"/>
+          </a:p>
+        </p:txBody>
+      </p:sp>
+      <p:sp>
+        <p:nvSpPr>
+          <p:cNvPr id="4" name="Slide Image Placeholder 3"/>
+          <p:cNvSpPr>
+            <a:spLocks noGrp="1" noRot="1" noChangeAspect="1"/>
+          </p:cNvSpPr>
+          <p:nvPr>
+            <p:ph type="sldImg" idx="2"/>
+          </p:nvPr>
+        </p:nvSpPr>
+        <p:spPr>
+          <a:xfrm>
+            <a:off x="1143000" y="685800"/>
+            <a:ext cx="4572000" cy="3429000"/>
+          </a:xfrm>
+          <a:prstGeom prst="rect">
+            <a:avLst/>
+          </a:prstGeom>
+          <a:noFill/>
+          <a:ln w="12700">
+            <a:solidFill>
+              <a:prstClr val="black"/>
+            </a:solidFill>
+          </a:ln>
+        </p:spPr>
+        <p:txBody>
+          <a:bodyPr vert="horz" lIns="91440" tIns="45720" rIns="91440" bIns="45720" rtlCol="0" anchor="ctr"/>
+          <a:lstStyle/>
+          <a:p>
+            <a:endParaRPr lang="en-US"/>
+          </a:p>
+        </p:txBody>
+      </p:sp>
+      <p:sp>
+        <p:nvSpPr>
+          <p:cNvPr id="5" name="Notes Placeholder 4"/>
+          <p:cNvSpPr>
+            <a:spLocks noGrp="1"/>
+          </p:cNvSpPr>
+          <p:nvPr>
+            <p:ph type="body" sz="quarter" idx="3"/>
+          </p:nvPr>
+        </p:nvSpPr>
+        <p:spPr>
+          <a:xfrm>
+            <a:off x="685800" y="4343400"/>
+            <a:ext cx="5486400" cy="4114800"/>
+          </a:xfrm>
+          <a:prstGeom prst="rect">
+            <a:avLst/>
+          </a:prstGeom>
+        </p:spPr>
+        <p:txBody>
+          <a:bodyPr vert="horz" lIns="91440" tIns="45720" rIns="91440" bIns="45720" rtlCol="0"/>
+          <a:lstStyle/>
+          <a:p>
+            <a:pPr lvl="0"/>
+            <a:r>
+              <a:rPr lang="en-US" smtClean="0"/>
+              <a:t>Click to edit Master text styles</a:t>
+            </a:r>
+          </a:p>
+          <a:p>
+            <a:pPr lvl="1"/>
+            <a:r>
+              <a:rPr lang="en-US" smtClean="0"/>
+              <a:t>Second level</a:t>
+            </a:r>
+          </a:p>
+          <a:p>
+            <a:pPr lvl="2"/>
+            <a:r>
+              <a:rPr lang="en-US" smtClean="0"/>
+              <a:t>Third level</a:t>
+            </a:r>
+          </a:p>
+          <a:p>
+            <a:pPr lvl="3"/>
+            <a:r>
+              <a:rPr lang="en-US" smtClean="0"/>
+              <a:t>Fourth level</a:t>
+            </a:r>
+          </a:p>
+          <a:p>
+            <a:pPr lvl="4"/>
+            <a:r>
+              <a:rPr lang="en-US" smtClean="0"/>
+              <a:t>Fifth level</a:t>
+            </a:r>
+            <a:endParaRPr lang="en-US"/>
+          </a:p>
+        </p:txBody>
+      </p:sp>
+      <p:sp>
+        <p:nvSpPr>
+          <p:cNvPr id="6" name="Footer Placeholder 5"/>
+          <p:cNvSpPr>
+            <a:spLocks noGrp="1"/>
+          </p:cNvSpPr>
+          <p:nvPr>
+            <p:ph type="ftr" sz="quarter" idx="4"/>
+          </p:nvPr>
+        </p:nvSpPr>
+        <p:spPr>
+          <a:xfrm>
+            <a:off x="0" y="8685213"/>
+            <a:ext cx="2971800" cy="457200"/>
+          </a:xfrm>
+          <a:prstGeom prst="rect">
+            <a:avLst/>
+          </a:prstGeom>
+        </p:spPr>
+        <p:txBody>
+          <a:bodyPr vert="horz" lIns="91440" tIns="45720" rIns="91440" bIns="45720" rtlCol="0" anchor="b"/>
+          <a:lstStyle>
+            <a:lvl1pPr algn="l">
+              <a:defRPr sz="1200"/>
+            </a:lvl1pPr>
+          </a:lstStyle>
+          <a:p>
+            <a:endParaRPr lang="en-US"/>
+          </a:p>
+        </p:txBody>
+      </p:sp>
+      <p:sp>
+        <p:nvSpPr>
+          <p:cNvPr id="7" name="Slide Number Placeholder 6"/>
+          <p:cNvSpPr>
+            <a:spLocks noGrp="1"/>
+          </p:cNvSpPr>
+          <p:nvPr>
+            <p:ph type="sldNum" sz="quarter" idx="5"/>
+          </p:nvPr>
+        </p:nvSpPr>
+        <p:spPr>
+          <a:xfrm>
+            <a:off x="3884613" y="8685213"/>
+            <a:ext cx="2971800" cy="457200"/>
+          </a:xfrm>
+          <a:prstGeom prst="rect">
+            <a:avLst/>
+          </a:prstGeom>
+        </p:spPr>
+        <p:txBody>
+          <a:bodyPr vert="horz" lIns="91440" tIns="45720" rIns="91440" bIns="45720" rtlCol="0" anchor="b"/>
+          <a:lstStyle>
+            <a:lvl1pPr algn="r">
+              <a:defRPr sz="1200"/>
+            </a:lvl1pPr>
+          </a:lstStyle>
+          <a:p>
+            <a:fld id="{BB5E49A5-4136-284D-997B-48E1D791AD67}" type="slidenum">
+              <a:rPr lang="en-US" smtClean="0"/>
+              <a:t>‹#›</a:t>
+            </a:fld>
+            <a:endParaRPr lang="en-US"/>
+          </a:p>
+        </p:txBody>
+      </p:sp>
+    </p:spTree>
+    <p:extLst>
+      <p:ext uri="{BB962C8B-B14F-4D97-AF65-F5344CB8AC3E}">
+        <p14:creationId xmlns:p14="http://schemas.microsoft.com/office/powerpoint/2010/main" val="2623252185"/>
+      </p:ext>
+    </p:extLst>
+  </p:cSld>
+  <p:clrMap bg1="lt1" tx1="dk1" bg2="lt2" tx2="dk2" accent1="accent1" accent2="accent2" accent3="accent3" accent4="accent4" accent5="accent5" accent6="accent6" hlink="hlink" folHlink="folHlink"/>
+  <p:notesStyle>
+    <a:lvl1pPr marL="0" algn="l" defTabSz="457200" rtl="0" eaLnBrk="1" latinLnBrk="0" hangingPunct="1">
+      <a:defRPr sz="1200" kern="1200">
+        <a:solidFill>
+          <a:schemeClr val="tx1"/>
+        </a:solidFill>
+        <a:latin typeface="+mn-lt"/>
+        <a:ea typeface="+mn-ea"/>
+        <a:cs typeface="+mn-cs"/>
+      </a:defRPr>
+    </a:lvl1pPr>
+    <a:lvl2pPr marL="457200" algn="l" defTabSz="457200" rtl="0" eaLnBrk="1" latinLnBrk="0" hangingPunct="1">
+      <a:defRPr sz="1200" kern="1200">
+        <a:solidFill>
+          <a:schemeClr val="tx1"/>
+        </a:solidFill>
+        <a:latin typeface="+mn-lt"/>
+        <a:ea typeface="+mn-ea"/>
+        <a:cs typeface="+mn-cs"/>
+      </a:defRPr>
+    </a:lvl2pPr>
+    <a:lvl3pPr marL="914400" algn="l" defTabSz="457200" rtl="0" eaLnBrk="1" latinLnBrk="0" hangingPunct="1">
+      <a:defRPr sz="1200" kern="1200">
+        <a:solidFill>
+          <a:schemeClr val="tx1"/>
+        </a:solidFill>
+        <a:latin typeface="+mn-lt"/>
+        <a:ea typeface="+mn-ea"/>
+        <a:cs typeface="+mn-cs"/>
+      </a:defRPr>
+    </a:lvl3pPr>
+    <a:lvl4pPr marL="1371600" algn="l" defTabSz="457200" rtl="0" eaLnBrk="1" latinLnBrk="0" hangingPunct="1">
+      <a:defRPr sz="1200" kern="1200">
+        <a:solidFill>
+          <a:schemeClr val="tx1"/>
+        </a:solidFill>
+        <a:latin typeface="+mn-lt"/>
+        <a:ea typeface="+mn-ea"/>
+        <a:cs typeface="+mn-cs"/>
+      </a:defRPr>
+    </a:lvl4pPr>
+    <a:lvl5pPr marL="1828800" algn="l" defTabSz="457200" rtl="0" eaLnBrk="1" latinLnBrk="0" hangingPunct="1">
+      <a:defRPr sz="1200" kern="1200">
+        <a:solidFill>
+          <a:schemeClr val="tx1"/>
+        </a:solidFill>
+        <a:latin typeface="+mn-lt"/>
+        <a:ea typeface="+mn-ea"/>
+        <a:cs typeface="+mn-cs"/>
+      </a:defRPr>
+    </a:lvl5pPr>
+    <a:lvl6pPr marL="2286000" algn="l" defTabSz="457200" rtl="0" eaLnBrk="1" latinLnBrk="0" hangingPunct="1">
+      <a:defRPr sz="1200" kern="1200">
+        <a:solidFill>
+          <a:schemeClr val="tx1"/>
+        </a:solidFill>
+        <a:latin typeface="+mn-lt"/>
+        <a:ea typeface="+mn-ea"/>
+        <a:cs typeface="+mn-cs"/>
+      </a:defRPr>
+    </a:lvl6pPr>
+    <a:lvl7pPr marL="2743200" algn="l" defTabSz="457200" rtl="0" eaLnBrk="1" latinLnBrk="0" hangingPunct="1">
+      <a:defRPr sz="1200" kern="1200">
+        <a:solidFill>
+          <a:schemeClr val="tx1"/>
+        </a:solidFill>
+        <a:latin typeface="+mn-lt"/>
+        <a:ea typeface="+mn-ea"/>
+        <a:cs typeface="+mn-cs"/>
+      </a:defRPr>
+    </a:lvl7pPr>
+    <a:lvl8pPr marL="3200400" algn="l" defTabSz="457200" rtl="0" eaLnBrk="1" latinLnBrk="0" hangingPunct="1">
+      <a:defRPr sz="1200" kern="1200">
+        <a:solidFill>
+          <a:schemeClr val="tx1"/>
+        </a:solidFill>
+        <a:latin typeface="+mn-lt"/>
+        <a:ea typeface="+mn-ea"/>
+        <a:cs typeface="+mn-cs"/>
+      </a:defRPr>
+    </a:lvl8pPr>
+    <a:lvl9pPr marL="3657600" algn="l" defTabSz="457200" rtl="0" eaLnBrk="1" latinLnBrk="0" hangingPunct="1">
+      <a:defRPr sz="1200" kern="1200">
+        <a:solidFill>
+          <a:schemeClr val="tx1"/>
+        </a:solidFill>
+        <a:latin typeface="+mn-lt"/>
+        <a:ea typeface="+mn-ea"/>
+        <a:cs typeface="+mn-cs"/>
+      </a:defRPr>
+    </a:lvl9pPr>
+  </p:notesStyle>
+</p:notesMaster>
+</file>
+
+<file path=ppt/notesSlides/notesSlide1.xml><?xml version="1.0" encoding="utf-8"?>
+<p:notes xmlns:a="http://schemas.openxmlformats.org/drawingml/2006/main" xmlns:p="http://schemas.openxmlformats.org/presentationml/2006/main" xmlns:r="http://schemas.openxmlformats.org/officeDocument/2006/relationships">
+  <p:cSld>
+    <p:spTree>
+      <p:nvGrpSpPr>
+        <p:cNvPr id="1" name=""/>
+        <p:cNvGrpSpPr/>
+        <p:nvPr/>
+      </p:nvGrpSpPr>
+      <p:grpSpPr>
+        <a:xfrm>
+          <a:off x="0" y="0"/>
+          <a:ext cx="0" cy="0"/>
+          <a:chOff x="0" y="0"/>
+          <a:chExt cx="0" cy="0"/>
+        </a:xfrm>
+      </p:grpSpPr>
+      <p:sp>
+        <p:nvSpPr>
+          <p:cNvPr id="2" name="Slide Image Placeholder 1"/>
+          <p:cNvSpPr>
+            <a:spLocks noGrp="1"/>
+          </p:cNvSpPr>
+          <p:nvPr>
+            <p:ph type="sldImg" idx="2"/>
+          </p:nvPr>
+        </p:nvSpPr>
+        <p:spPr/>
+      </p:sp>
+      <p:sp>
+        <p:nvSpPr>
+          <p:cNvPr id="3" name="Notes Placeholder 2"/>
+          <p:cNvSpPr>
+            <a:spLocks noGrp="1"/>
+          </p:cNvSpPr>
+          <p:nvPr>
+            <p:ph type="body" idx="3" sz="quarter"/>
+          </p:nvPr>
+        </p:nvSpPr>
+        <p:spPr/>
+        <p:txBody>
+          <a:bodyPr/>
+          <a:lstStyle/>
+          <a:p>
+            <a:r>
+              <a:t>What does each program really cost?. Sample Community Services Ltd. Period: June 2026. Each program's full cost: what its grant pays for, plus its fair share of the costs no single grant covers (untied program costs and administration, shared by grant spending). Pick a program and every chart and note follows it.</a:t>
+            </a:r>
+          </a:p>
+        </p:txBody>
+      </p:sp>
+      <p:sp>
+        <p:nvSpPr>
+          <p:cNvPr id="4" name="Slide Number Placeholder 3"/>
+          <p:cNvSpPr>
+            <a:spLocks noGrp="1"/>
+          </p:cNvSpPr>
+          <p:nvPr>
+            <p:ph type="sldNum" idx="5" sz="quarter"/>
+          </p:nvPr>
+        </p:nvSpPr>
+        <p:spPr/>
+      </p:sp>
+    </p:spTree>
+  </p:cSld>
+  <p:clrMapOvr>
+    <a:masterClrMapping/>
+  </p:clrMapOvr>
+</p:notes>
+</file>
+
+<file path=ppt/notesSlides/notesSlide2.xml><?xml version="1.0" encoding="utf-8"?>
+<p:notes xmlns:a="http://schemas.openxmlformats.org/drawingml/2006/main" xmlns:p="http://schemas.openxmlformats.org/presentationml/2006/main" xmlns:r="http://schemas.openxmlformats.org/officeDocument/2006/relationships">
+  <p:cSld>
+    <p:spTree>
+      <p:nvGrpSpPr>
+        <p:cNvPr id="1" name=""/>
+        <p:cNvGrpSpPr/>
+        <p:nvPr/>
+      </p:nvGrpSpPr>
+      <p:grpSpPr>
+        <a:xfrm>
+          <a:off x="0" y="0"/>
+          <a:ext cx="0" cy="0"/>
+          <a:chOff x="0" y="0"/>
+          <a:chExt cx="0" cy="0"/>
+        </a:xfrm>
+      </p:grpSpPr>
+      <p:sp>
+        <p:nvSpPr>
+          <p:cNvPr id="2" name="Slide Image Placeholder 1"/>
+          <p:cNvSpPr>
+            <a:spLocks noGrp="1"/>
+          </p:cNvSpPr>
+          <p:nvPr>
+            <p:ph type="sldImg" idx="2"/>
+          </p:nvPr>
+        </p:nvSpPr>
+        <p:spPr/>
+      </p:sp>
+      <p:sp>
+        <p:nvSpPr>
+          <p:cNvPr id="3" name="Notes Placeholder 2"/>
+          <p:cNvSpPr>
+            <a:spLocks noGrp="1"/>
+          </p:cNvSpPr>
+          <p:nvPr>
+            <p:ph type="body" idx="3" sz="quarter"/>
+          </p:nvPr>
+        </p:nvSpPr>
+        <p:spPr/>
+        <p:txBody>
+          <a:bodyPr/>
+          <a:lstStyle/>
+          <a:p>
+            <a:r>
+              <a:t>All programs. Housing support is the biggest program: $52,424 in June once its share of untied program costs and administration is added to $29,994 of grant spending. Shared costs add 74.8% on top of grant spending across all programs. The full cost (not just the grant line) is the number for renewal applications, where the funder lets you recover a share of overheads. Pick a program above to see it on its own.</a:t>
+            </a:r>
+          </a:p>
+        </p:txBody>
+      </p:sp>
+      <p:sp>
+        <p:nvSpPr>
+          <p:cNvPr id="4" name="Slide Number Placeholder 3"/>
+          <p:cNvSpPr>
+            <a:spLocks noGrp="1"/>
+          </p:cNvSpPr>
+          <p:nvPr>
+            <p:ph type="sldNum" idx="5" sz="quarter"/>
+          </p:nvPr>
+        </p:nvSpPr>
+        <p:spPr/>
+      </p:sp>
+    </p:spTree>
+  </p:cSld>
+  <p:clrMapOvr>
+    <a:masterClrMapping/>
+  </p:clrMapOvr>
+</p:notes>
+</file>
+
+<file path=ppt/notesSlides/notesSlide3.xml><?xml version="1.0" encoding="utf-8"?>
+<p:notes xmlns:a="http://schemas.openxmlformats.org/drawingml/2006/main" xmlns:p="http://schemas.openxmlformats.org/presentationml/2006/main" xmlns:r="http://schemas.openxmlformats.org/officeDocument/2006/relationships">
+  <p:cSld>
+    <p:spTree>
+      <p:nvGrpSpPr>
+        <p:cNvPr id="1" name=""/>
+        <p:cNvGrpSpPr/>
+        <p:nvPr/>
+      </p:nvGrpSpPr>
+      <p:grpSpPr>
+        <a:xfrm>
+          <a:off x="0" y="0"/>
+          <a:ext cx="0" cy="0"/>
+          <a:chOff x="0" y="0"/>
+          <a:chExt cx="0" cy="0"/>
+        </a:xfrm>
+      </p:grpSpPr>
+      <p:sp>
+        <p:nvSpPr>
+          <p:cNvPr id="2" name="Slide Image Placeholder 1"/>
+          <p:cNvSpPr>
+            <a:spLocks noGrp="1"/>
+          </p:cNvSpPr>
+          <p:nvPr>
+            <p:ph type="sldImg" idx="2"/>
+          </p:nvPr>
+        </p:nvSpPr>
+        <p:spPr/>
+      </p:sp>
+      <p:sp>
+        <p:nvSpPr>
+          <p:cNvPr id="3" name="Notes Placeholder 2"/>
+          <p:cNvSpPr>
+            <a:spLocks noGrp="1"/>
+          </p:cNvSpPr>
+          <p:nvPr>
+            <p:ph type="body" idx="3" sz="quarter"/>
+          </p:nvPr>
+        </p:nvSpPr>
+        <p:spPr/>
+        <p:txBody>
+          <a:bodyPr/>
+          <a:lstStyle/>
+          <a:p>
+            <a:r>
+              <a:t>Housing support. Housing support cost $52,424 in full in June: $29,994 paid by the State Housing Program grant, and $22,430 of shared costs no grant covers. It has spent 92.7% of its budget to date, with $193,097 left and 6 months to go. The full cost is $52,424 a month; $22,430 of it is shared cost the grant doesn't pay for. Worth asking for as much of it as the funder allows at renewal.</a:t>
+            </a:r>
+          </a:p>
+        </p:txBody>
+      </p:sp>
+      <p:sp>
+        <p:nvSpPr>
+          <p:cNvPr id="4" name="Slide Number Placeholder 3"/>
+          <p:cNvSpPr>
+            <a:spLocks noGrp="1"/>
+          </p:cNvSpPr>
+          <p:nvPr>
+            <p:ph type="sldNum" idx="5" sz="quarter"/>
+          </p:nvPr>
+        </p:nvSpPr>
+        <p:spPr/>
+      </p:sp>
+    </p:spTree>
+  </p:cSld>
+  <p:clrMapOvr>
+    <a:masterClrMapping/>
+  </p:clrMapOvr>
+</p:notes>
+</file>
+
+<file path=ppt/notesSlides/notesSlide4.xml><?xml version="1.0" encoding="utf-8"?>
+<p:notes xmlns:a="http://schemas.openxmlformats.org/drawingml/2006/main" xmlns:p="http://schemas.openxmlformats.org/presentationml/2006/main" xmlns:r="http://schemas.openxmlformats.org/officeDocument/2006/relationships">
+  <p:cSld>
+    <p:spTree>
+      <p:nvGrpSpPr>
+        <p:cNvPr id="1" name=""/>
+        <p:cNvGrpSpPr/>
+        <p:nvPr/>
+      </p:nvGrpSpPr>
+      <p:grpSpPr>
+        <a:xfrm>
+          <a:off x="0" y="0"/>
+          <a:ext cx="0" cy="0"/>
+          <a:chOff x="0" y="0"/>
+          <a:chExt cx="0" cy="0"/>
+        </a:xfrm>
+      </p:grpSpPr>
+      <p:sp>
+        <p:nvSpPr>
+          <p:cNvPr id="2" name="Slide Image Placeholder 1"/>
+          <p:cNvSpPr>
+            <a:spLocks noGrp="1"/>
+          </p:cNvSpPr>
+          <p:nvPr>
+            <p:ph type="sldImg" idx="2"/>
+          </p:nvPr>
+        </p:nvSpPr>
+        <p:spPr/>
+      </p:sp>
+      <p:sp>
+        <p:nvSpPr>
+          <p:cNvPr id="3" name="Notes Placeholder 2"/>
+          <p:cNvSpPr>
+            <a:spLocks noGrp="1"/>
+          </p:cNvSpPr>
+          <p:nvPr>
+            <p:ph type="body" idx="3" sz="quarter"/>
+          </p:nvPr>
+        </p:nvSpPr>
+        <p:spPr/>
+        <p:txBody>
+          <a:bodyPr/>
+          <a:lstStyle/>
+          <a:p>
+            <a:r>
+              <a:t>Youth outreach. Youth outreach cost $35,596 in full in June: $20,366 paid by the State Department of Families grant, and $15,230 of shared costs no grant covers. It has spent 99.5% of its budget to date, with $241,274 left and 12 months to go. The full cost is $35,596 a month; $15,230 of it is shared cost the grant doesn't pay for. Worth asking for as much of it as the funder allows at renewal.</a:t>
+            </a:r>
+          </a:p>
+        </p:txBody>
+      </p:sp>
+      <p:sp>
+        <p:nvSpPr>
+          <p:cNvPr id="4" name="Slide Number Placeholder 3"/>
+          <p:cNvSpPr>
+            <a:spLocks noGrp="1"/>
+          </p:cNvSpPr>
+          <p:nvPr>
+            <p:ph type="sldNum" idx="5" sz="quarter"/>
+          </p:nvPr>
+        </p:nvSpPr>
+        <p:spPr/>
+      </p:sp>
+    </p:spTree>
+  </p:cSld>
+  <p:clrMapOvr>
+    <a:masterClrMapping/>
+  </p:clrMapOvr>
+</p:notes>
+</file>
+
+<file path=ppt/notesSlides/notesSlide5.xml><?xml version="1.0" encoding="utf-8"?>
+<p:notes xmlns:a="http://schemas.openxmlformats.org/drawingml/2006/main" xmlns:p="http://schemas.openxmlformats.org/presentationml/2006/main" xmlns:r="http://schemas.openxmlformats.org/officeDocument/2006/relationships">
+  <p:cSld>
+    <p:spTree>
+      <p:nvGrpSpPr>
+        <p:cNvPr id="1" name=""/>
+        <p:cNvGrpSpPr/>
+        <p:nvPr/>
+      </p:nvGrpSpPr>
+      <p:grpSpPr>
+        <a:xfrm>
+          <a:off x="0" y="0"/>
+          <a:ext cx="0" cy="0"/>
+          <a:chOff x="0" y="0"/>
+          <a:chExt cx="0" cy="0"/>
+        </a:xfrm>
+      </p:grpSpPr>
+      <p:sp>
+        <p:nvSpPr>
+          <p:cNvPr id="2" name="Slide Image Placeholder 1"/>
+          <p:cNvSpPr>
+            <a:spLocks noGrp="1"/>
+          </p:cNvSpPr>
+          <p:nvPr>
+            <p:ph type="sldImg" idx="2"/>
+          </p:nvPr>
+        </p:nvSpPr>
+        <p:spPr/>
+      </p:sp>
+      <p:sp>
+        <p:nvSpPr>
+          <p:cNvPr id="3" name="Notes Placeholder 2"/>
+          <p:cNvSpPr>
+            <a:spLocks noGrp="1"/>
+          </p:cNvSpPr>
+          <p:nvPr>
+            <p:ph type="body" idx="3" sz="quarter"/>
+          </p:nvPr>
+        </p:nvSpPr>
+        <p:spPr/>
+        <p:txBody>
+          <a:bodyPr/>
+          <a:lstStyle/>
+          <a:p>
+            <a:r>
+              <a:t>Mental health first aid. Mental health first aid cost $17,123 in full in June: $9,797 paid by the Federal health program grant, and $7,326 of shared costs no grant covers. It has spent 94.4% of its budget to date, with $91,669 left and 9 months to go. The full cost is $17,123 a month; $7,326 of it is shared cost the grant doesn't pay for. Worth asking for as much of it as the funder allows at renewal.</a:t>
+            </a:r>
+          </a:p>
+        </p:txBody>
+      </p:sp>
+      <p:sp>
+        <p:nvSpPr>
+          <p:cNvPr id="4" name="Slide Number Placeholder 3"/>
+          <p:cNvSpPr>
+            <a:spLocks noGrp="1"/>
+          </p:cNvSpPr>
+          <p:nvPr>
+            <p:ph type="sldNum" idx="5" sz="quarter"/>
+          </p:nvPr>
+        </p:nvSpPr>
+        <p:spPr/>
+      </p:sp>
+    </p:spTree>
+  </p:cSld>
+  <p:clrMapOvr>
+    <a:masterClrMapping/>
+  </p:clrMapOvr>
+</p:notes>
+</file>
+
+<file path=ppt/notesSlides/notesSlide6.xml><?xml version="1.0" encoding="utf-8"?>
+<p:notes xmlns:a="http://schemas.openxmlformats.org/drawingml/2006/main" xmlns:p="http://schemas.openxmlformats.org/presentationml/2006/main" xmlns:r="http://schemas.openxmlformats.org/officeDocument/2006/relationships">
+  <p:cSld>
+    <p:spTree>
+      <p:nvGrpSpPr>
+        <p:cNvPr id="1" name=""/>
+        <p:cNvGrpSpPr/>
+        <p:nvPr/>
+      </p:nvGrpSpPr>
+      <p:grpSpPr>
+        <a:xfrm>
+          <a:off x="0" y="0"/>
+          <a:ext cx="0" cy="0"/>
+          <a:chOff x="0" y="0"/>
+          <a:chExt cx="0" cy="0"/>
+        </a:xfrm>
+      </p:grpSpPr>
+      <p:sp>
+        <p:nvSpPr>
+          <p:cNvPr id="2" name="Slide Image Placeholder 1"/>
+          <p:cNvSpPr>
+            <a:spLocks noGrp="1"/>
+          </p:cNvSpPr>
+          <p:nvPr>
+            <p:ph type="sldImg" idx="2"/>
+          </p:nvPr>
+        </p:nvSpPr>
+        <p:spPr/>
+      </p:sp>
+      <p:sp>
+        <p:nvSpPr>
+          <p:cNvPr id="3" name="Notes Placeholder 2"/>
+          <p:cNvSpPr>
+            <a:spLocks noGrp="1"/>
+          </p:cNvSpPr>
+          <p:nvPr>
+            <p:ph type="body" idx="3" sz="quarter"/>
+          </p:nvPr>
+        </p:nvSpPr>
+        <p:spPr/>
+        <p:txBody>
+          <a:bodyPr/>
+          <a:lstStyle/>
+          <a:p>
+            <a:r>
+              <a:t>Digital literacy. Digital literacy cost $7,544 in full in June: $4,316 paid by the Philanthropic foundation grant, and $3,228 of shared costs no grant covers. It has spent 99.3% of its budget to date, with $45,313 left and 9 months to go. The full cost is $7,544 a month; $3,228 of it is shared cost the grant doesn't pay for. Worth asking for as much of it as the funder allows at renewal.</a:t>
+            </a:r>
+          </a:p>
+        </p:txBody>
+      </p:sp>
+      <p:sp>
+        <p:nvSpPr>
+          <p:cNvPr id="4" name="Slide Number Placeholder 3"/>
+          <p:cNvSpPr>
+            <a:spLocks noGrp="1"/>
+          </p:cNvSpPr>
+          <p:nvPr>
+            <p:ph type="sldNum" idx="5" sz="quarter"/>
+          </p:nvPr>
+        </p:nvSpPr>
+        <p:spPr/>
+      </p:sp>
+    </p:spTree>
+  </p:cSld>
+  <p:clrMapOvr>
+    <a:masterClrMapping/>
+  </p:clrMapOvr>
+</p:notes>
+</file>
+
+<file path=ppt/notesSlides/notesSlide7.xml><?xml version="1.0" encoding="utf-8"?>
+<p:notes xmlns:a="http://schemas.openxmlformats.org/drawingml/2006/main" xmlns:p="http://schemas.openxmlformats.org/presentationml/2006/main" xmlns:r="http://schemas.openxmlformats.org/officeDocument/2006/relationships">
+  <p:cSld>
+    <p:spTree>
+      <p:nvGrpSpPr>
+        <p:cNvPr id="1" name=""/>
+        <p:cNvGrpSpPr/>
+        <p:nvPr/>
+      </p:nvGrpSpPr>
+      <p:grpSpPr>
+        <a:xfrm>
+          <a:off x="0" y="0"/>
+          <a:ext cx="0" cy="0"/>
+          <a:chOff x="0" y="0"/>
+          <a:chExt cx="0" cy="0"/>
+        </a:xfrm>
+      </p:grpSpPr>
+      <p:sp>
+        <p:nvSpPr>
+          <p:cNvPr id="2" name="Slide Image Placeholder 1"/>
+          <p:cNvSpPr>
+            <a:spLocks noGrp="1"/>
+          </p:cNvSpPr>
+          <p:nvPr>
+            <p:ph type="sldImg" idx="2"/>
+          </p:nvPr>
+        </p:nvSpPr>
+        <p:spPr/>
+      </p:sp>
+      <p:sp>
+        <p:nvSpPr>
+          <p:cNvPr id="3" name="Notes Placeholder 2"/>
+          <p:cNvSpPr>
+            <a:spLocks noGrp="1"/>
+          </p:cNvSpPr>
+          <p:nvPr>
+            <p:ph type="body" idx="3" sz="quarter"/>
+          </p:nvPr>
+        </p:nvSpPr>
+        <p:spPr/>
+        <p:txBody>
+          <a:bodyPr/>
+          <a:lstStyle/>
+          <a:p>
+            <a:r>
+              <a:t>Community meals (2025-26). Community meals (2025-26) cost $6,467 in full in June: $3,700 paid by the Local council community grant grant, and $2,767 of shared costs no grant covers. It has spent 97.7% of its budget to date, with $1,000 left and 0 months to go. The full cost is $6,467 a month; $2,767 of it is shared cost the grant doesn't pay for. Worth asking for as much of it as the funder allows at renewal.</a:t>
+            </a:r>
+          </a:p>
+        </p:txBody>
+      </p:sp>
+      <p:sp>
+        <p:nvSpPr>
+          <p:cNvPr id="4" name="Slide Number Placeholder 3"/>
+          <p:cNvSpPr>
+            <a:spLocks noGrp="1"/>
+          </p:cNvSpPr>
+          <p:nvPr>
+            <p:ph type="sldNum" idx="5" sz="quarter"/>
+          </p:nvPr>
+        </p:nvSpPr>
+        <p:spPr/>
+      </p:sp>
+    </p:spTree>
+  </p:cSld>
+  <p:clrMapOvr>
+    <a:masterClrMapping/>
+  </p:clrMapOvr>
+</p:notes>
+</file>
+
+<file path=ppt/notesSlides/notesSlide8.xml><?xml version="1.0" encoding="utf-8"?>
+<p:notes xmlns:a="http://schemas.openxmlformats.org/drawingml/2006/main" xmlns:p="http://schemas.openxmlformats.org/presentationml/2006/main" xmlns:r="http://schemas.openxmlformats.org/officeDocument/2006/relationships">
+  <p:cSld>
+    <p:spTree>
+      <p:nvGrpSpPr>
+        <p:cNvPr id="1" name=""/>
+        <p:cNvGrpSpPr/>
+        <p:nvPr/>
+      </p:nvGrpSpPr>
+      <p:grpSpPr>
+        <a:xfrm>
+          <a:off x="0" y="0"/>
+          <a:ext cx="0" cy="0"/>
+          <a:chOff x="0" y="0"/>
+          <a:chExt cx="0" cy="0"/>
+        </a:xfrm>
+      </p:grpSpPr>
+      <p:sp>
+        <p:nvSpPr>
+          <p:cNvPr id="2" name="Slide Image Placeholder 1"/>
+          <p:cNvSpPr>
+            <a:spLocks noGrp="1"/>
+          </p:cNvSpPr>
+          <p:nvPr>
+            <p:ph type="sldImg" idx="2"/>
+          </p:nvPr>
+        </p:nvSpPr>
+        <p:spPr/>
+      </p:sp>
+      <p:sp>
+        <p:nvSpPr>
+          <p:cNvPr id="3" name="Notes Placeholder 2"/>
+          <p:cNvSpPr>
+            <a:spLocks noGrp="1"/>
+          </p:cNvSpPr>
+          <p:nvPr>
+            <p:ph type="body" idx="3" sz="quarter"/>
+          </p:nvPr>
+        </p:nvSpPr>
+        <p:spPr/>
+        <p:txBody>
+          <a:bodyPr/>
+          <a:lstStyle/>
+          <a:p>
+            <a:r>
+              <a:t>Volunteer coordinator. Volunteer coordinator cost $4,717 in full in June: $2,699 paid by the State volunteering grant grant, and $2,018 of shared costs no grant covers. It has spent 98.6% of its budget to date, with $24,165 left and 8 months to go. The full cost is $4,717 a month; $2,018 of it is shared cost the grant doesn't pay for. Worth asking for as much of it as the funder allows at renewal.</a:t>
+            </a:r>
+          </a:p>
+        </p:txBody>
+      </p:sp>
+      <p:sp>
+        <p:nvSpPr>
+          <p:cNvPr id="4" name="Slide Number Placeholder 3"/>
+          <p:cNvSpPr>
+            <a:spLocks noGrp="1"/>
+          </p:cNvSpPr>
+          <p:nvPr>
+            <p:ph type="sldNum" idx="5" sz="quarter"/>
+          </p:nvPr>
+        </p:nvSpPr>
+        <p:spPr/>
+      </p:sp>
+    </p:spTree>
+  </p:cSld>
+  <p:clrMapOvr>
+    <a:masterClrMapping/>
+  </p:clrMapOvr>
+</p:notes>
 </file>
 
 <file path=ppt/slideLayouts/slideLayout1.xml><?xml version="1.0" encoding="utf-8"?>
@@ -3804,7 +5997,44 @@
       <p:grpSpPr/>
       <p:sp>
         <p:nvSpPr>
-          <p:cNvPr id="2" name="Rectangle 1"/>
+          <p:cNvPr id="2" name="Title 1"/>
+          <p:cNvSpPr>
+            <a:spLocks noGrp="1"/>
+          </p:cNvSpPr>
+          <p:nvPr>
+            <p:ph type="ctrTitle"/>
+          </p:nvPr>
+        </p:nvSpPr>
+        <p:spPr>
+          <a:xfrm>
+            <a:off x="457200" y="1965960"/>
+            <a:ext cx="11277295" cy="1097280"/>
+          </a:xfrm>
+        </p:spPr>
+        <p:txBody>
+          <a:bodyPr wrap="square"/>
+          <a:lstStyle/>
+          <a:p>
+            <a:pPr algn="l">
+              <a:defRPr>
+                <a:latin typeface="Roboto"/>
+              </a:defRPr>
+            </a:pPr>
+            <a:r>
+              <a:rPr sz="3400" b="1">
+                <a:solidFill>
+                  <a:srgbClr val="25342A"/>
+                </a:solidFill>
+                <a:latin typeface="Roboto"/>
+              </a:rPr>
+              <a:t>What does each program really cost?</a:t>
+            </a:r>
+          </a:p>
+        </p:txBody>
+      </p:sp>
+      <p:sp>
+        <p:nvSpPr>
+          <p:cNvPr id="3" name="Rectangle 2"/>
           <p:cNvSpPr/>
           <p:nvPr/>
         </p:nvSpPr>
@@ -3860,7 +6090,7 @@
       </p:sp>
       <p:sp>
         <p:nvSpPr>
-          <p:cNvPr id="3" name="TextBox 2"/>
+          <p:cNvPr id="4" name="TextBox 3"/>
           <p:cNvSpPr txBox="1"/>
           <p:nvPr/>
         </p:nvSpPr>
@@ -3875,7 +6105,7 @@
           <a:noFill/>
         </p:spPr>
         <p:txBody>
-          <a:bodyPr wrap="square">
+          <a:bodyPr wrap="square" lIns="45720" rIns="45720">
             <a:spAutoFit/>
           </a:bodyPr>
           <a:lstStyle/>
@@ -3899,7 +6129,7 @@
       </p:sp>
       <p:sp>
         <p:nvSpPr>
-          <p:cNvPr id="4" name="TextBox 3"/>
+          <p:cNvPr id="5" name="TextBox 4"/>
           <p:cNvSpPr txBox="1"/>
           <p:nvPr/>
         </p:nvSpPr>
@@ -3914,7 +6144,7 @@
           <a:noFill/>
         </p:spPr>
         <p:txBody>
-          <a:bodyPr wrap="square">
+          <a:bodyPr wrap="square" lIns="45720" rIns="45720">
             <a:spAutoFit/>
           </a:bodyPr>
           <a:lstStyle/>
@@ -3938,14 +6168,14 @@
       </p:sp>
       <p:sp>
         <p:nvSpPr>
-          <p:cNvPr id="5" name="TextBox 4"/>
+          <p:cNvPr id="6" name="TextBox 5"/>
           <p:cNvSpPr txBox="1"/>
           <p:nvPr/>
         </p:nvSpPr>
         <p:spPr>
           <a:xfrm>
-            <a:off x="457200" y="2011680"/>
-            <a:ext cx="11247120" cy="1097280"/>
+            <a:off x="457200" y="3154680"/>
+            <a:ext cx="11277295" cy="457200"/>
           </a:xfrm>
           <a:prstGeom prst="rect">
             <a:avLst/>
@@ -3953,7 +6183,7 @@
           <a:noFill/>
         </p:spPr>
         <p:txBody>
-          <a:bodyPr wrap="square">
+          <a:bodyPr wrap="square" lIns="45720" rIns="45720">
             <a:spAutoFit/>
           </a:bodyPr>
           <a:lstStyle/>
@@ -3964,27 +6194,27 @@
               </a:defRPr>
             </a:pPr>
             <a:r>
-              <a:rPr sz="3400" b="1">
+              <a:rPr sz="1600" b="0">
                 <a:solidFill>
-                  <a:srgbClr val="25342A"/>
+                  <a:srgbClr val="5F6F63"/>
                 </a:solidFill>
                 <a:latin typeface="Roboto"/>
               </a:rPr>
-              <a:t>What does each program really cost?</a:t>
-            </a:r>
-          </a:p>
-        </p:txBody>
-      </p:sp>
-      <p:sp>
-        <p:nvSpPr>
-          <p:cNvPr id="6" name="TextBox 5"/>
+              <a:t>Sample Community Services Ltd</a:t>
+            </a:r>
+          </a:p>
+        </p:txBody>
+      </p:sp>
+      <p:sp>
+        <p:nvSpPr>
+          <p:cNvPr id="7" name="TextBox 6"/>
           <p:cNvSpPr txBox="1"/>
           <p:nvPr/>
         </p:nvSpPr>
         <p:spPr>
           <a:xfrm>
-            <a:off x="457200" y="3154680"/>
-            <a:ext cx="11247120" cy="457200"/>
+            <a:off x="457200" y="3703320"/>
+            <a:ext cx="11277295" cy="535940"/>
           </a:xfrm>
           <a:prstGeom prst="rect">
             <a:avLst/>
@@ -3992,7 +6222,7 @@
           <a:noFill/>
         </p:spPr>
         <p:txBody>
-          <a:bodyPr wrap="square">
+          <a:bodyPr wrap="square" lIns="45720" rIns="45720">
             <a:spAutoFit/>
           </a:bodyPr>
           <a:lstStyle/>
@@ -4003,27 +6233,27 @@
               </a:defRPr>
             </a:pPr>
             <a:r>
-              <a:rPr sz="1600" b="0">
+              <a:rPr sz="1400" b="0">
                 <a:solidFill>
-                  <a:srgbClr val="5F6F63"/>
+                  <a:srgbClr val="25342A"/>
                 </a:solidFill>
                 <a:latin typeface="Roboto"/>
               </a:rPr>
-              <a:t>Sample Community Services Ltd</a:t>
-            </a:r>
-          </a:p>
-        </p:txBody>
-      </p:sp>
-      <p:sp>
-        <p:nvSpPr>
-          <p:cNvPr id="7" name="TextBox 6"/>
+              <a:t>Period: June 2026. Each program's full cost: what its grant pays for, plus its fair share of the costs no single grant covers (untied program costs and administration, shared by grant spending). Pick a program and every chart and note follows it.</a:t>
+            </a:r>
+          </a:p>
+        </p:txBody>
+      </p:sp>
+      <p:sp>
+        <p:nvSpPr>
+          <p:cNvPr id="8" name="TextBox 7"/>
           <p:cNvSpPr txBox="1"/>
           <p:nvPr/>
         </p:nvSpPr>
         <p:spPr>
           <a:xfrm>
-            <a:off x="457200" y="3703320"/>
-            <a:ext cx="11247120" cy="1097280"/>
+            <a:off x="457200" y="4330700"/>
+            <a:ext cx="11277295" cy="1097280"/>
           </a:xfrm>
           <a:prstGeom prst="rect">
             <a:avLst/>
@@ -4031,7 +6261,7 @@
           <a:noFill/>
         </p:spPr>
         <p:txBody>
-          <a:bodyPr wrap="square">
+          <a:bodyPr wrap="square" lIns="45720" rIns="45720">
             <a:spAutoFit/>
           </a:bodyPr>
           <a:lstStyle/>
@@ -4042,27 +6272,75 @@
               </a:defRPr>
             </a:pPr>
             <a:r>
-              <a:rPr sz="1400" b="0">
+              <a:rPr sz="1100" b="0">
                 <a:solidFill>
-                  <a:srgbClr val="25342A"/>
+                  <a:srgbClr val="5F6F63"/>
                 </a:solidFill>
                 <a:latin typeface="Roboto"/>
               </a:rPr>
-              <a:t>Period: June 2026. Each program's full cost: what its grant pays for, plus its fair share of the costs no single grant covers (untied program costs and administration, shared by grant spending). Pick a program and every chart and note follows it.</a:t>
-            </a:r>
-          </a:p>
-        </p:txBody>
-      </p:sp>
-      <p:sp>
-        <p:nvSpPr>
-          <p:cNvPr id="8" name="TextBox 7"/>
+              <a:t>How final is this data?</a:t>
+            </a:r>
+          </a:p>
+          <a:p>
+            <a:pPr>
+              <a:defRPr>
+                <a:latin typeface="Roboto"/>
+              </a:defRPr>
+            </a:pPr>
+            <a:r>
+              <a:rPr sz="1100" b="0">
+                <a:solidFill>
+                  <a:srgbClr val="5F6F63"/>
+                </a:solidFill>
+                <a:latin typeface="Roboto"/>
+              </a:rPr>
+              <a:t>May 2026: Locked. May 2026 is locked (closed 2 Jun 2026). These numbers won't change.</a:t>
+            </a:r>
+          </a:p>
+          <a:p>
+            <a:pPr>
+              <a:defRPr>
+                <a:latin typeface="Roboto"/>
+              </a:defRPr>
+            </a:pPr>
+            <a:r>
+              <a:rPr sz="1100" b="0">
+                <a:solidFill>
+                  <a:srgbClr val="5F6F63"/>
+                </a:solidFill>
+                <a:latin typeface="Roboto"/>
+              </a:rPr>
+              <a:t>June 2026: Locked. June 2026 is locked (closed 2 Jul 2026). These numbers won't change.</a:t>
+            </a:r>
+          </a:p>
+          <a:p>
+            <a:pPr>
+              <a:defRPr>
+                <a:latin typeface="Roboto"/>
+              </a:defRPr>
+            </a:pPr>
+            <a:r>
+              <a:rPr sz="1100" b="0">
+                <a:solidFill>
+                  <a:srgbClr val="5F6F63"/>
+                </a:solidFill>
+                <a:latin typeface="Roboto"/>
+              </a:rPr>
+              <a:t>October 2026: Incomplete. October 2026 is still in progress: figures to 6 Oct only.</a:t>
+            </a:r>
+          </a:p>
+        </p:txBody>
+      </p:sp>
+      <p:sp>
+        <p:nvSpPr>
+          <p:cNvPr id="9" name="TextBox 8"/>
           <p:cNvSpPr txBox="1"/>
           <p:nvPr/>
         </p:nvSpPr>
         <p:spPr>
           <a:xfrm>
-            <a:off x="457200" y="4937760"/>
-            <a:ext cx="11247120" cy="1097280"/>
+            <a:off x="457200" y="6492240"/>
+            <a:ext cx="2926080" cy="274320"/>
           </a:xfrm>
           <a:prstGeom prst="rect">
             <a:avLst/>
@@ -4070,7 +6348,7 @@
           <a:noFill/>
         </p:spPr>
         <p:txBody>
-          <a:bodyPr wrap="square">
+          <a:bodyPr wrap="square" lIns="45720" rIns="45720">
             <a:spAutoFit/>
           </a:bodyPr>
           <a:lstStyle/>
@@ -4081,75 +6359,27 @@
               </a:defRPr>
             </a:pPr>
             <a:r>
-              <a:rPr sz="1100" b="0">
+              <a:rPr sz="900" b="0">
                 <a:solidFill>
                   <a:srgbClr val="5F6F63"/>
                 </a:solidFill>
                 <a:latin typeface="Roboto"/>
               </a:rPr>
-              <a:t>How final is this data?</a:t>
-            </a:r>
-          </a:p>
-          <a:p>
-            <a:pPr>
-              <a:defRPr>
-                <a:latin typeface="Roboto"/>
-              </a:defRPr>
-            </a:pPr>
-            <a:r>
-              <a:rPr sz="1100" b="0">
-                <a:solidFill>
-                  <a:srgbClr val="5F6F63"/>
-                </a:solidFill>
-                <a:latin typeface="Roboto"/>
-              </a:rPr>
-              <a:t>May 2026: Locked. May 2026 is locked (closed 2 Jun 2026). These numbers won't change.</a:t>
-            </a:r>
-          </a:p>
-          <a:p>
-            <a:pPr>
-              <a:defRPr>
-                <a:latin typeface="Roboto"/>
-              </a:defRPr>
-            </a:pPr>
-            <a:r>
-              <a:rPr sz="1100" b="0">
-                <a:solidFill>
-                  <a:srgbClr val="5F6F63"/>
-                </a:solidFill>
-                <a:latin typeface="Roboto"/>
-              </a:rPr>
-              <a:t>June 2026: Locked. June 2026 is locked (closed 2 Jul 2026). These numbers won't change.</a:t>
-            </a:r>
-          </a:p>
-          <a:p>
-            <a:pPr>
-              <a:defRPr>
-                <a:latin typeface="Roboto"/>
-              </a:defRPr>
-            </a:pPr>
-            <a:r>
-              <a:rPr sz="1100" b="0">
-                <a:solidFill>
-                  <a:srgbClr val="5F6F63"/>
-                </a:solidFill>
-                <a:latin typeface="Roboto"/>
-              </a:rPr>
-              <a:t>October 2026: Incomplete. October 2026 is still in progress: figures to 6 Oct only.</a:t>
-            </a:r>
-          </a:p>
-        </p:txBody>
-      </p:sp>
-      <p:sp>
-        <p:nvSpPr>
-          <p:cNvPr id="9" name="TextBox 8"/>
+              <a:t>program-cost.pptx</a:t>
+            </a:r>
+          </a:p>
+        </p:txBody>
+      </p:sp>
+      <p:sp>
+        <p:nvSpPr>
+          <p:cNvPr id="10" name="TextBox 9"/>
           <p:cNvSpPr txBox="1"/>
           <p:nvPr/>
         </p:nvSpPr>
         <p:spPr>
           <a:xfrm>
-            <a:off x="457200" y="6492240"/>
-            <a:ext cx="3657600" cy="274320"/>
+            <a:off x="3108960" y="6492240"/>
+            <a:ext cx="5943600" cy="274320"/>
           </a:xfrm>
           <a:prstGeom prst="rect">
             <a:avLst/>
@@ -4157,12 +6387,12 @@
           <a:noFill/>
         </p:spPr>
         <p:txBody>
-          <a:bodyPr wrap="square">
+          <a:bodyPr wrap="square" lIns="45720" rIns="45720">
             <a:spAutoFit/>
           </a:bodyPr>
           <a:lstStyle/>
           <a:p>
-            <a:pPr>
+            <a:pPr algn="ctr">
               <a:defRPr>
                 <a:latin typeface="Roboto"/>
               </a:defRPr>
@@ -4174,21 +6404,21 @@
                 </a:solidFill>
                 <a:latin typeface="Roboto"/>
               </a:rPr>
-              <a:t>program-cost.pptx</a:t>
-            </a:r>
-          </a:p>
-        </p:txBody>
-      </p:sp>
-      <p:sp>
-        <p:nvSpPr>
-          <p:cNvPr id="10" name="TextBox 9"/>
+              <a:t>Data retrieved 2pm, Tue 6 Oct 2026 · Generated 8 Oct 2026, 9:35am · Sample data · Made with Python (python-pptx)</a:t>
+            </a:r>
+          </a:p>
+        </p:txBody>
+      </p:sp>
+      <p:sp>
+        <p:nvSpPr>
+          <p:cNvPr id="11" name="TextBox 10"/>
           <p:cNvSpPr txBox="1"/>
           <p:nvPr/>
         </p:nvSpPr>
         <p:spPr>
           <a:xfrm>
-            <a:off x="4297680" y="6492240"/>
-            <a:ext cx="3657600" cy="274320"/>
+            <a:off x="8503920" y="6492240"/>
+            <a:ext cx="3200400" cy="274320"/>
           </a:xfrm>
           <a:prstGeom prst="rect">
             <a:avLst/>
@@ -4196,12 +6426,12 @@
           <a:noFill/>
         </p:spPr>
         <p:txBody>
-          <a:bodyPr wrap="square">
+          <a:bodyPr wrap="square" lIns="45720" rIns="45720">
             <a:spAutoFit/>
           </a:bodyPr>
           <a:lstStyle/>
           <a:p>
-            <a:pPr algn="ctr">
+            <a:pPr algn="r">
               <a:defRPr>
                 <a:latin typeface="Roboto"/>
               </a:defRPr>
@@ -4213,877 +6443,7 @@
                 </a:solidFill>
                 <a:latin typeface="Roboto"/>
               </a:rPr>
-              <a:t>Data retrieved 2pm, Tue 6 Oct 2026 · Sample data</a:t>
-            </a:r>
-          </a:p>
-        </p:txBody>
-      </p:sp>
-      <p:sp>
-        <p:nvSpPr>
-          <p:cNvPr id="11" name="TextBox 10"/>
-          <p:cNvSpPr txBox="1"/>
-          <p:nvPr/>
-        </p:nvSpPr>
-        <p:spPr>
-          <a:xfrm>
-            <a:off x="8503920" y="6492240"/>
-            <a:ext cx="3200400" cy="274320"/>
-          </a:xfrm>
-          <a:prstGeom prst="rect">
-            <a:avLst/>
-          </a:prstGeom>
-          <a:noFill/>
-        </p:spPr>
-        <p:txBody>
-          <a:bodyPr wrap="square">
-            <a:spAutoFit/>
-          </a:bodyPr>
-          <a:lstStyle/>
-          <a:p>
-            <a:pPr algn="r">
-              <a:defRPr>
-                <a:latin typeface="Roboto"/>
-              </a:defRPr>
-            </a:pPr>
-            <a:r>
-              <a:rPr sz="900" b="0">
-                <a:solidFill>
-                  <a:srgbClr val="5F6F63"/>
-                </a:solidFill>
-                <a:latin typeface="Roboto"/>
-              </a:rPr>
-              <a:t>Slide 1 of 11</a:t>
-            </a:r>
-          </a:p>
-        </p:txBody>
-      </p:sp>
-    </p:spTree>
-  </p:cSld>
-  <p:clrMapOvr>
-    <a:masterClrMapping/>
-  </p:clrMapOvr>
-</p:sld>
-</file>
-
-<file path=ppt/slides/slide10.xml><?xml version="1.0" encoding="utf-8"?>
-<p:sld xmlns:a="http://schemas.openxmlformats.org/drawingml/2006/main" xmlns:p="http://schemas.openxmlformats.org/presentationml/2006/main" xmlns:r="http://schemas.openxmlformats.org/officeDocument/2006/relationships">
-  <p:cSld>
-    <p:spTree>
-      <p:nvGrpSpPr>
-        <p:cNvPr id="1" name=""/>
-        <p:cNvGrpSpPr/>
-        <p:nvPr/>
-      </p:nvGrpSpPr>
-      <p:grpSpPr/>
-      <p:sp>
-        <p:nvSpPr>
-          <p:cNvPr id="2" name="Rectangle 1"/>
-          <p:cNvSpPr/>
-          <p:nvPr/>
-        </p:nvSpPr>
-        <p:spPr>
-          <a:xfrm>
-            <a:off x="0" y="0"/>
-            <a:ext cx="12191695" cy="73152"/>
-          </a:xfrm>
-          <a:prstGeom prst="rect">
-            <a:avLst/>
-          </a:prstGeom>
-          <a:solidFill>
-            <a:srgbClr val="2F7A5D"/>
-          </a:solidFill>
-          <a:ln>
-            <a:noFill/>
-          </a:ln>
-        </p:spPr>
-        <p:style>
-          <a:lnRef idx="1">
-            <a:schemeClr val="accent1"/>
-          </a:lnRef>
-          <a:fillRef idx="3">
-            <a:schemeClr val="accent1"/>
-          </a:fillRef>
-          <a:effectRef idx="2">
-            <a:schemeClr val="accent1"/>
-          </a:effectRef>
-          <a:fontRef idx="minor">
-            <a:schemeClr val="lt1"/>
-          </a:fontRef>
-        </p:style>
-        <p:txBody>
-          <a:bodyPr rtlCol="0" anchor="ctr"/>
-          <a:lstStyle/>
-          <a:p>
-            <a:pPr algn="ctr">
-              <a:defRPr>
-                <a:latin typeface="Roboto"/>
-              </a:defRPr>
-            </a:pPr>
-          </a:p>
-        </p:txBody>
-      </p:sp>
-      <p:sp>
-        <p:nvSpPr>
-          <p:cNvPr id="3" name="TextBox 2"/>
-          <p:cNvSpPr txBox="1"/>
-          <p:nvPr/>
-        </p:nvSpPr>
-        <p:spPr>
-          <a:xfrm>
-            <a:off x="457200" y="164592"/>
-            <a:ext cx="7315200" cy="274320"/>
-          </a:xfrm>
-          <a:prstGeom prst="rect">
-            <a:avLst/>
-          </a:prstGeom>
-          <a:noFill/>
-        </p:spPr>
-        <p:txBody>
-          <a:bodyPr wrap="square">
-            <a:spAutoFit/>
-          </a:bodyPr>
-          <a:lstStyle/>
-          <a:p>
-            <a:pPr>
-              <a:defRPr>
-                <a:latin typeface="Roboto"/>
-              </a:defRPr>
-            </a:pPr>
-            <a:r>
-              <a:rPr sz="1000" b="0">
-                <a:solidFill>
-                  <a:srgbClr val="5F6F63"/>
-                </a:solidFill>
-                <a:latin typeface="Roboto"/>
-              </a:rPr>
-              <a:t>Sample Community Services Ltd · What does each program really cost?</a:t>
-            </a:r>
-          </a:p>
-        </p:txBody>
-      </p:sp>
-      <p:sp>
-        <p:nvSpPr>
-          <p:cNvPr id="4" name="TextBox 3"/>
-          <p:cNvSpPr txBox="1"/>
-          <p:nvPr/>
-        </p:nvSpPr>
-        <p:spPr>
-          <a:xfrm>
-            <a:off x="457200" y="411480"/>
-            <a:ext cx="11247120" cy="548640"/>
-          </a:xfrm>
-          <a:prstGeom prst="rect">
-            <a:avLst/>
-          </a:prstGeom>
-          <a:noFill/>
-        </p:spPr>
-        <p:txBody>
-          <a:bodyPr wrap="square">
-            <a:spAutoFit/>
-          </a:bodyPr>
-          <a:lstStyle/>
-          <a:p>
-            <a:pPr>
-              <a:defRPr>
-                <a:latin typeface="Roboto"/>
-              </a:defRPr>
-            </a:pPr>
-            <a:r>
-              <a:rPr sz="2400" b="1">
-                <a:solidFill>
-                  <a:srgbClr val="25342A"/>
-                </a:solidFill>
-                <a:latin typeface="Roboto"/>
-              </a:rPr>
-              <a:t>What it shows · Program: Volunteer coordinator</a:t>
-            </a:r>
-          </a:p>
-        </p:txBody>
-      </p:sp>
-      <p:sp>
-        <p:nvSpPr>
-          <p:cNvPr id="5" name="Rectangle 4"/>
-          <p:cNvSpPr/>
-          <p:nvPr/>
-        </p:nvSpPr>
-        <p:spPr>
-          <a:xfrm>
-            <a:off x="457200" y="1554480"/>
-            <a:ext cx="5501487" cy="4389120"/>
-          </a:xfrm>
-          <a:prstGeom prst="rect">
-            <a:avLst/>
-          </a:prstGeom>
-          <a:solidFill>
-            <a:srgbClr val="FFFFFF"/>
-          </a:solidFill>
-          <a:ln>
-            <a:solidFill>
-              <a:srgbClr val="DCE8DC"/>
-            </a:solidFill>
-          </a:ln>
-        </p:spPr>
-        <p:style>
-          <a:lnRef idx="1">
-            <a:schemeClr val="accent1"/>
-          </a:lnRef>
-          <a:fillRef idx="3">
-            <a:schemeClr val="accent1"/>
-          </a:fillRef>
-          <a:effectRef idx="2">
-            <a:schemeClr val="accent1"/>
-          </a:effectRef>
-          <a:fontRef idx="minor">
-            <a:schemeClr val="lt1"/>
-          </a:fontRef>
-        </p:style>
-        <p:txBody>
-          <a:bodyPr rtlCol="0" anchor="ctr"/>
-          <a:lstStyle/>
-          <a:p>
-            <a:pPr algn="ctr">
-              <a:defRPr>
-                <a:latin typeface="Roboto"/>
-              </a:defRPr>
-            </a:pPr>
-          </a:p>
-        </p:txBody>
-      </p:sp>
-      <p:sp>
-        <p:nvSpPr>
-          <p:cNvPr id="6" name="TextBox 5"/>
-          <p:cNvSpPr txBox="1"/>
-          <p:nvPr/>
-        </p:nvSpPr>
-        <p:spPr>
-          <a:xfrm>
-            <a:off x="685800" y="1691640"/>
-            <a:ext cx="5044287" cy="365760"/>
-          </a:xfrm>
-          <a:prstGeom prst="rect">
-            <a:avLst/>
-          </a:prstGeom>
-          <a:noFill/>
-        </p:spPr>
-        <p:txBody>
-          <a:bodyPr wrap="square">
-            <a:spAutoFit/>
-          </a:bodyPr>
-          <a:lstStyle/>
-          <a:p>
-            <a:pPr>
-              <a:defRPr>
-                <a:latin typeface="Roboto"/>
-              </a:defRPr>
-            </a:pPr>
-            <a:r>
-              <a:rPr sz="1100" b="1">
-                <a:solidFill>
-                  <a:srgbClr val="5F6F63"/>
-                </a:solidFill>
-                <a:latin typeface="Roboto"/>
-              </a:rPr>
-              <a:t>WHAT IT SHOWS</a:t>
-            </a:r>
-          </a:p>
-        </p:txBody>
-      </p:sp>
-      <p:sp>
-        <p:nvSpPr>
-          <p:cNvPr id="7" name="TextBox 6"/>
-          <p:cNvSpPr txBox="1"/>
-          <p:nvPr/>
-        </p:nvSpPr>
-        <p:spPr>
-          <a:xfrm>
-            <a:off x="685800" y="2103120"/>
-            <a:ext cx="5044287" cy="3749039"/>
-          </a:xfrm>
-          <a:prstGeom prst="rect">
-            <a:avLst/>
-          </a:prstGeom>
-          <a:noFill/>
-        </p:spPr>
-        <p:txBody>
-          <a:bodyPr wrap="square">
-            <a:spAutoFit/>
-          </a:bodyPr>
-          <a:lstStyle/>
-          <a:p>
-            <a:pPr>
-              <a:defRPr>
-                <a:latin typeface="Roboto"/>
-              </a:defRPr>
-            </a:pPr>
-            <a:r>
-              <a:rPr sz="1600" b="0">
-                <a:solidFill>
-                  <a:srgbClr val="25342A"/>
-                </a:solidFill>
-                <a:latin typeface="Roboto"/>
-              </a:rPr>
-              <a:t>Volunteer coordinator cost $4,717 in full in June: $2,699 paid by the State volunteering grant grant, and $2,018 of shared costs no grant covers. It has spent 98.6% of its budget to date, with $24,165 left and 8 months to go.</a:t>
-            </a:r>
-          </a:p>
-        </p:txBody>
-      </p:sp>
-      <p:sp>
-        <p:nvSpPr>
-          <p:cNvPr id="8" name="Rectangle 7"/>
-          <p:cNvSpPr/>
-          <p:nvPr/>
-        </p:nvSpPr>
-        <p:spPr>
-          <a:xfrm>
-            <a:off x="6233007" y="1554480"/>
-            <a:ext cx="5501487" cy="4389120"/>
-          </a:xfrm>
-          <a:prstGeom prst="rect">
-            <a:avLst/>
-          </a:prstGeom>
-          <a:solidFill>
-            <a:srgbClr val="EEF5F0"/>
-          </a:solidFill>
-          <a:ln>
-            <a:solidFill>
-              <a:srgbClr val="DCE8DC"/>
-            </a:solidFill>
-          </a:ln>
-        </p:spPr>
-        <p:style>
-          <a:lnRef idx="1">
-            <a:schemeClr val="accent1"/>
-          </a:lnRef>
-          <a:fillRef idx="3">
-            <a:schemeClr val="accent1"/>
-          </a:fillRef>
-          <a:effectRef idx="2">
-            <a:schemeClr val="accent1"/>
-          </a:effectRef>
-          <a:fontRef idx="minor">
-            <a:schemeClr val="lt1"/>
-          </a:fontRef>
-        </p:style>
-        <p:txBody>
-          <a:bodyPr rtlCol="0" anchor="ctr"/>
-          <a:lstStyle/>
-          <a:p>
-            <a:pPr algn="ctr">
-              <a:defRPr>
-                <a:latin typeface="Roboto"/>
-              </a:defRPr>
-            </a:pPr>
-          </a:p>
-        </p:txBody>
-      </p:sp>
-      <p:sp>
-        <p:nvSpPr>
-          <p:cNvPr id="9" name="TextBox 8"/>
-          <p:cNvSpPr txBox="1"/>
-          <p:nvPr/>
-        </p:nvSpPr>
-        <p:spPr>
-          <a:xfrm>
-            <a:off x="6461607" y="1691640"/>
-            <a:ext cx="5044287" cy="365760"/>
-          </a:xfrm>
-          <a:prstGeom prst="rect">
-            <a:avLst/>
-          </a:prstGeom>
-          <a:noFill/>
-        </p:spPr>
-        <p:txBody>
-          <a:bodyPr wrap="square">
-            <a:spAutoFit/>
-          </a:bodyPr>
-          <a:lstStyle/>
-          <a:p>
-            <a:pPr>
-              <a:defRPr>
-                <a:latin typeface="Roboto"/>
-              </a:defRPr>
-            </a:pPr>
-            <a:r>
-              <a:rPr sz="1100" b="1">
-                <a:solidFill>
-                  <a:srgbClr val="5F6F63"/>
-                </a:solidFill>
-                <a:latin typeface="Roboto"/>
-              </a:rPr>
-              <a:t>WHAT YOU'D DO ABOUT IT</a:t>
-            </a:r>
-          </a:p>
-        </p:txBody>
-      </p:sp>
-      <p:sp>
-        <p:nvSpPr>
-          <p:cNvPr id="10" name="TextBox 9"/>
-          <p:cNvSpPr txBox="1"/>
-          <p:nvPr/>
-        </p:nvSpPr>
-        <p:spPr>
-          <a:xfrm>
-            <a:off x="6461607" y="2103120"/>
-            <a:ext cx="5044287" cy="3749039"/>
-          </a:xfrm>
-          <a:prstGeom prst="rect">
-            <a:avLst/>
-          </a:prstGeom>
-          <a:noFill/>
-        </p:spPr>
-        <p:txBody>
-          <a:bodyPr wrap="square">
-            <a:spAutoFit/>
-          </a:bodyPr>
-          <a:lstStyle/>
-          <a:p>
-            <a:pPr>
-              <a:defRPr>
-                <a:latin typeface="Roboto"/>
-              </a:defRPr>
-            </a:pPr>
-            <a:r>
-              <a:rPr sz="1600" b="0">
-                <a:solidFill>
-                  <a:srgbClr val="25342A"/>
-                </a:solidFill>
-                <a:latin typeface="Roboto"/>
-              </a:rPr>
-              <a:t>The full cost is $4,717 a month; $2,018 of it is shared cost the grant doesn't pay for. Worth asking for as much of it as the funder allows at renewal.</a:t>
-            </a:r>
-          </a:p>
-        </p:txBody>
-      </p:sp>
-      <p:sp>
-        <p:nvSpPr>
-          <p:cNvPr id="11" name="TextBox 10"/>
-          <p:cNvSpPr txBox="1"/>
-          <p:nvPr/>
-        </p:nvSpPr>
-        <p:spPr>
-          <a:xfrm>
-            <a:off x="457200" y="6492240"/>
-            <a:ext cx="3657600" cy="274320"/>
-          </a:xfrm>
-          <a:prstGeom prst="rect">
-            <a:avLst/>
-          </a:prstGeom>
-          <a:noFill/>
-        </p:spPr>
-        <p:txBody>
-          <a:bodyPr wrap="square">
-            <a:spAutoFit/>
-          </a:bodyPr>
-          <a:lstStyle/>
-          <a:p>
-            <a:pPr>
-              <a:defRPr>
-                <a:latin typeface="Roboto"/>
-              </a:defRPr>
-            </a:pPr>
-            <a:r>
-              <a:rPr sz="900" b="0">
-                <a:solidFill>
-                  <a:srgbClr val="5F6F63"/>
-                </a:solidFill>
-                <a:latin typeface="Roboto"/>
-              </a:rPr>
-              <a:t>program-cost.pptx</a:t>
-            </a:r>
-          </a:p>
-        </p:txBody>
-      </p:sp>
-      <p:sp>
-        <p:nvSpPr>
-          <p:cNvPr id="12" name="TextBox 11"/>
-          <p:cNvSpPr txBox="1"/>
-          <p:nvPr/>
-        </p:nvSpPr>
-        <p:spPr>
-          <a:xfrm>
-            <a:off x="4297680" y="6492240"/>
-            <a:ext cx="3657600" cy="274320"/>
-          </a:xfrm>
-          <a:prstGeom prst="rect">
-            <a:avLst/>
-          </a:prstGeom>
-          <a:noFill/>
-        </p:spPr>
-        <p:txBody>
-          <a:bodyPr wrap="square">
-            <a:spAutoFit/>
-          </a:bodyPr>
-          <a:lstStyle/>
-          <a:p>
-            <a:pPr algn="ctr">
-              <a:defRPr>
-                <a:latin typeface="Roboto"/>
-              </a:defRPr>
-            </a:pPr>
-            <a:r>
-              <a:rPr sz="900" b="0">
-                <a:solidFill>
-                  <a:srgbClr val="5F6F63"/>
-                </a:solidFill>
-                <a:latin typeface="Roboto"/>
-              </a:rPr>
-              <a:t>Data retrieved 2pm, Tue 6 Oct 2026 · Sample data</a:t>
-            </a:r>
-          </a:p>
-        </p:txBody>
-      </p:sp>
-      <p:sp>
-        <p:nvSpPr>
-          <p:cNvPr id="13" name="TextBox 12"/>
-          <p:cNvSpPr txBox="1"/>
-          <p:nvPr/>
-        </p:nvSpPr>
-        <p:spPr>
-          <a:xfrm>
-            <a:off x="8503920" y="6492240"/>
-            <a:ext cx="3200400" cy="274320"/>
-          </a:xfrm>
-          <a:prstGeom prst="rect">
-            <a:avLst/>
-          </a:prstGeom>
-          <a:noFill/>
-        </p:spPr>
-        <p:txBody>
-          <a:bodyPr wrap="square">
-            <a:spAutoFit/>
-          </a:bodyPr>
-          <a:lstStyle/>
-          <a:p>
-            <a:pPr algn="r">
-              <a:defRPr>
-                <a:latin typeface="Roboto"/>
-              </a:defRPr>
-            </a:pPr>
-            <a:r>
-              <a:rPr sz="900" b="0">
-                <a:solidFill>
-                  <a:srgbClr val="5F6F63"/>
-                </a:solidFill>
-                <a:latin typeface="Roboto"/>
-              </a:rPr>
-              <a:t>Slide 10 of 11</a:t>
-            </a:r>
-          </a:p>
-        </p:txBody>
-      </p:sp>
-    </p:spTree>
-  </p:cSld>
-  <p:clrMapOvr>
-    <a:masterClrMapping/>
-  </p:clrMapOvr>
-</p:sld>
-</file>
-
-<file path=ppt/slides/slide11.xml><?xml version="1.0" encoding="utf-8"?>
-<p:sld xmlns:a="http://schemas.openxmlformats.org/drawingml/2006/main" xmlns:p="http://schemas.openxmlformats.org/presentationml/2006/main" xmlns:r="http://schemas.openxmlformats.org/officeDocument/2006/relationships">
-  <p:cSld>
-    <p:spTree>
-      <p:nvGrpSpPr>
-        <p:cNvPr id="1" name=""/>
-        <p:cNvGrpSpPr/>
-        <p:nvPr/>
-      </p:nvGrpSpPr>
-      <p:grpSpPr/>
-      <p:sp>
-        <p:nvSpPr>
-          <p:cNvPr id="2" name="Rectangle 1"/>
-          <p:cNvSpPr/>
-          <p:nvPr/>
-        </p:nvSpPr>
-        <p:spPr>
-          <a:xfrm>
-            <a:off x="0" y="0"/>
-            <a:ext cx="12191695" cy="73152"/>
-          </a:xfrm>
-          <a:prstGeom prst="rect">
-            <a:avLst/>
-          </a:prstGeom>
-          <a:solidFill>
-            <a:srgbClr val="2F7A5D"/>
-          </a:solidFill>
-          <a:ln>
-            <a:noFill/>
-          </a:ln>
-        </p:spPr>
-        <p:style>
-          <a:lnRef idx="1">
-            <a:schemeClr val="accent1"/>
-          </a:lnRef>
-          <a:fillRef idx="3">
-            <a:schemeClr val="accent1"/>
-          </a:fillRef>
-          <a:effectRef idx="2">
-            <a:schemeClr val="accent1"/>
-          </a:effectRef>
-          <a:fontRef idx="minor">
-            <a:schemeClr val="lt1"/>
-          </a:fontRef>
-        </p:style>
-        <p:txBody>
-          <a:bodyPr rtlCol="0" anchor="ctr"/>
-          <a:lstStyle/>
-          <a:p>
-            <a:pPr algn="ctr">
-              <a:defRPr>
-                <a:latin typeface="Roboto"/>
-              </a:defRPr>
-            </a:pPr>
-          </a:p>
-        </p:txBody>
-      </p:sp>
-      <p:sp>
-        <p:nvSpPr>
-          <p:cNvPr id="3" name="TextBox 2"/>
-          <p:cNvSpPr txBox="1"/>
-          <p:nvPr/>
-        </p:nvSpPr>
-        <p:spPr>
-          <a:xfrm>
-            <a:off x="457200" y="164592"/>
-            <a:ext cx="7315200" cy="274320"/>
-          </a:xfrm>
-          <a:prstGeom prst="rect">
-            <a:avLst/>
-          </a:prstGeom>
-          <a:noFill/>
-        </p:spPr>
-        <p:txBody>
-          <a:bodyPr wrap="square">
-            <a:spAutoFit/>
-          </a:bodyPr>
-          <a:lstStyle/>
-          <a:p>
-            <a:pPr>
-              <a:defRPr>
-                <a:latin typeface="Roboto"/>
-              </a:defRPr>
-            </a:pPr>
-            <a:r>
-              <a:rPr sz="1000" b="0">
-                <a:solidFill>
-                  <a:srgbClr val="5F6F63"/>
-                </a:solidFill>
-                <a:latin typeface="Roboto"/>
-              </a:rPr>
-              <a:t>Sample Community Services Ltd · What does each program really cost?</a:t>
-            </a:r>
-          </a:p>
-        </p:txBody>
-      </p:sp>
-      <p:sp>
-        <p:nvSpPr>
-          <p:cNvPr id="4" name="TextBox 3"/>
-          <p:cNvSpPr txBox="1"/>
-          <p:nvPr/>
-        </p:nvSpPr>
-        <p:spPr>
-          <a:xfrm>
-            <a:off x="457200" y="411480"/>
-            <a:ext cx="11247120" cy="548640"/>
-          </a:xfrm>
-          <a:prstGeom prst="rect">
-            <a:avLst/>
-          </a:prstGeom>
-          <a:noFill/>
-        </p:spPr>
-        <p:txBody>
-          <a:bodyPr wrap="square">
-            <a:spAutoFit/>
-          </a:bodyPr>
-          <a:lstStyle/>
-          <a:p>
-            <a:pPr>
-              <a:defRPr>
-                <a:latin typeface="Roboto"/>
-              </a:defRPr>
-            </a:pPr>
-            <a:r>
-              <a:rPr sz="2400" b="1">
-                <a:solidFill>
-                  <a:srgbClr val="25342A"/>
-                </a:solidFill>
-                <a:latin typeface="Roboto"/>
-              </a:rPr>
-              <a:t>Grant spending, by month · Spend $ · Every program at once</a:t>
-            </a:r>
-          </a:p>
-        </p:txBody>
-      </p:sp>
-      <p:sp>
-        <p:nvSpPr>
-          <p:cNvPr id="5" name="TextBox 4"/>
-          <p:cNvSpPr txBox="1"/>
-          <p:nvPr/>
-        </p:nvSpPr>
-        <p:spPr>
-          <a:xfrm>
-            <a:off x="457200" y="960120"/>
-            <a:ext cx="11247120" cy="457200"/>
-          </a:xfrm>
-          <a:prstGeom prst="rect">
-            <a:avLst/>
-          </a:prstGeom>
-          <a:noFill/>
-        </p:spPr>
-        <p:txBody>
-          <a:bodyPr wrap="square">
-            <a:spAutoFit/>
-          </a:bodyPr>
-          <a:lstStyle/>
-          <a:p>
-            <a:pPr>
-              <a:defRPr>
-                <a:latin typeface="Roboto"/>
-              </a:defRPr>
-            </a:pPr>
-            <a:r>
-              <a:rPr sz="1200" b="0">
-                <a:solidFill>
-                  <a:srgbClr val="5F6F63"/>
-                </a:solidFill>
-                <a:latin typeface="Roboto"/>
-              </a:rPr>
-              <a:t>Grant spending only (the program's direct cost). All programs includes grants that have finished.</a:t>
-            </a:r>
-          </a:p>
-        </p:txBody>
-      </p:sp>
-      <p:graphicFrame>
-        <p:nvGraphicFramePr>
-          <p:cNvPr id="6" name="Chart 5"/>
-          <p:cNvGraphicFramePr>
-            <a:graphicFrameLocks noGrp="1"/>
-          </p:cNvGraphicFramePr>
-          <p:nvPr/>
-        </p:nvGraphicFramePr>
-        <p:xfrm>
-          <a:off x="457200" y="1463040"/>
-          <a:ext cx="11247120" cy="4754880"/>
-        </p:xfrm>
-        <a:graphic>
-          <a:graphicData uri="http://schemas.openxmlformats.org/drawingml/2006/chart">
-            <c:chart xmlns:c="http://schemas.openxmlformats.org/drawingml/2006/chart" r:id="rId2"/>
-          </a:graphicData>
-        </a:graphic>
-      </p:graphicFrame>
-      <p:sp>
-        <p:nvSpPr>
-          <p:cNvPr id="7" name="TextBox 6"/>
-          <p:cNvSpPr txBox="1"/>
-          <p:nvPr/>
-        </p:nvSpPr>
-        <p:spPr>
-          <a:xfrm>
-            <a:off x="457200" y="6492240"/>
-            <a:ext cx="3657600" cy="274320"/>
-          </a:xfrm>
-          <a:prstGeom prst="rect">
-            <a:avLst/>
-          </a:prstGeom>
-          <a:noFill/>
-        </p:spPr>
-        <p:txBody>
-          <a:bodyPr wrap="square">
-            <a:spAutoFit/>
-          </a:bodyPr>
-          <a:lstStyle/>
-          <a:p>
-            <a:pPr>
-              <a:defRPr>
-                <a:latin typeface="Roboto"/>
-              </a:defRPr>
-            </a:pPr>
-            <a:r>
-              <a:rPr sz="900" b="0">
-                <a:solidFill>
-                  <a:srgbClr val="5F6F63"/>
-                </a:solidFill>
-                <a:latin typeface="Roboto"/>
-              </a:rPr>
-              <a:t>program-cost.pptx</a:t>
-            </a:r>
-          </a:p>
-        </p:txBody>
-      </p:sp>
-      <p:sp>
-        <p:nvSpPr>
-          <p:cNvPr id="8" name="TextBox 7"/>
-          <p:cNvSpPr txBox="1"/>
-          <p:nvPr/>
-        </p:nvSpPr>
-        <p:spPr>
-          <a:xfrm>
-            <a:off x="4297680" y="6492240"/>
-            <a:ext cx="3657600" cy="274320"/>
-          </a:xfrm>
-          <a:prstGeom prst="rect">
-            <a:avLst/>
-          </a:prstGeom>
-          <a:noFill/>
-        </p:spPr>
-        <p:txBody>
-          <a:bodyPr wrap="square">
-            <a:spAutoFit/>
-          </a:bodyPr>
-          <a:lstStyle/>
-          <a:p>
-            <a:pPr algn="ctr">
-              <a:defRPr>
-                <a:latin typeface="Roboto"/>
-              </a:defRPr>
-            </a:pPr>
-            <a:r>
-              <a:rPr sz="900" b="0">
-                <a:solidFill>
-                  <a:srgbClr val="5F6F63"/>
-                </a:solidFill>
-                <a:latin typeface="Roboto"/>
-              </a:rPr>
-              <a:t>Data retrieved 2pm, Tue 6 Oct 2026 · Sample data</a:t>
-            </a:r>
-          </a:p>
-        </p:txBody>
-      </p:sp>
-      <p:sp>
-        <p:nvSpPr>
-          <p:cNvPr id="9" name="TextBox 8"/>
-          <p:cNvSpPr txBox="1"/>
-          <p:nvPr/>
-        </p:nvSpPr>
-        <p:spPr>
-          <a:xfrm>
-            <a:off x="8503920" y="6492240"/>
-            <a:ext cx="3200400" cy="274320"/>
-          </a:xfrm>
-          <a:prstGeom prst="rect">
-            <a:avLst/>
-          </a:prstGeom>
-          <a:noFill/>
-        </p:spPr>
-        <p:txBody>
-          <a:bodyPr wrap="square">
-            <a:spAutoFit/>
-          </a:bodyPr>
-          <a:lstStyle/>
-          <a:p>
-            <a:pPr algn="r">
-              <a:defRPr>
-                <a:latin typeface="Roboto"/>
-              </a:defRPr>
-            </a:pPr>
-            <a:r>
-              <a:rPr sz="900" b="0">
-                <a:solidFill>
-                  <a:srgbClr val="5F6F63"/>
-                </a:solidFill>
-                <a:latin typeface="Roboto"/>
-              </a:rPr>
-              <a:t>Slide 11 of 11</a:t>
+              <a:t>Slide 1 of 8</a:t>
             </a:r>
           </a:p>
         </p:txBody>
@@ -5108,7 +6468,44 @@
       <p:grpSpPr/>
       <p:sp>
         <p:nvSpPr>
-          <p:cNvPr id="2" name="Rectangle 1"/>
+          <p:cNvPr id="2" name="Title 1"/>
+          <p:cNvSpPr>
+            <a:spLocks noGrp="1"/>
+          </p:cNvSpPr>
+          <p:nvPr>
+            <p:ph type="title"/>
+          </p:nvPr>
+        </p:nvSpPr>
+        <p:spPr>
+          <a:xfrm>
+            <a:off x="457200" y="384048"/>
+            <a:ext cx="11277295" cy="475488"/>
+          </a:xfrm>
+        </p:spPr>
+        <p:txBody>
+          <a:bodyPr wrap="square" lIns="45720" rIns="45720" tIns="0" bIns="0" anchor="t"/>
+          <a:lstStyle/>
+          <a:p>
+            <a:pPr algn="l">
+              <a:defRPr>
+                <a:latin typeface="Roboto"/>
+              </a:defRPr>
+            </a:pPr>
+            <a:r>
+              <a:rPr sz="2400" b="1">
+                <a:solidFill>
+                  <a:srgbClr val="25342A"/>
+                </a:solidFill>
+                <a:latin typeface="Roboto"/>
+              </a:rPr>
+              <a:t>All programs</a:t>
+            </a:r>
+          </a:p>
+        </p:txBody>
+      </p:sp>
+      <p:sp>
+        <p:nvSpPr>
+          <p:cNvPr id="3" name="Rectangle 2"/>
           <p:cNvSpPr/>
           <p:nvPr/>
         </p:nvSpPr>
@@ -5155,14 +6552,14 @@
       </p:sp>
       <p:sp>
         <p:nvSpPr>
-          <p:cNvPr id="3" name="TextBox 2"/>
+          <p:cNvPr id="4" name="TextBox 3"/>
           <p:cNvSpPr txBox="1"/>
           <p:nvPr/>
         </p:nvSpPr>
         <p:spPr>
           <a:xfrm>
-            <a:off x="457200" y="164592"/>
-            <a:ext cx="7315200" cy="274320"/>
+            <a:off x="457200" y="146304"/>
+            <a:ext cx="8229600" cy="256032"/>
           </a:xfrm>
           <a:prstGeom prst="rect">
             <a:avLst/>
@@ -5170,7 +6567,7 @@
           <a:noFill/>
         </p:spPr>
         <p:txBody>
-          <a:bodyPr wrap="square">
+          <a:bodyPr wrap="square" lIns="45720" rIns="45720">
             <a:spAutoFit/>
           </a:bodyPr>
           <a:lstStyle/>
@@ -5194,14 +6591,14 @@
       </p:sp>
       <p:sp>
         <p:nvSpPr>
-          <p:cNvPr id="4" name="TextBox 3"/>
+          <p:cNvPr id="5" name="TextBox 4"/>
           <p:cNvSpPr txBox="1"/>
           <p:nvPr/>
         </p:nvSpPr>
         <p:spPr>
           <a:xfrm>
-            <a:off x="457200" y="411480"/>
-            <a:ext cx="11247120" cy="548640"/>
+            <a:off x="457200" y="914400"/>
+            <a:ext cx="11277295" cy="263652"/>
           </a:xfrm>
           <a:prstGeom prst="rect">
             <a:avLst/>
@@ -5209,7 +6606,7 @@
           <a:noFill/>
         </p:spPr>
         <p:txBody>
-          <a:bodyPr wrap="square">
+          <a:bodyPr wrap="square" lIns="45720" rIns="45720">
             <a:spAutoFit/>
           </a:bodyPr>
           <a:lstStyle/>
@@ -5220,45 +6617,94 @@
               </a:defRPr>
             </a:pPr>
             <a:r>
-              <a:rPr sz="2400" b="1">
+              <a:rPr sz="1200" b="0">
                 <a:solidFill>
-                  <a:srgbClr val="25342A"/>
+                  <a:srgbClr val="5F6F63"/>
                 </a:solidFill>
                 <a:latin typeface="Roboto"/>
               </a:rPr>
-              <a:t>Full cost of each program, June 2026 · $ · Program: All programs</a:t>
+              <a:t>Full cost of each program, June 2026</a:t>
             </a:r>
           </a:p>
         </p:txBody>
       </p:sp>
       <p:graphicFrame>
         <p:nvGraphicFramePr>
-          <p:cNvPr id="5" name="Chart 4"/>
+          <p:cNvPr id="6" name="Chart 5"/>
           <p:cNvGraphicFramePr>
             <a:graphicFrameLocks noGrp="1"/>
           </p:cNvGraphicFramePr>
           <p:nvPr/>
         </p:nvGraphicFramePr>
         <p:xfrm>
-          <a:off x="457200" y="1188720"/>
-          <a:ext cx="11247120" cy="5029200"/>
+          <a:off x="457200" y="1278636"/>
+          <a:ext cx="11277295" cy="3035808"/>
         </p:xfrm>
         <a:graphic>
           <a:graphicData uri="http://schemas.openxmlformats.org/drawingml/2006/chart">
-            <c:chart xmlns:c="http://schemas.openxmlformats.org/drawingml/2006/chart" r:id="rId2"/>
+            <c:chart xmlns:c="http://schemas.openxmlformats.org/drawingml/2006/chart" r:id="rId3"/>
           </a:graphicData>
         </a:graphic>
       </p:graphicFrame>
       <p:sp>
         <p:nvSpPr>
-          <p:cNvPr id="6" name="TextBox 5"/>
+          <p:cNvPr id="7" name="Rectangle 6"/>
+          <p:cNvSpPr/>
+          <p:nvPr/>
+        </p:nvSpPr>
+        <p:spPr>
+          <a:xfrm>
+            <a:off x="457200" y="4405884"/>
+            <a:ext cx="5501487" cy="1295400"/>
+          </a:xfrm>
+          <a:prstGeom prst="rect">
+            <a:avLst/>
+          </a:prstGeom>
+          <a:solidFill>
+            <a:srgbClr val="FFFFFF"/>
+          </a:solidFill>
+          <a:ln>
+            <a:solidFill>
+              <a:srgbClr val="DCE8DC"/>
+            </a:solidFill>
+          </a:ln>
+        </p:spPr>
+        <p:style>
+          <a:lnRef idx="1">
+            <a:schemeClr val="accent1"/>
+          </a:lnRef>
+          <a:fillRef idx="3">
+            <a:schemeClr val="accent1"/>
+          </a:fillRef>
+          <a:effectRef idx="2">
+            <a:schemeClr val="accent1"/>
+          </a:effectRef>
+          <a:fontRef idx="minor">
+            <a:schemeClr val="lt1"/>
+          </a:fontRef>
+        </p:style>
+        <p:txBody>
+          <a:bodyPr rtlCol="0" anchor="ctr"/>
+          <a:lstStyle/>
+          <a:p>
+            <a:pPr algn="ctr">
+              <a:defRPr>
+                <a:latin typeface="Roboto"/>
+              </a:defRPr>
+            </a:pPr>
+          </a:p>
+        </p:txBody>
+      </p:sp>
+      <p:sp>
+        <p:nvSpPr>
+          <p:cNvPr id="8" name="TextBox 7"/>
           <p:cNvSpPr txBox="1"/>
           <p:nvPr/>
         </p:nvSpPr>
         <p:spPr>
           <a:xfrm>
-            <a:off x="457200" y="6492240"/>
-            <a:ext cx="3657600" cy="274320"/>
+            <a:off x="594360" y="4460748"/>
+            <a:ext cx="5227167" cy="274320"/>
           </a:xfrm>
           <a:prstGeom prst="rect">
             <a:avLst/>
@@ -5266,7 +6712,212 @@
           <a:noFill/>
         </p:spPr>
         <p:txBody>
-          <a:bodyPr wrap="square">
+          <a:bodyPr wrap="square" lIns="45720" rIns="45720">
+            <a:spAutoFit/>
+          </a:bodyPr>
+          <a:lstStyle/>
+          <a:p>
+            <a:pPr>
+              <a:defRPr>
+                <a:latin typeface="Roboto"/>
+              </a:defRPr>
+            </a:pPr>
+            <a:r>
+              <a:rPr sz="1000" b="1">
+                <a:solidFill>
+                  <a:srgbClr val="5F6F63"/>
+                </a:solidFill>
+                <a:latin typeface="Roboto"/>
+              </a:rPr>
+              <a:t>WHAT IT SHOWS</a:t>
+            </a:r>
+          </a:p>
+        </p:txBody>
+      </p:sp>
+      <p:sp>
+        <p:nvSpPr>
+          <p:cNvPr id="9" name="TextBox 8"/>
+          <p:cNvSpPr txBox="1"/>
+          <p:nvPr/>
+        </p:nvSpPr>
+        <p:spPr>
+          <a:xfrm>
+            <a:off x="594360" y="4735068"/>
+            <a:ext cx="5227167" cy="929640"/>
+          </a:xfrm>
+          <a:prstGeom prst="rect">
+            <a:avLst/>
+          </a:prstGeom>
+          <a:noFill/>
+        </p:spPr>
+        <p:txBody>
+          <a:bodyPr wrap="square" lIns="45720" rIns="45720">
+            <a:spAutoFit/>
+          </a:bodyPr>
+          <a:lstStyle/>
+          <a:p>
+            <a:pPr>
+              <a:defRPr>
+                <a:latin typeface="Roboto"/>
+              </a:defRPr>
+            </a:pPr>
+            <a:r>
+              <a:rPr sz="1200" b="0">
+                <a:solidFill>
+                  <a:srgbClr val="25342A"/>
+                </a:solidFill>
+                <a:latin typeface="Roboto"/>
+              </a:rPr>
+              <a:t>Housing support is the biggest program: $52,424 in June once its share of untied program costs and administration is added to $29,994 of grant spending. Shared costs add 74.8% on top of grant spending across all programs.</a:t>
+            </a:r>
+          </a:p>
+        </p:txBody>
+      </p:sp>
+      <p:sp>
+        <p:nvSpPr>
+          <p:cNvPr id="10" name="Rectangle 9"/>
+          <p:cNvSpPr/>
+          <p:nvPr/>
+        </p:nvSpPr>
+        <p:spPr>
+          <a:xfrm>
+            <a:off x="6233007" y="4405884"/>
+            <a:ext cx="5501487" cy="1295400"/>
+          </a:xfrm>
+          <a:prstGeom prst="rect">
+            <a:avLst/>
+          </a:prstGeom>
+          <a:solidFill>
+            <a:srgbClr val="EEF5F0"/>
+          </a:solidFill>
+          <a:ln>
+            <a:solidFill>
+              <a:srgbClr val="DCE8DC"/>
+            </a:solidFill>
+          </a:ln>
+        </p:spPr>
+        <p:style>
+          <a:lnRef idx="1">
+            <a:schemeClr val="accent1"/>
+          </a:lnRef>
+          <a:fillRef idx="3">
+            <a:schemeClr val="accent1"/>
+          </a:fillRef>
+          <a:effectRef idx="2">
+            <a:schemeClr val="accent1"/>
+          </a:effectRef>
+          <a:fontRef idx="minor">
+            <a:schemeClr val="lt1"/>
+          </a:fontRef>
+        </p:style>
+        <p:txBody>
+          <a:bodyPr rtlCol="0" anchor="ctr"/>
+          <a:lstStyle/>
+          <a:p>
+            <a:pPr algn="ctr">
+              <a:defRPr>
+                <a:latin typeface="Roboto"/>
+              </a:defRPr>
+            </a:pPr>
+          </a:p>
+        </p:txBody>
+      </p:sp>
+      <p:sp>
+        <p:nvSpPr>
+          <p:cNvPr id="11" name="TextBox 10"/>
+          <p:cNvSpPr txBox="1"/>
+          <p:nvPr/>
+        </p:nvSpPr>
+        <p:spPr>
+          <a:xfrm>
+            <a:off x="6370167" y="4460748"/>
+            <a:ext cx="5227167" cy="274320"/>
+          </a:xfrm>
+          <a:prstGeom prst="rect">
+            <a:avLst/>
+          </a:prstGeom>
+          <a:noFill/>
+        </p:spPr>
+        <p:txBody>
+          <a:bodyPr wrap="square" lIns="45720" rIns="45720">
+            <a:spAutoFit/>
+          </a:bodyPr>
+          <a:lstStyle/>
+          <a:p>
+            <a:pPr>
+              <a:defRPr>
+                <a:latin typeface="Roboto"/>
+              </a:defRPr>
+            </a:pPr>
+            <a:r>
+              <a:rPr sz="1000" b="1">
+                <a:solidFill>
+                  <a:srgbClr val="5F6F63"/>
+                </a:solidFill>
+                <a:latin typeface="Roboto"/>
+              </a:rPr>
+              <a:t>WHAT YOU'D DO ABOUT IT</a:t>
+            </a:r>
+          </a:p>
+        </p:txBody>
+      </p:sp>
+      <p:sp>
+        <p:nvSpPr>
+          <p:cNvPr id="12" name="TextBox 11"/>
+          <p:cNvSpPr txBox="1"/>
+          <p:nvPr/>
+        </p:nvSpPr>
+        <p:spPr>
+          <a:xfrm>
+            <a:off x="6370167" y="4735068"/>
+            <a:ext cx="5227167" cy="929640"/>
+          </a:xfrm>
+          <a:prstGeom prst="rect">
+            <a:avLst/>
+          </a:prstGeom>
+          <a:noFill/>
+        </p:spPr>
+        <p:txBody>
+          <a:bodyPr wrap="square" lIns="45720" rIns="45720">
+            <a:spAutoFit/>
+          </a:bodyPr>
+          <a:lstStyle/>
+          <a:p>
+            <a:pPr>
+              <a:defRPr>
+                <a:latin typeface="Roboto"/>
+              </a:defRPr>
+            </a:pPr>
+            <a:r>
+              <a:rPr sz="1200" b="0">
+                <a:solidFill>
+                  <a:srgbClr val="25342A"/>
+                </a:solidFill>
+                <a:latin typeface="Roboto"/>
+              </a:rPr>
+              <a:t>The full cost (not just the grant line) is the number for renewal applications, where the funder lets you recover a share of overheads. Pick a program above to see it on its own.</a:t>
+            </a:r>
+          </a:p>
+        </p:txBody>
+      </p:sp>
+      <p:sp>
+        <p:nvSpPr>
+          <p:cNvPr id="13" name="TextBox 12"/>
+          <p:cNvSpPr txBox="1"/>
+          <p:nvPr/>
+        </p:nvSpPr>
+        <p:spPr>
+          <a:xfrm>
+            <a:off x="457200" y="6492240"/>
+            <a:ext cx="2926080" cy="274320"/>
+          </a:xfrm>
+          <a:prstGeom prst="rect">
+            <a:avLst/>
+          </a:prstGeom>
+          <a:noFill/>
+        </p:spPr>
+        <p:txBody>
+          <a:bodyPr wrap="square" lIns="45720" rIns="45720">
             <a:spAutoFit/>
           </a:bodyPr>
           <a:lstStyle/>
@@ -5290,14 +6941,14 @@
       </p:sp>
       <p:sp>
         <p:nvSpPr>
-          <p:cNvPr id="7" name="TextBox 6"/>
+          <p:cNvPr id="14" name="TextBox 13"/>
           <p:cNvSpPr txBox="1"/>
           <p:nvPr/>
         </p:nvSpPr>
         <p:spPr>
           <a:xfrm>
-            <a:off x="4297680" y="6492240"/>
-            <a:ext cx="3657600" cy="274320"/>
+            <a:off x="3108960" y="6492240"/>
+            <a:ext cx="5943600" cy="274320"/>
           </a:xfrm>
           <a:prstGeom prst="rect">
             <a:avLst/>
@@ -5305,7 +6956,7 @@
           <a:noFill/>
         </p:spPr>
         <p:txBody>
-          <a:bodyPr wrap="square">
+          <a:bodyPr wrap="square" lIns="45720" rIns="45720">
             <a:spAutoFit/>
           </a:bodyPr>
           <a:lstStyle/>
@@ -5322,14 +6973,14 @@
                 </a:solidFill>
                 <a:latin typeface="Roboto"/>
               </a:rPr>
-              <a:t>Data retrieved 2pm, Tue 6 Oct 2026 · Sample data</a:t>
-            </a:r>
-          </a:p>
-        </p:txBody>
-      </p:sp>
-      <p:sp>
-        <p:nvSpPr>
-          <p:cNvPr id="8" name="TextBox 7"/>
+              <a:t>Data retrieved 2pm, Tue 6 Oct 2026 · Generated 8 Oct 2026, 9:35am · Sample data · Made with Python (python-pptx)</a:t>
+            </a:r>
+          </a:p>
+        </p:txBody>
+      </p:sp>
+      <p:sp>
+        <p:nvSpPr>
+          <p:cNvPr id="15" name="TextBox 14"/>
           <p:cNvSpPr txBox="1"/>
           <p:nvPr/>
         </p:nvSpPr>
@@ -5344,7 +6995,7 @@
           <a:noFill/>
         </p:spPr>
         <p:txBody>
-          <a:bodyPr wrap="square">
+          <a:bodyPr wrap="square" lIns="45720" rIns="45720">
             <a:spAutoFit/>
           </a:bodyPr>
           <a:lstStyle/>
@@ -5361,7 +7012,7 @@
                 </a:solidFill>
                 <a:latin typeface="Roboto"/>
               </a:rPr>
-              <a:t>Slide 2 of 11</a:t>
+              <a:t>Slide 2 of 8</a:t>
             </a:r>
           </a:p>
         </p:txBody>
@@ -5386,7 +7037,44 @@
       <p:grpSpPr/>
       <p:sp>
         <p:nvSpPr>
-          <p:cNvPr id="2" name="Rectangle 1"/>
+          <p:cNvPr id="2" name="Title 1"/>
+          <p:cNvSpPr>
+            <a:spLocks noGrp="1"/>
+          </p:cNvSpPr>
+          <p:nvPr>
+            <p:ph type="title"/>
+          </p:nvPr>
+        </p:nvSpPr>
+        <p:spPr>
+          <a:xfrm>
+            <a:off x="457200" y="384048"/>
+            <a:ext cx="11277295" cy="475488"/>
+          </a:xfrm>
+        </p:spPr>
+        <p:txBody>
+          <a:bodyPr wrap="square" lIns="45720" rIns="45720" tIns="0" bIns="0" anchor="t"/>
+          <a:lstStyle/>
+          <a:p>
+            <a:pPr algn="l">
+              <a:defRPr>
+                <a:latin typeface="Roboto"/>
+              </a:defRPr>
+            </a:pPr>
+            <a:r>
+              <a:rPr sz="2400" b="1">
+                <a:solidFill>
+                  <a:srgbClr val="25342A"/>
+                </a:solidFill>
+                <a:latin typeface="Roboto"/>
+              </a:rPr>
+              <a:t>Housing support</a:t>
+            </a:r>
+          </a:p>
+        </p:txBody>
+      </p:sp>
+      <p:sp>
+        <p:nvSpPr>
+          <p:cNvPr id="3" name="Rectangle 2"/>
           <p:cNvSpPr/>
           <p:nvPr/>
         </p:nvSpPr>
@@ -5433,14 +7121,14 @@
       </p:sp>
       <p:sp>
         <p:nvSpPr>
-          <p:cNvPr id="3" name="TextBox 2"/>
+          <p:cNvPr id="4" name="TextBox 3"/>
           <p:cNvSpPr txBox="1"/>
           <p:nvPr/>
         </p:nvSpPr>
         <p:spPr>
           <a:xfrm>
-            <a:off x="457200" y="164592"/>
-            <a:ext cx="7315200" cy="274320"/>
+            <a:off x="457200" y="146304"/>
+            <a:ext cx="8229600" cy="256032"/>
           </a:xfrm>
           <a:prstGeom prst="rect">
             <a:avLst/>
@@ -5448,7 +7136,7 @@
           <a:noFill/>
         </p:spPr>
         <p:txBody>
-          <a:bodyPr wrap="square">
+          <a:bodyPr wrap="square" lIns="45720" rIns="45720">
             <a:spAutoFit/>
           </a:bodyPr>
           <a:lstStyle/>
@@ -5472,14 +7160,14 @@
       </p:sp>
       <p:sp>
         <p:nvSpPr>
-          <p:cNvPr id="4" name="TextBox 3"/>
+          <p:cNvPr id="5" name="TextBox 4"/>
           <p:cNvSpPr txBox="1"/>
           <p:nvPr/>
         </p:nvSpPr>
         <p:spPr>
           <a:xfrm>
-            <a:off x="457200" y="411480"/>
-            <a:ext cx="11247120" cy="548640"/>
+            <a:off x="457200" y="914400"/>
+            <a:ext cx="11277295" cy="263652"/>
           </a:xfrm>
           <a:prstGeom prst="rect">
             <a:avLst/>
@@ -5487,7 +7175,7 @@
           <a:noFill/>
         </p:spPr>
         <p:txBody>
-          <a:bodyPr wrap="square">
+          <a:bodyPr wrap="square" lIns="45720" rIns="45720">
             <a:spAutoFit/>
           </a:bodyPr>
           <a:lstStyle/>
@@ -5498,45 +7186,94 @@
               </a:defRPr>
             </a:pPr>
             <a:r>
-              <a:rPr sz="2400" b="1">
+              <a:rPr sz="1200" b="0">
                 <a:solidFill>
-                  <a:srgbClr val="25342A"/>
+                  <a:srgbClr val="5F6F63"/>
                 </a:solidFill>
                 <a:latin typeface="Roboto"/>
               </a:rPr>
-              <a:t>Full cost of each program, June 2026 · % of total · Program: All programs</a:t>
+              <a:t>Grant spending, by month · Housing support</a:t>
             </a:r>
           </a:p>
         </p:txBody>
       </p:sp>
       <p:graphicFrame>
         <p:nvGraphicFramePr>
-          <p:cNvPr id="5" name="Chart 4"/>
+          <p:cNvPr id="6" name="Chart 5"/>
           <p:cNvGraphicFramePr>
             <a:graphicFrameLocks noGrp="1"/>
           </p:cNvGraphicFramePr>
           <p:nvPr/>
         </p:nvGraphicFramePr>
         <p:xfrm>
-          <a:off x="457200" y="1188720"/>
-          <a:ext cx="11247120" cy="5029200"/>
+          <a:off x="457200" y="1278636"/>
+          <a:ext cx="11277295" cy="3643884"/>
         </p:xfrm>
         <a:graphic>
           <a:graphicData uri="http://schemas.openxmlformats.org/drawingml/2006/chart">
-            <c:chart xmlns:c="http://schemas.openxmlformats.org/drawingml/2006/chart" r:id="rId2"/>
+            <c:chart xmlns:c="http://schemas.openxmlformats.org/drawingml/2006/chart" r:id="rId3"/>
           </a:graphicData>
         </a:graphic>
       </p:graphicFrame>
       <p:sp>
         <p:nvSpPr>
-          <p:cNvPr id="6" name="TextBox 5"/>
+          <p:cNvPr id="7" name="Rectangle 6"/>
+          <p:cNvSpPr/>
+          <p:nvPr/>
+        </p:nvSpPr>
+        <p:spPr>
+          <a:xfrm>
+            <a:off x="457200" y="5013960"/>
+            <a:ext cx="5501487" cy="1295400"/>
+          </a:xfrm>
+          <a:prstGeom prst="rect">
+            <a:avLst/>
+          </a:prstGeom>
+          <a:solidFill>
+            <a:srgbClr val="FFFFFF"/>
+          </a:solidFill>
+          <a:ln>
+            <a:solidFill>
+              <a:srgbClr val="DCE8DC"/>
+            </a:solidFill>
+          </a:ln>
+        </p:spPr>
+        <p:style>
+          <a:lnRef idx="1">
+            <a:schemeClr val="accent1"/>
+          </a:lnRef>
+          <a:fillRef idx="3">
+            <a:schemeClr val="accent1"/>
+          </a:fillRef>
+          <a:effectRef idx="2">
+            <a:schemeClr val="accent1"/>
+          </a:effectRef>
+          <a:fontRef idx="minor">
+            <a:schemeClr val="lt1"/>
+          </a:fontRef>
+        </p:style>
+        <p:txBody>
+          <a:bodyPr rtlCol="0" anchor="ctr"/>
+          <a:lstStyle/>
+          <a:p>
+            <a:pPr algn="ctr">
+              <a:defRPr>
+                <a:latin typeface="Roboto"/>
+              </a:defRPr>
+            </a:pPr>
+          </a:p>
+        </p:txBody>
+      </p:sp>
+      <p:sp>
+        <p:nvSpPr>
+          <p:cNvPr id="8" name="TextBox 7"/>
           <p:cNvSpPr txBox="1"/>
           <p:nvPr/>
         </p:nvSpPr>
         <p:spPr>
           <a:xfrm>
-            <a:off x="457200" y="6492240"/>
-            <a:ext cx="3657600" cy="274320"/>
+            <a:off x="594360" y="5068824"/>
+            <a:ext cx="5227167" cy="274320"/>
           </a:xfrm>
           <a:prstGeom prst="rect">
             <a:avLst/>
@@ -5544,7 +7281,212 @@
           <a:noFill/>
         </p:spPr>
         <p:txBody>
-          <a:bodyPr wrap="square">
+          <a:bodyPr wrap="square" lIns="45720" rIns="45720">
+            <a:spAutoFit/>
+          </a:bodyPr>
+          <a:lstStyle/>
+          <a:p>
+            <a:pPr>
+              <a:defRPr>
+                <a:latin typeface="Roboto"/>
+              </a:defRPr>
+            </a:pPr>
+            <a:r>
+              <a:rPr sz="1000" b="1">
+                <a:solidFill>
+                  <a:srgbClr val="5F6F63"/>
+                </a:solidFill>
+                <a:latin typeface="Roboto"/>
+              </a:rPr>
+              <a:t>WHAT IT SHOWS</a:t>
+            </a:r>
+          </a:p>
+        </p:txBody>
+      </p:sp>
+      <p:sp>
+        <p:nvSpPr>
+          <p:cNvPr id="9" name="TextBox 8"/>
+          <p:cNvSpPr txBox="1"/>
+          <p:nvPr/>
+        </p:nvSpPr>
+        <p:spPr>
+          <a:xfrm>
+            <a:off x="594360" y="5343144"/>
+            <a:ext cx="5227167" cy="929640"/>
+          </a:xfrm>
+          <a:prstGeom prst="rect">
+            <a:avLst/>
+          </a:prstGeom>
+          <a:noFill/>
+        </p:spPr>
+        <p:txBody>
+          <a:bodyPr wrap="square" lIns="45720" rIns="45720">
+            <a:spAutoFit/>
+          </a:bodyPr>
+          <a:lstStyle/>
+          <a:p>
+            <a:pPr>
+              <a:defRPr>
+                <a:latin typeface="Roboto"/>
+              </a:defRPr>
+            </a:pPr>
+            <a:r>
+              <a:rPr sz="1200" b="0">
+                <a:solidFill>
+                  <a:srgbClr val="25342A"/>
+                </a:solidFill>
+                <a:latin typeface="Roboto"/>
+              </a:rPr>
+              <a:t>Housing support cost $52,424 in full in June: $29,994 paid by the State Housing Program grant, and $22,430 of shared costs no grant covers. It has spent 92.7% of its budget to date, with $193,097 left and 6 months to go.</a:t>
+            </a:r>
+          </a:p>
+        </p:txBody>
+      </p:sp>
+      <p:sp>
+        <p:nvSpPr>
+          <p:cNvPr id="10" name="Rectangle 9"/>
+          <p:cNvSpPr/>
+          <p:nvPr/>
+        </p:nvSpPr>
+        <p:spPr>
+          <a:xfrm>
+            <a:off x="6233007" y="5013960"/>
+            <a:ext cx="5501487" cy="1295400"/>
+          </a:xfrm>
+          <a:prstGeom prst="rect">
+            <a:avLst/>
+          </a:prstGeom>
+          <a:solidFill>
+            <a:srgbClr val="EEF5F0"/>
+          </a:solidFill>
+          <a:ln>
+            <a:solidFill>
+              <a:srgbClr val="DCE8DC"/>
+            </a:solidFill>
+          </a:ln>
+        </p:spPr>
+        <p:style>
+          <a:lnRef idx="1">
+            <a:schemeClr val="accent1"/>
+          </a:lnRef>
+          <a:fillRef idx="3">
+            <a:schemeClr val="accent1"/>
+          </a:fillRef>
+          <a:effectRef idx="2">
+            <a:schemeClr val="accent1"/>
+          </a:effectRef>
+          <a:fontRef idx="minor">
+            <a:schemeClr val="lt1"/>
+          </a:fontRef>
+        </p:style>
+        <p:txBody>
+          <a:bodyPr rtlCol="0" anchor="ctr"/>
+          <a:lstStyle/>
+          <a:p>
+            <a:pPr algn="ctr">
+              <a:defRPr>
+                <a:latin typeface="Roboto"/>
+              </a:defRPr>
+            </a:pPr>
+          </a:p>
+        </p:txBody>
+      </p:sp>
+      <p:sp>
+        <p:nvSpPr>
+          <p:cNvPr id="11" name="TextBox 10"/>
+          <p:cNvSpPr txBox="1"/>
+          <p:nvPr/>
+        </p:nvSpPr>
+        <p:spPr>
+          <a:xfrm>
+            <a:off x="6370167" y="5068824"/>
+            <a:ext cx="5227167" cy="274320"/>
+          </a:xfrm>
+          <a:prstGeom prst="rect">
+            <a:avLst/>
+          </a:prstGeom>
+          <a:noFill/>
+        </p:spPr>
+        <p:txBody>
+          <a:bodyPr wrap="square" lIns="45720" rIns="45720">
+            <a:spAutoFit/>
+          </a:bodyPr>
+          <a:lstStyle/>
+          <a:p>
+            <a:pPr>
+              <a:defRPr>
+                <a:latin typeface="Roboto"/>
+              </a:defRPr>
+            </a:pPr>
+            <a:r>
+              <a:rPr sz="1000" b="1">
+                <a:solidFill>
+                  <a:srgbClr val="5F6F63"/>
+                </a:solidFill>
+                <a:latin typeface="Roboto"/>
+              </a:rPr>
+              <a:t>WHAT YOU'D DO ABOUT IT</a:t>
+            </a:r>
+          </a:p>
+        </p:txBody>
+      </p:sp>
+      <p:sp>
+        <p:nvSpPr>
+          <p:cNvPr id="12" name="TextBox 11"/>
+          <p:cNvSpPr txBox="1"/>
+          <p:nvPr/>
+        </p:nvSpPr>
+        <p:spPr>
+          <a:xfrm>
+            <a:off x="6370167" y="5343144"/>
+            <a:ext cx="5227167" cy="929640"/>
+          </a:xfrm>
+          <a:prstGeom prst="rect">
+            <a:avLst/>
+          </a:prstGeom>
+          <a:noFill/>
+        </p:spPr>
+        <p:txBody>
+          <a:bodyPr wrap="square" lIns="45720" rIns="45720">
+            <a:spAutoFit/>
+          </a:bodyPr>
+          <a:lstStyle/>
+          <a:p>
+            <a:pPr>
+              <a:defRPr>
+                <a:latin typeface="Roboto"/>
+              </a:defRPr>
+            </a:pPr>
+            <a:r>
+              <a:rPr sz="1200" b="0">
+                <a:solidFill>
+                  <a:srgbClr val="25342A"/>
+                </a:solidFill>
+                <a:latin typeface="Roboto"/>
+              </a:rPr>
+              <a:t>The full cost is $52,424 a month; $22,430 of it is shared cost the grant doesn't pay for. Worth asking for as much of it as the funder allows at renewal.</a:t>
+            </a:r>
+          </a:p>
+        </p:txBody>
+      </p:sp>
+      <p:sp>
+        <p:nvSpPr>
+          <p:cNvPr id="13" name="TextBox 12"/>
+          <p:cNvSpPr txBox="1"/>
+          <p:nvPr/>
+        </p:nvSpPr>
+        <p:spPr>
+          <a:xfrm>
+            <a:off x="457200" y="6492240"/>
+            <a:ext cx="2926080" cy="274320"/>
+          </a:xfrm>
+          <a:prstGeom prst="rect">
+            <a:avLst/>
+          </a:prstGeom>
+          <a:noFill/>
+        </p:spPr>
+        <p:txBody>
+          <a:bodyPr wrap="square" lIns="45720" rIns="45720">
             <a:spAutoFit/>
           </a:bodyPr>
           <a:lstStyle/>
@@ -5568,14 +7510,14 @@
       </p:sp>
       <p:sp>
         <p:nvSpPr>
-          <p:cNvPr id="7" name="TextBox 6"/>
+          <p:cNvPr id="14" name="TextBox 13"/>
           <p:cNvSpPr txBox="1"/>
           <p:nvPr/>
         </p:nvSpPr>
         <p:spPr>
           <a:xfrm>
-            <a:off x="4297680" y="6492240"/>
-            <a:ext cx="3657600" cy="274320"/>
+            <a:off x="3108960" y="6492240"/>
+            <a:ext cx="5943600" cy="274320"/>
           </a:xfrm>
           <a:prstGeom prst="rect">
             <a:avLst/>
@@ -5583,7 +7525,7 @@
           <a:noFill/>
         </p:spPr>
         <p:txBody>
-          <a:bodyPr wrap="square">
+          <a:bodyPr wrap="square" lIns="45720" rIns="45720">
             <a:spAutoFit/>
           </a:bodyPr>
           <a:lstStyle/>
@@ -5600,14 +7542,14 @@
                 </a:solidFill>
                 <a:latin typeface="Roboto"/>
               </a:rPr>
-              <a:t>Data retrieved 2pm, Tue 6 Oct 2026 · Sample data</a:t>
-            </a:r>
-          </a:p>
-        </p:txBody>
-      </p:sp>
-      <p:sp>
-        <p:nvSpPr>
-          <p:cNvPr id="8" name="TextBox 7"/>
+              <a:t>Data retrieved 2pm, Tue 6 Oct 2026 · Generated 8 Oct 2026, 9:35am · Sample data · Made with Python (python-pptx)</a:t>
+            </a:r>
+          </a:p>
+        </p:txBody>
+      </p:sp>
+      <p:sp>
+        <p:nvSpPr>
+          <p:cNvPr id="15" name="TextBox 14"/>
           <p:cNvSpPr txBox="1"/>
           <p:nvPr/>
         </p:nvSpPr>
@@ -5622,7 +7564,7 @@
           <a:noFill/>
         </p:spPr>
         <p:txBody>
-          <a:bodyPr wrap="square">
+          <a:bodyPr wrap="square" lIns="45720" rIns="45720">
             <a:spAutoFit/>
           </a:bodyPr>
           <a:lstStyle/>
@@ -5639,7 +7581,7 @@
                 </a:solidFill>
                 <a:latin typeface="Roboto"/>
               </a:rPr>
-              <a:t>Slide 3 of 11</a:t>
+              <a:t>Slide 3 of 8</a:t>
             </a:r>
           </a:p>
         </p:txBody>
@@ -5664,7 +7606,44 @@
       <p:grpSpPr/>
       <p:sp>
         <p:nvSpPr>
-          <p:cNvPr id="2" name="Rectangle 1"/>
+          <p:cNvPr id="2" name="Title 1"/>
+          <p:cNvSpPr>
+            <a:spLocks noGrp="1"/>
+          </p:cNvSpPr>
+          <p:nvPr>
+            <p:ph type="title"/>
+          </p:nvPr>
+        </p:nvSpPr>
+        <p:spPr>
+          <a:xfrm>
+            <a:off x="457200" y="384048"/>
+            <a:ext cx="11277295" cy="475488"/>
+          </a:xfrm>
+        </p:spPr>
+        <p:txBody>
+          <a:bodyPr wrap="square" lIns="45720" rIns="45720" tIns="0" bIns="0" anchor="t"/>
+          <a:lstStyle/>
+          <a:p>
+            <a:pPr algn="l">
+              <a:defRPr>
+                <a:latin typeface="Roboto"/>
+              </a:defRPr>
+            </a:pPr>
+            <a:r>
+              <a:rPr sz="2400" b="1">
+                <a:solidFill>
+                  <a:srgbClr val="25342A"/>
+                </a:solidFill>
+                <a:latin typeface="Roboto"/>
+              </a:rPr>
+              <a:t>Youth outreach</a:t>
+            </a:r>
+          </a:p>
+        </p:txBody>
+      </p:sp>
+      <p:sp>
+        <p:nvSpPr>
+          <p:cNvPr id="3" name="Rectangle 2"/>
           <p:cNvSpPr/>
           <p:nvPr/>
         </p:nvSpPr>
@@ -5711,14 +7690,14 @@
       </p:sp>
       <p:sp>
         <p:nvSpPr>
-          <p:cNvPr id="3" name="TextBox 2"/>
+          <p:cNvPr id="4" name="TextBox 3"/>
           <p:cNvSpPr txBox="1"/>
           <p:nvPr/>
         </p:nvSpPr>
         <p:spPr>
           <a:xfrm>
-            <a:off x="457200" y="164592"/>
-            <a:ext cx="7315200" cy="274320"/>
+            <a:off x="457200" y="146304"/>
+            <a:ext cx="8229600" cy="256032"/>
           </a:xfrm>
           <a:prstGeom prst="rect">
             <a:avLst/>
@@ -5726,7 +7705,7 @@
           <a:noFill/>
         </p:spPr>
         <p:txBody>
-          <a:bodyPr wrap="square">
+          <a:bodyPr wrap="square" lIns="45720" rIns="45720">
             <a:spAutoFit/>
           </a:bodyPr>
           <a:lstStyle/>
@@ -5750,14 +7729,14 @@
       </p:sp>
       <p:sp>
         <p:nvSpPr>
-          <p:cNvPr id="4" name="TextBox 3"/>
+          <p:cNvPr id="5" name="TextBox 4"/>
           <p:cNvSpPr txBox="1"/>
           <p:nvPr/>
         </p:nvSpPr>
         <p:spPr>
           <a:xfrm>
-            <a:off x="457200" y="411480"/>
-            <a:ext cx="11247120" cy="548640"/>
+            <a:off x="457200" y="914400"/>
+            <a:ext cx="11277295" cy="263652"/>
           </a:xfrm>
           <a:prstGeom prst="rect">
             <a:avLst/>
@@ -5765,7 +7744,7 @@
           <a:noFill/>
         </p:spPr>
         <p:txBody>
-          <a:bodyPr wrap="square">
+          <a:bodyPr wrap="square" lIns="45720" rIns="45720">
             <a:spAutoFit/>
           </a:bodyPr>
           <a:lstStyle/>
@@ -5776,27 +7755,45 @@
               </a:defRPr>
             </a:pPr>
             <a:r>
-              <a:rPr sz="2400" b="1">
+              <a:rPr sz="1200" b="0">
                 <a:solidFill>
-                  <a:srgbClr val="25342A"/>
+                  <a:srgbClr val="5F6F63"/>
                 </a:solidFill>
                 <a:latin typeface="Roboto"/>
               </a:rPr>
-              <a:t>What it shows · Program: All programs</a:t>
-            </a:r>
-          </a:p>
-        </p:txBody>
-      </p:sp>
-      <p:sp>
-        <p:nvSpPr>
-          <p:cNvPr id="5" name="Rectangle 4"/>
+              <a:t>Grant spending, by month · Youth outreach</a:t>
+            </a:r>
+          </a:p>
+        </p:txBody>
+      </p:sp>
+      <p:graphicFrame>
+        <p:nvGraphicFramePr>
+          <p:cNvPr id="6" name="Chart 5"/>
+          <p:cNvGraphicFramePr>
+            <a:graphicFrameLocks noGrp="1"/>
+          </p:cNvGraphicFramePr>
+          <p:nvPr/>
+        </p:nvGraphicFramePr>
+        <p:xfrm>
+          <a:off x="457200" y="1278636"/>
+          <a:ext cx="11277295" cy="3643884"/>
+        </p:xfrm>
+        <a:graphic>
+          <a:graphicData uri="http://schemas.openxmlformats.org/drawingml/2006/chart">
+            <c:chart xmlns:c="http://schemas.openxmlformats.org/drawingml/2006/chart" r:id="rId3"/>
+          </a:graphicData>
+        </a:graphic>
+      </p:graphicFrame>
+      <p:sp>
+        <p:nvSpPr>
+          <p:cNvPr id="7" name="Rectangle 6"/>
           <p:cNvSpPr/>
           <p:nvPr/>
         </p:nvSpPr>
         <p:spPr>
           <a:xfrm>
-            <a:off x="457200" y="1554480"/>
-            <a:ext cx="5501487" cy="4389120"/>
+            <a:off x="457200" y="5013960"/>
+            <a:ext cx="5501487" cy="1295400"/>
           </a:xfrm>
           <a:prstGeom prst="rect">
             <a:avLst/>
@@ -5838,14 +7835,14 @@
       </p:sp>
       <p:sp>
         <p:nvSpPr>
-          <p:cNvPr id="6" name="TextBox 5"/>
+          <p:cNvPr id="8" name="TextBox 7"/>
           <p:cNvSpPr txBox="1"/>
           <p:nvPr/>
         </p:nvSpPr>
         <p:spPr>
           <a:xfrm>
-            <a:off x="685800" y="1691640"/>
-            <a:ext cx="5044287" cy="365760"/>
+            <a:off x="594360" y="5068824"/>
+            <a:ext cx="5227167" cy="274320"/>
           </a:xfrm>
           <a:prstGeom prst="rect">
             <a:avLst/>
@@ -5853,7 +7850,7 @@
           <a:noFill/>
         </p:spPr>
         <p:txBody>
-          <a:bodyPr wrap="square">
+          <a:bodyPr wrap="square" lIns="45720" rIns="45720">
             <a:spAutoFit/>
           </a:bodyPr>
           <a:lstStyle/>
@@ -5864,7 +7861,7 @@
               </a:defRPr>
             </a:pPr>
             <a:r>
-              <a:rPr sz="1100" b="1">
+              <a:rPr sz="1000" b="1">
                 <a:solidFill>
                   <a:srgbClr val="5F6F63"/>
                 </a:solidFill>
@@ -5877,14 +7874,14 @@
       </p:sp>
       <p:sp>
         <p:nvSpPr>
-          <p:cNvPr id="7" name="TextBox 6"/>
+          <p:cNvPr id="9" name="TextBox 8"/>
           <p:cNvSpPr txBox="1"/>
           <p:nvPr/>
         </p:nvSpPr>
         <p:spPr>
           <a:xfrm>
-            <a:off x="685800" y="2103120"/>
-            <a:ext cx="5044287" cy="3749039"/>
+            <a:off x="594360" y="5343144"/>
+            <a:ext cx="5227167" cy="929640"/>
           </a:xfrm>
           <a:prstGeom prst="rect">
             <a:avLst/>
@@ -5892,7 +7889,7 @@
           <a:noFill/>
         </p:spPr>
         <p:txBody>
-          <a:bodyPr wrap="square">
+          <a:bodyPr wrap="square" lIns="45720" rIns="45720">
             <a:spAutoFit/>
           </a:bodyPr>
           <a:lstStyle/>
@@ -5903,27 +7900,27 @@
               </a:defRPr>
             </a:pPr>
             <a:r>
-              <a:rPr sz="1600" b="0">
+              <a:rPr sz="1200" b="0">
                 <a:solidFill>
                   <a:srgbClr val="25342A"/>
                 </a:solidFill>
                 <a:latin typeface="Roboto"/>
               </a:rPr>
-              <a:t>Housing support is the biggest program: $52,424 in June once its share of untied program costs and administration is added to $29,994 of grant spending. Shared costs add 74.8% on top of grant spending across all programs.</a:t>
-            </a:r>
-          </a:p>
-        </p:txBody>
-      </p:sp>
-      <p:sp>
-        <p:nvSpPr>
-          <p:cNvPr id="8" name="Rectangle 7"/>
+              <a:t>Youth outreach cost $35,596 in full in June: $20,366 paid by the State Department of Families grant, and $15,230 of shared costs no grant covers. It has spent 99.5% of its budget to date, with $241,274 left and 12 months to go.</a:t>
+            </a:r>
+          </a:p>
+        </p:txBody>
+      </p:sp>
+      <p:sp>
+        <p:nvSpPr>
+          <p:cNvPr id="10" name="Rectangle 9"/>
           <p:cNvSpPr/>
           <p:nvPr/>
         </p:nvSpPr>
         <p:spPr>
           <a:xfrm>
-            <a:off x="6233007" y="1554480"/>
-            <a:ext cx="5501487" cy="4389120"/>
+            <a:off x="6233007" y="5013960"/>
+            <a:ext cx="5501487" cy="1295400"/>
           </a:xfrm>
           <a:prstGeom prst="rect">
             <a:avLst/>
@@ -5965,14 +7962,14 @@
       </p:sp>
       <p:sp>
         <p:nvSpPr>
-          <p:cNvPr id="9" name="TextBox 8"/>
+          <p:cNvPr id="11" name="TextBox 10"/>
           <p:cNvSpPr txBox="1"/>
           <p:nvPr/>
         </p:nvSpPr>
         <p:spPr>
           <a:xfrm>
-            <a:off x="6461607" y="1691640"/>
-            <a:ext cx="5044287" cy="365760"/>
+            <a:off x="6370167" y="5068824"/>
+            <a:ext cx="5227167" cy="274320"/>
           </a:xfrm>
           <a:prstGeom prst="rect">
             <a:avLst/>
@@ -5980,7 +7977,7 @@
           <a:noFill/>
         </p:spPr>
         <p:txBody>
-          <a:bodyPr wrap="square">
+          <a:bodyPr wrap="square" lIns="45720" rIns="45720">
             <a:spAutoFit/>
           </a:bodyPr>
           <a:lstStyle/>
@@ -5991,7 +7988,7 @@
               </a:defRPr>
             </a:pPr>
             <a:r>
-              <a:rPr sz="1100" b="1">
+              <a:rPr sz="1000" b="1">
                 <a:solidFill>
                   <a:srgbClr val="5F6F63"/>
                 </a:solidFill>
@@ -6004,14 +8001,14 @@
       </p:sp>
       <p:sp>
         <p:nvSpPr>
-          <p:cNvPr id="10" name="TextBox 9"/>
+          <p:cNvPr id="12" name="TextBox 11"/>
           <p:cNvSpPr txBox="1"/>
           <p:nvPr/>
         </p:nvSpPr>
         <p:spPr>
           <a:xfrm>
-            <a:off x="6461607" y="2103120"/>
-            <a:ext cx="5044287" cy="3749039"/>
+            <a:off x="6370167" y="5343144"/>
+            <a:ext cx="5227167" cy="929640"/>
           </a:xfrm>
           <a:prstGeom prst="rect">
             <a:avLst/>
@@ -6019,7 +8016,7 @@
           <a:noFill/>
         </p:spPr>
         <p:txBody>
-          <a:bodyPr wrap="square">
+          <a:bodyPr wrap="square" lIns="45720" rIns="45720">
             <a:spAutoFit/>
           </a:bodyPr>
           <a:lstStyle/>
@@ -6030,27 +8027,27 @@
               </a:defRPr>
             </a:pPr>
             <a:r>
-              <a:rPr sz="1600" b="0">
+              <a:rPr sz="1200" b="0">
                 <a:solidFill>
                   <a:srgbClr val="25342A"/>
                 </a:solidFill>
                 <a:latin typeface="Roboto"/>
               </a:rPr>
-              <a:t>The full cost (not just the grant line) is the number for renewal applications, where the funder lets you recover a share of overheads. Pick a program above to see it on its own.</a:t>
-            </a:r>
-          </a:p>
-        </p:txBody>
-      </p:sp>
-      <p:sp>
-        <p:nvSpPr>
-          <p:cNvPr id="11" name="TextBox 10"/>
+              <a:t>The full cost is $35,596 a month; $15,230 of it is shared cost the grant doesn't pay for. Worth asking for as much of it as the funder allows at renewal.</a:t>
+            </a:r>
+          </a:p>
+        </p:txBody>
+      </p:sp>
+      <p:sp>
+        <p:nvSpPr>
+          <p:cNvPr id="13" name="TextBox 12"/>
           <p:cNvSpPr txBox="1"/>
           <p:nvPr/>
         </p:nvSpPr>
         <p:spPr>
           <a:xfrm>
             <a:off x="457200" y="6492240"/>
-            <a:ext cx="3657600" cy="274320"/>
+            <a:ext cx="2926080" cy="274320"/>
           </a:xfrm>
           <a:prstGeom prst="rect">
             <a:avLst/>
@@ -6058,7 +8055,7 @@
           <a:noFill/>
         </p:spPr>
         <p:txBody>
-          <a:bodyPr wrap="square">
+          <a:bodyPr wrap="square" lIns="45720" rIns="45720">
             <a:spAutoFit/>
           </a:bodyPr>
           <a:lstStyle/>
@@ -6082,14 +8079,14 @@
       </p:sp>
       <p:sp>
         <p:nvSpPr>
-          <p:cNvPr id="12" name="TextBox 11"/>
+          <p:cNvPr id="14" name="TextBox 13"/>
           <p:cNvSpPr txBox="1"/>
           <p:nvPr/>
         </p:nvSpPr>
         <p:spPr>
           <a:xfrm>
-            <a:off x="4297680" y="6492240"/>
-            <a:ext cx="3657600" cy="274320"/>
+            <a:off x="3108960" y="6492240"/>
+            <a:ext cx="5943600" cy="274320"/>
           </a:xfrm>
           <a:prstGeom prst="rect">
             <a:avLst/>
@@ -6097,7 +8094,7 @@
           <a:noFill/>
         </p:spPr>
         <p:txBody>
-          <a:bodyPr wrap="square">
+          <a:bodyPr wrap="square" lIns="45720" rIns="45720">
             <a:spAutoFit/>
           </a:bodyPr>
           <a:lstStyle/>
@@ -6114,14 +8111,14 @@
                 </a:solidFill>
                 <a:latin typeface="Roboto"/>
               </a:rPr>
-              <a:t>Data retrieved 2pm, Tue 6 Oct 2026 · Sample data</a:t>
-            </a:r>
-          </a:p>
-        </p:txBody>
-      </p:sp>
-      <p:sp>
-        <p:nvSpPr>
-          <p:cNvPr id="13" name="TextBox 12"/>
+              <a:t>Data retrieved 2pm, Tue 6 Oct 2026 · Generated 8 Oct 2026, 9:35am · Sample data · Made with Python (python-pptx)</a:t>
+            </a:r>
+          </a:p>
+        </p:txBody>
+      </p:sp>
+      <p:sp>
+        <p:nvSpPr>
+          <p:cNvPr id="15" name="TextBox 14"/>
           <p:cNvSpPr txBox="1"/>
           <p:nvPr/>
         </p:nvSpPr>
@@ -6136,7 +8133,7 @@
           <a:noFill/>
         </p:spPr>
         <p:txBody>
-          <a:bodyPr wrap="square">
+          <a:bodyPr wrap="square" lIns="45720" rIns="45720">
             <a:spAutoFit/>
           </a:bodyPr>
           <a:lstStyle/>
@@ -6153,7 +8150,7 @@
                 </a:solidFill>
                 <a:latin typeface="Roboto"/>
               </a:rPr>
-              <a:t>Slide 4 of 11</a:t>
+              <a:t>Slide 4 of 8</a:t>
             </a:r>
           </a:p>
         </p:txBody>
@@ -6178,7 +8175,44 @@
       <p:grpSpPr/>
       <p:sp>
         <p:nvSpPr>
-          <p:cNvPr id="2" name="Rectangle 1"/>
+          <p:cNvPr id="2" name="Title 1"/>
+          <p:cNvSpPr>
+            <a:spLocks noGrp="1"/>
+          </p:cNvSpPr>
+          <p:nvPr>
+            <p:ph type="title"/>
+          </p:nvPr>
+        </p:nvSpPr>
+        <p:spPr>
+          <a:xfrm>
+            <a:off x="457200" y="384048"/>
+            <a:ext cx="11277295" cy="475488"/>
+          </a:xfrm>
+        </p:spPr>
+        <p:txBody>
+          <a:bodyPr wrap="square" lIns="45720" rIns="45720" tIns="0" bIns="0" anchor="t"/>
+          <a:lstStyle/>
+          <a:p>
+            <a:pPr algn="l">
+              <a:defRPr>
+                <a:latin typeface="Roboto"/>
+              </a:defRPr>
+            </a:pPr>
+            <a:r>
+              <a:rPr sz="2400" b="1">
+                <a:solidFill>
+                  <a:srgbClr val="25342A"/>
+                </a:solidFill>
+                <a:latin typeface="Roboto"/>
+              </a:rPr>
+              <a:t>Mental health first aid</a:t>
+            </a:r>
+          </a:p>
+        </p:txBody>
+      </p:sp>
+      <p:sp>
+        <p:nvSpPr>
+          <p:cNvPr id="3" name="Rectangle 2"/>
           <p:cNvSpPr/>
           <p:nvPr/>
         </p:nvSpPr>
@@ -6225,14 +8259,14 @@
       </p:sp>
       <p:sp>
         <p:nvSpPr>
-          <p:cNvPr id="3" name="TextBox 2"/>
+          <p:cNvPr id="4" name="TextBox 3"/>
           <p:cNvSpPr txBox="1"/>
           <p:nvPr/>
         </p:nvSpPr>
         <p:spPr>
           <a:xfrm>
-            <a:off x="457200" y="164592"/>
-            <a:ext cx="7315200" cy="274320"/>
+            <a:off x="457200" y="146304"/>
+            <a:ext cx="8229600" cy="256032"/>
           </a:xfrm>
           <a:prstGeom prst="rect">
             <a:avLst/>
@@ -6240,7 +8274,7 @@
           <a:noFill/>
         </p:spPr>
         <p:txBody>
-          <a:bodyPr wrap="square">
+          <a:bodyPr wrap="square" lIns="45720" rIns="45720">
             <a:spAutoFit/>
           </a:bodyPr>
           <a:lstStyle/>
@@ -6264,14 +8298,14 @@
       </p:sp>
       <p:sp>
         <p:nvSpPr>
-          <p:cNvPr id="4" name="TextBox 3"/>
+          <p:cNvPr id="5" name="TextBox 4"/>
           <p:cNvSpPr txBox="1"/>
           <p:nvPr/>
         </p:nvSpPr>
         <p:spPr>
           <a:xfrm>
-            <a:off x="457200" y="411480"/>
-            <a:ext cx="11247120" cy="548640"/>
+            <a:off x="457200" y="914400"/>
+            <a:ext cx="11277295" cy="263652"/>
           </a:xfrm>
           <a:prstGeom prst="rect">
             <a:avLst/>
@@ -6279,7 +8313,7 @@
           <a:noFill/>
         </p:spPr>
         <p:txBody>
-          <a:bodyPr wrap="square">
+          <a:bodyPr wrap="square" lIns="45720" rIns="45720">
             <a:spAutoFit/>
           </a:bodyPr>
           <a:lstStyle/>
@@ -6290,27 +8324,45 @@
               </a:defRPr>
             </a:pPr>
             <a:r>
-              <a:rPr sz="2400" b="1">
+              <a:rPr sz="1200" b="0">
                 <a:solidFill>
-                  <a:srgbClr val="25342A"/>
+                  <a:srgbClr val="5F6F63"/>
                 </a:solidFill>
                 <a:latin typeface="Roboto"/>
               </a:rPr>
-              <a:t>What it shows · Program: Housing support</a:t>
-            </a:r>
-          </a:p>
-        </p:txBody>
-      </p:sp>
-      <p:sp>
-        <p:nvSpPr>
-          <p:cNvPr id="5" name="Rectangle 4"/>
+              <a:t>Grant spending, by month · Mental health first aid</a:t>
+            </a:r>
+          </a:p>
+        </p:txBody>
+      </p:sp>
+      <p:graphicFrame>
+        <p:nvGraphicFramePr>
+          <p:cNvPr id="6" name="Chart 5"/>
+          <p:cNvGraphicFramePr>
+            <a:graphicFrameLocks noGrp="1"/>
+          </p:cNvGraphicFramePr>
+          <p:nvPr/>
+        </p:nvGraphicFramePr>
+        <p:xfrm>
+          <a:off x="457200" y="1278636"/>
+          <a:ext cx="11277295" cy="3643884"/>
+        </p:xfrm>
+        <a:graphic>
+          <a:graphicData uri="http://schemas.openxmlformats.org/drawingml/2006/chart">
+            <c:chart xmlns:c="http://schemas.openxmlformats.org/drawingml/2006/chart" r:id="rId3"/>
+          </a:graphicData>
+        </a:graphic>
+      </p:graphicFrame>
+      <p:sp>
+        <p:nvSpPr>
+          <p:cNvPr id="7" name="Rectangle 6"/>
           <p:cNvSpPr/>
           <p:nvPr/>
         </p:nvSpPr>
         <p:spPr>
           <a:xfrm>
-            <a:off x="457200" y="1554480"/>
-            <a:ext cx="5501487" cy="4389120"/>
+            <a:off x="457200" y="5013960"/>
+            <a:ext cx="5501487" cy="1295400"/>
           </a:xfrm>
           <a:prstGeom prst="rect">
             <a:avLst/>
@@ -6352,14 +8404,14 @@
       </p:sp>
       <p:sp>
         <p:nvSpPr>
-          <p:cNvPr id="6" name="TextBox 5"/>
+          <p:cNvPr id="8" name="TextBox 7"/>
           <p:cNvSpPr txBox="1"/>
           <p:nvPr/>
         </p:nvSpPr>
         <p:spPr>
           <a:xfrm>
-            <a:off x="685800" y="1691640"/>
-            <a:ext cx="5044287" cy="365760"/>
+            <a:off x="594360" y="5068824"/>
+            <a:ext cx="5227167" cy="274320"/>
           </a:xfrm>
           <a:prstGeom prst="rect">
             <a:avLst/>
@@ -6367,7 +8419,7 @@
           <a:noFill/>
         </p:spPr>
         <p:txBody>
-          <a:bodyPr wrap="square">
+          <a:bodyPr wrap="square" lIns="45720" rIns="45720">
             <a:spAutoFit/>
           </a:bodyPr>
           <a:lstStyle/>
@@ -6378,7 +8430,7 @@
               </a:defRPr>
             </a:pPr>
             <a:r>
-              <a:rPr sz="1100" b="1">
+              <a:rPr sz="1000" b="1">
                 <a:solidFill>
                   <a:srgbClr val="5F6F63"/>
                 </a:solidFill>
@@ -6391,14 +8443,14 @@
       </p:sp>
       <p:sp>
         <p:nvSpPr>
-          <p:cNvPr id="7" name="TextBox 6"/>
+          <p:cNvPr id="9" name="TextBox 8"/>
           <p:cNvSpPr txBox="1"/>
           <p:nvPr/>
         </p:nvSpPr>
         <p:spPr>
           <a:xfrm>
-            <a:off x="685800" y="2103120"/>
-            <a:ext cx="5044287" cy="3749039"/>
+            <a:off x="594360" y="5343144"/>
+            <a:ext cx="5227167" cy="929640"/>
           </a:xfrm>
           <a:prstGeom prst="rect">
             <a:avLst/>
@@ -6406,7 +8458,7 @@
           <a:noFill/>
         </p:spPr>
         <p:txBody>
-          <a:bodyPr wrap="square">
+          <a:bodyPr wrap="square" lIns="45720" rIns="45720">
             <a:spAutoFit/>
           </a:bodyPr>
           <a:lstStyle/>
@@ -6417,27 +8469,27 @@
               </a:defRPr>
             </a:pPr>
             <a:r>
-              <a:rPr sz="1600" b="0">
+              <a:rPr sz="1200" b="0">
                 <a:solidFill>
                   <a:srgbClr val="25342A"/>
                 </a:solidFill>
                 <a:latin typeface="Roboto"/>
               </a:rPr>
-              <a:t>Housing support cost $52,424 in full in June: $29,994 paid by the State Housing Program grant, and $22,430 of shared costs no grant covers. It has spent 92.7% of its budget to date, with $193,097 left and 6 months to go.</a:t>
-            </a:r>
-          </a:p>
-        </p:txBody>
-      </p:sp>
-      <p:sp>
-        <p:nvSpPr>
-          <p:cNvPr id="8" name="Rectangle 7"/>
+              <a:t>Mental health first aid cost $17,123 in full in June: $9,797 paid by the Federal health program grant, and $7,326 of shared costs no grant covers. It has spent 94.4% of its budget to date, with $91,669 left and 9 months to go.</a:t>
+            </a:r>
+          </a:p>
+        </p:txBody>
+      </p:sp>
+      <p:sp>
+        <p:nvSpPr>
+          <p:cNvPr id="10" name="Rectangle 9"/>
           <p:cNvSpPr/>
           <p:nvPr/>
         </p:nvSpPr>
         <p:spPr>
           <a:xfrm>
-            <a:off x="6233007" y="1554480"/>
-            <a:ext cx="5501487" cy="4389120"/>
+            <a:off x="6233007" y="5013960"/>
+            <a:ext cx="5501487" cy="1295400"/>
           </a:xfrm>
           <a:prstGeom prst="rect">
             <a:avLst/>
@@ -6479,14 +8531,14 @@
       </p:sp>
       <p:sp>
         <p:nvSpPr>
-          <p:cNvPr id="9" name="TextBox 8"/>
+          <p:cNvPr id="11" name="TextBox 10"/>
           <p:cNvSpPr txBox="1"/>
           <p:nvPr/>
         </p:nvSpPr>
         <p:spPr>
           <a:xfrm>
-            <a:off x="6461607" y="1691640"/>
-            <a:ext cx="5044287" cy="365760"/>
+            <a:off x="6370167" y="5068824"/>
+            <a:ext cx="5227167" cy="274320"/>
           </a:xfrm>
           <a:prstGeom prst="rect">
             <a:avLst/>
@@ -6494,7 +8546,7 @@
           <a:noFill/>
         </p:spPr>
         <p:txBody>
-          <a:bodyPr wrap="square">
+          <a:bodyPr wrap="square" lIns="45720" rIns="45720">
             <a:spAutoFit/>
           </a:bodyPr>
           <a:lstStyle/>
@@ -6505,7 +8557,7 @@
               </a:defRPr>
             </a:pPr>
             <a:r>
-              <a:rPr sz="1100" b="1">
+              <a:rPr sz="1000" b="1">
                 <a:solidFill>
                   <a:srgbClr val="5F6F63"/>
                 </a:solidFill>
@@ -6518,14 +8570,14 @@
       </p:sp>
       <p:sp>
         <p:nvSpPr>
-          <p:cNvPr id="10" name="TextBox 9"/>
+          <p:cNvPr id="12" name="TextBox 11"/>
           <p:cNvSpPr txBox="1"/>
           <p:nvPr/>
         </p:nvSpPr>
         <p:spPr>
           <a:xfrm>
-            <a:off x="6461607" y="2103120"/>
-            <a:ext cx="5044287" cy="3749039"/>
+            <a:off x="6370167" y="5343144"/>
+            <a:ext cx="5227167" cy="929640"/>
           </a:xfrm>
           <a:prstGeom prst="rect">
             <a:avLst/>
@@ -6533,7 +8585,7 @@
           <a:noFill/>
         </p:spPr>
         <p:txBody>
-          <a:bodyPr wrap="square">
+          <a:bodyPr wrap="square" lIns="45720" rIns="45720">
             <a:spAutoFit/>
           </a:bodyPr>
           <a:lstStyle/>
@@ -6544,27 +8596,27 @@
               </a:defRPr>
             </a:pPr>
             <a:r>
-              <a:rPr sz="1600" b="0">
+              <a:rPr sz="1200" b="0">
                 <a:solidFill>
                   <a:srgbClr val="25342A"/>
                 </a:solidFill>
                 <a:latin typeface="Roboto"/>
               </a:rPr>
-              <a:t>The full cost is $52,424 a month; $22,430 of it is shared cost the grant doesn't pay for. Worth asking for as much of it as the funder allows at renewal.</a:t>
-            </a:r>
-          </a:p>
-        </p:txBody>
-      </p:sp>
-      <p:sp>
-        <p:nvSpPr>
-          <p:cNvPr id="11" name="TextBox 10"/>
+              <a:t>The full cost is $17,123 a month; $7,326 of it is shared cost the grant doesn't pay for. Worth asking for as much of it as the funder allows at renewal.</a:t>
+            </a:r>
+          </a:p>
+        </p:txBody>
+      </p:sp>
+      <p:sp>
+        <p:nvSpPr>
+          <p:cNvPr id="13" name="TextBox 12"/>
           <p:cNvSpPr txBox="1"/>
           <p:nvPr/>
         </p:nvSpPr>
         <p:spPr>
           <a:xfrm>
             <a:off x="457200" y="6492240"/>
-            <a:ext cx="3657600" cy="274320"/>
+            <a:ext cx="2926080" cy="274320"/>
           </a:xfrm>
           <a:prstGeom prst="rect">
             <a:avLst/>
@@ -6572,7 +8624,7 @@
           <a:noFill/>
         </p:spPr>
         <p:txBody>
-          <a:bodyPr wrap="square">
+          <a:bodyPr wrap="square" lIns="45720" rIns="45720">
             <a:spAutoFit/>
           </a:bodyPr>
           <a:lstStyle/>
@@ -6596,14 +8648,14 @@
       </p:sp>
       <p:sp>
         <p:nvSpPr>
-          <p:cNvPr id="12" name="TextBox 11"/>
+          <p:cNvPr id="14" name="TextBox 13"/>
           <p:cNvSpPr txBox="1"/>
           <p:nvPr/>
         </p:nvSpPr>
         <p:spPr>
           <a:xfrm>
-            <a:off x="4297680" y="6492240"/>
-            <a:ext cx="3657600" cy="274320"/>
+            <a:off x="3108960" y="6492240"/>
+            <a:ext cx="5943600" cy="274320"/>
           </a:xfrm>
           <a:prstGeom prst="rect">
             <a:avLst/>
@@ -6611,7 +8663,7 @@
           <a:noFill/>
         </p:spPr>
         <p:txBody>
-          <a:bodyPr wrap="square">
+          <a:bodyPr wrap="square" lIns="45720" rIns="45720">
             <a:spAutoFit/>
           </a:bodyPr>
           <a:lstStyle/>
@@ -6628,14 +8680,14 @@
                 </a:solidFill>
                 <a:latin typeface="Roboto"/>
               </a:rPr>
-              <a:t>Data retrieved 2pm, Tue 6 Oct 2026 · Sample data</a:t>
-            </a:r>
-          </a:p>
-        </p:txBody>
-      </p:sp>
-      <p:sp>
-        <p:nvSpPr>
-          <p:cNvPr id="13" name="TextBox 12"/>
+              <a:t>Data retrieved 2pm, Tue 6 Oct 2026 · Generated 8 Oct 2026, 9:35am · Sample data · Made with Python (python-pptx)</a:t>
+            </a:r>
+          </a:p>
+        </p:txBody>
+      </p:sp>
+      <p:sp>
+        <p:nvSpPr>
+          <p:cNvPr id="15" name="TextBox 14"/>
           <p:cNvSpPr txBox="1"/>
           <p:nvPr/>
         </p:nvSpPr>
@@ -6650,7 +8702,7 @@
           <a:noFill/>
         </p:spPr>
         <p:txBody>
-          <a:bodyPr wrap="square">
+          <a:bodyPr wrap="square" lIns="45720" rIns="45720">
             <a:spAutoFit/>
           </a:bodyPr>
           <a:lstStyle/>
@@ -6667,7 +8719,7 @@
                 </a:solidFill>
                 <a:latin typeface="Roboto"/>
               </a:rPr>
-              <a:t>Slide 5 of 11</a:t>
+              <a:t>Slide 5 of 8</a:t>
             </a:r>
           </a:p>
         </p:txBody>
@@ -6692,7 +8744,44 @@
       <p:grpSpPr/>
       <p:sp>
         <p:nvSpPr>
-          <p:cNvPr id="2" name="Rectangle 1"/>
+          <p:cNvPr id="2" name="Title 1"/>
+          <p:cNvSpPr>
+            <a:spLocks noGrp="1"/>
+          </p:cNvSpPr>
+          <p:nvPr>
+            <p:ph type="title"/>
+          </p:nvPr>
+        </p:nvSpPr>
+        <p:spPr>
+          <a:xfrm>
+            <a:off x="457200" y="384048"/>
+            <a:ext cx="11277295" cy="475488"/>
+          </a:xfrm>
+        </p:spPr>
+        <p:txBody>
+          <a:bodyPr wrap="square" lIns="45720" rIns="45720" tIns="0" bIns="0" anchor="t"/>
+          <a:lstStyle/>
+          <a:p>
+            <a:pPr algn="l">
+              <a:defRPr>
+                <a:latin typeface="Roboto"/>
+              </a:defRPr>
+            </a:pPr>
+            <a:r>
+              <a:rPr sz="2400" b="1">
+                <a:solidFill>
+                  <a:srgbClr val="25342A"/>
+                </a:solidFill>
+                <a:latin typeface="Roboto"/>
+              </a:rPr>
+              <a:t>Digital literacy</a:t>
+            </a:r>
+          </a:p>
+        </p:txBody>
+      </p:sp>
+      <p:sp>
+        <p:nvSpPr>
+          <p:cNvPr id="3" name="Rectangle 2"/>
           <p:cNvSpPr/>
           <p:nvPr/>
         </p:nvSpPr>
@@ -6739,14 +8828,14 @@
       </p:sp>
       <p:sp>
         <p:nvSpPr>
-          <p:cNvPr id="3" name="TextBox 2"/>
+          <p:cNvPr id="4" name="TextBox 3"/>
           <p:cNvSpPr txBox="1"/>
           <p:nvPr/>
         </p:nvSpPr>
         <p:spPr>
           <a:xfrm>
-            <a:off x="457200" y="164592"/>
-            <a:ext cx="7315200" cy="274320"/>
+            <a:off x="457200" y="146304"/>
+            <a:ext cx="8229600" cy="256032"/>
           </a:xfrm>
           <a:prstGeom prst="rect">
             <a:avLst/>
@@ -6754,7 +8843,7 @@
           <a:noFill/>
         </p:spPr>
         <p:txBody>
-          <a:bodyPr wrap="square">
+          <a:bodyPr wrap="square" lIns="45720" rIns="45720">
             <a:spAutoFit/>
           </a:bodyPr>
           <a:lstStyle/>
@@ -6778,14 +8867,14 @@
       </p:sp>
       <p:sp>
         <p:nvSpPr>
-          <p:cNvPr id="4" name="TextBox 3"/>
+          <p:cNvPr id="5" name="TextBox 4"/>
           <p:cNvSpPr txBox="1"/>
           <p:nvPr/>
         </p:nvSpPr>
         <p:spPr>
           <a:xfrm>
-            <a:off x="457200" y="411480"/>
-            <a:ext cx="11247120" cy="548640"/>
+            <a:off x="457200" y="914400"/>
+            <a:ext cx="11277295" cy="263652"/>
           </a:xfrm>
           <a:prstGeom prst="rect">
             <a:avLst/>
@@ -6793,7 +8882,7 @@
           <a:noFill/>
         </p:spPr>
         <p:txBody>
-          <a:bodyPr wrap="square">
+          <a:bodyPr wrap="square" lIns="45720" rIns="45720">
             <a:spAutoFit/>
           </a:bodyPr>
           <a:lstStyle/>
@@ -6804,27 +8893,45 @@
               </a:defRPr>
             </a:pPr>
             <a:r>
-              <a:rPr sz="2400" b="1">
+              <a:rPr sz="1200" b="0">
                 <a:solidFill>
-                  <a:srgbClr val="25342A"/>
+                  <a:srgbClr val="5F6F63"/>
                 </a:solidFill>
                 <a:latin typeface="Roboto"/>
               </a:rPr>
-              <a:t>What it shows · Program: Youth outreach</a:t>
-            </a:r>
-          </a:p>
-        </p:txBody>
-      </p:sp>
-      <p:sp>
-        <p:nvSpPr>
-          <p:cNvPr id="5" name="Rectangle 4"/>
+              <a:t>Grant spending, by month · Digital literacy</a:t>
+            </a:r>
+          </a:p>
+        </p:txBody>
+      </p:sp>
+      <p:graphicFrame>
+        <p:nvGraphicFramePr>
+          <p:cNvPr id="6" name="Chart 5"/>
+          <p:cNvGraphicFramePr>
+            <a:graphicFrameLocks noGrp="1"/>
+          </p:cNvGraphicFramePr>
+          <p:nvPr/>
+        </p:nvGraphicFramePr>
+        <p:xfrm>
+          <a:off x="457200" y="1278636"/>
+          <a:ext cx="11277295" cy="3643884"/>
+        </p:xfrm>
+        <a:graphic>
+          <a:graphicData uri="http://schemas.openxmlformats.org/drawingml/2006/chart">
+            <c:chart xmlns:c="http://schemas.openxmlformats.org/drawingml/2006/chart" r:id="rId3"/>
+          </a:graphicData>
+        </a:graphic>
+      </p:graphicFrame>
+      <p:sp>
+        <p:nvSpPr>
+          <p:cNvPr id="7" name="Rectangle 6"/>
           <p:cNvSpPr/>
           <p:nvPr/>
         </p:nvSpPr>
         <p:spPr>
           <a:xfrm>
-            <a:off x="457200" y="1554480"/>
-            <a:ext cx="5501487" cy="4389120"/>
+            <a:off x="457200" y="5013960"/>
+            <a:ext cx="5501487" cy="1295400"/>
           </a:xfrm>
           <a:prstGeom prst="rect">
             <a:avLst/>
@@ -6866,14 +8973,14 @@
       </p:sp>
       <p:sp>
         <p:nvSpPr>
-          <p:cNvPr id="6" name="TextBox 5"/>
+          <p:cNvPr id="8" name="TextBox 7"/>
           <p:cNvSpPr txBox="1"/>
           <p:nvPr/>
         </p:nvSpPr>
         <p:spPr>
           <a:xfrm>
-            <a:off x="685800" y="1691640"/>
-            <a:ext cx="5044287" cy="365760"/>
+            <a:off x="594360" y="5068824"/>
+            <a:ext cx="5227167" cy="274320"/>
           </a:xfrm>
           <a:prstGeom prst="rect">
             <a:avLst/>
@@ -6881,7 +8988,7 @@
           <a:noFill/>
         </p:spPr>
         <p:txBody>
-          <a:bodyPr wrap="square">
+          <a:bodyPr wrap="square" lIns="45720" rIns="45720">
             <a:spAutoFit/>
           </a:bodyPr>
           <a:lstStyle/>
@@ -6892,7 +8999,7 @@
               </a:defRPr>
             </a:pPr>
             <a:r>
-              <a:rPr sz="1100" b="1">
+              <a:rPr sz="1000" b="1">
                 <a:solidFill>
                   <a:srgbClr val="5F6F63"/>
                 </a:solidFill>
@@ -6905,14 +9012,14 @@
       </p:sp>
       <p:sp>
         <p:nvSpPr>
-          <p:cNvPr id="7" name="TextBox 6"/>
+          <p:cNvPr id="9" name="TextBox 8"/>
           <p:cNvSpPr txBox="1"/>
           <p:nvPr/>
         </p:nvSpPr>
         <p:spPr>
           <a:xfrm>
-            <a:off x="685800" y="2103120"/>
-            <a:ext cx="5044287" cy="3749039"/>
+            <a:off x="594360" y="5343144"/>
+            <a:ext cx="5227167" cy="929640"/>
           </a:xfrm>
           <a:prstGeom prst="rect">
             <a:avLst/>
@@ -6920,7 +9027,7 @@
           <a:noFill/>
         </p:spPr>
         <p:txBody>
-          <a:bodyPr wrap="square">
+          <a:bodyPr wrap="square" lIns="45720" rIns="45720">
             <a:spAutoFit/>
           </a:bodyPr>
           <a:lstStyle/>
@@ -6931,27 +9038,27 @@
               </a:defRPr>
             </a:pPr>
             <a:r>
-              <a:rPr sz="1600" b="0">
+              <a:rPr sz="1200" b="0">
                 <a:solidFill>
                   <a:srgbClr val="25342A"/>
                 </a:solidFill>
                 <a:latin typeface="Roboto"/>
               </a:rPr>
-              <a:t>Youth outreach cost $35,596 in full in June: $20,366 paid by the State Department of Families grant, and $15,230 of shared costs no grant covers. It has spent 99.5% of its budget to date, with $241,274 left and 12 months to go.</a:t>
-            </a:r>
-          </a:p>
-        </p:txBody>
-      </p:sp>
-      <p:sp>
-        <p:nvSpPr>
-          <p:cNvPr id="8" name="Rectangle 7"/>
+              <a:t>Digital literacy cost $7,544 in full in June: $4,316 paid by the Philanthropic foundation grant, and $3,228 of shared costs no grant covers. It has spent 99.3% of its budget to date, with $45,313 left and 9 months to go.</a:t>
+            </a:r>
+          </a:p>
+        </p:txBody>
+      </p:sp>
+      <p:sp>
+        <p:nvSpPr>
+          <p:cNvPr id="10" name="Rectangle 9"/>
           <p:cNvSpPr/>
           <p:nvPr/>
         </p:nvSpPr>
         <p:spPr>
           <a:xfrm>
-            <a:off x="6233007" y="1554480"/>
-            <a:ext cx="5501487" cy="4389120"/>
+            <a:off x="6233007" y="5013960"/>
+            <a:ext cx="5501487" cy="1295400"/>
           </a:xfrm>
           <a:prstGeom prst="rect">
             <a:avLst/>
@@ -6993,14 +9100,14 @@
       </p:sp>
       <p:sp>
         <p:nvSpPr>
-          <p:cNvPr id="9" name="TextBox 8"/>
+          <p:cNvPr id="11" name="TextBox 10"/>
           <p:cNvSpPr txBox="1"/>
           <p:nvPr/>
         </p:nvSpPr>
         <p:spPr>
           <a:xfrm>
-            <a:off x="6461607" y="1691640"/>
-            <a:ext cx="5044287" cy="365760"/>
+            <a:off x="6370167" y="5068824"/>
+            <a:ext cx="5227167" cy="274320"/>
           </a:xfrm>
           <a:prstGeom prst="rect">
             <a:avLst/>
@@ -7008,7 +9115,7 @@
           <a:noFill/>
         </p:spPr>
         <p:txBody>
-          <a:bodyPr wrap="square">
+          <a:bodyPr wrap="square" lIns="45720" rIns="45720">
             <a:spAutoFit/>
           </a:bodyPr>
           <a:lstStyle/>
@@ -7019,7 +9126,7 @@
               </a:defRPr>
             </a:pPr>
             <a:r>
-              <a:rPr sz="1100" b="1">
+              <a:rPr sz="1000" b="1">
                 <a:solidFill>
                   <a:srgbClr val="5F6F63"/>
                 </a:solidFill>
@@ -7032,14 +9139,14 @@
       </p:sp>
       <p:sp>
         <p:nvSpPr>
-          <p:cNvPr id="10" name="TextBox 9"/>
+          <p:cNvPr id="12" name="TextBox 11"/>
           <p:cNvSpPr txBox="1"/>
           <p:nvPr/>
         </p:nvSpPr>
         <p:spPr>
           <a:xfrm>
-            <a:off x="6461607" y="2103120"/>
-            <a:ext cx="5044287" cy="3749039"/>
+            <a:off x="6370167" y="5343144"/>
+            <a:ext cx="5227167" cy="929640"/>
           </a:xfrm>
           <a:prstGeom prst="rect">
             <a:avLst/>
@@ -7047,7 +9154,7 @@
           <a:noFill/>
         </p:spPr>
         <p:txBody>
-          <a:bodyPr wrap="square">
+          <a:bodyPr wrap="square" lIns="45720" rIns="45720">
             <a:spAutoFit/>
           </a:bodyPr>
           <a:lstStyle/>
@@ -7058,27 +9165,27 @@
               </a:defRPr>
             </a:pPr>
             <a:r>
-              <a:rPr sz="1600" b="0">
+              <a:rPr sz="1200" b="0">
                 <a:solidFill>
                   <a:srgbClr val="25342A"/>
                 </a:solidFill>
                 <a:latin typeface="Roboto"/>
               </a:rPr>
-              <a:t>The full cost is $35,596 a month; $15,230 of it is shared cost the grant doesn't pay for. Worth asking for as much of it as the funder allows at renewal.</a:t>
-            </a:r>
-          </a:p>
-        </p:txBody>
-      </p:sp>
-      <p:sp>
-        <p:nvSpPr>
-          <p:cNvPr id="11" name="TextBox 10"/>
+              <a:t>The full cost is $7,544 a month; $3,228 of it is shared cost the grant doesn't pay for. Worth asking for as much of it as the funder allows at renewal.</a:t>
+            </a:r>
+          </a:p>
+        </p:txBody>
+      </p:sp>
+      <p:sp>
+        <p:nvSpPr>
+          <p:cNvPr id="13" name="TextBox 12"/>
           <p:cNvSpPr txBox="1"/>
           <p:nvPr/>
         </p:nvSpPr>
         <p:spPr>
           <a:xfrm>
             <a:off x="457200" y="6492240"/>
-            <a:ext cx="3657600" cy="274320"/>
+            <a:ext cx="2926080" cy="274320"/>
           </a:xfrm>
           <a:prstGeom prst="rect">
             <a:avLst/>
@@ -7086,7 +9193,7 @@
           <a:noFill/>
         </p:spPr>
         <p:txBody>
-          <a:bodyPr wrap="square">
+          <a:bodyPr wrap="square" lIns="45720" rIns="45720">
             <a:spAutoFit/>
           </a:bodyPr>
           <a:lstStyle/>
@@ -7110,14 +9217,14 @@
       </p:sp>
       <p:sp>
         <p:nvSpPr>
-          <p:cNvPr id="12" name="TextBox 11"/>
+          <p:cNvPr id="14" name="TextBox 13"/>
           <p:cNvSpPr txBox="1"/>
           <p:nvPr/>
         </p:nvSpPr>
         <p:spPr>
           <a:xfrm>
-            <a:off x="4297680" y="6492240"/>
-            <a:ext cx="3657600" cy="274320"/>
+            <a:off x="3108960" y="6492240"/>
+            <a:ext cx="5943600" cy="274320"/>
           </a:xfrm>
           <a:prstGeom prst="rect">
             <a:avLst/>
@@ -7125,7 +9232,7 @@
           <a:noFill/>
         </p:spPr>
         <p:txBody>
-          <a:bodyPr wrap="square">
+          <a:bodyPr wrap="square" lIns="45720" rIns="45720">
             <a:spAutoFit/>
           </a:bodyPr>
           <a:lstStyle/>
@@ -7142,14 +9249,14 @@
                 </a:solidFill>
                 <a:latin typeface="Roboto"/>
               </a:rPr>
-              <a:t>Data retrieved 2pm, Tue 6 Oct 2026 · Sample data</a:t>
-            </a:r>
-          </a:p>
-        </p:txBody>
-      </p:sp>
-      <p:sp>
-        <p:nvSpPr>
-          <p:cNvPr id="13" name="TextBox 12"/>
+              <a:t>Data retrieved 2pm, Tue 6 Oct 2026 · Generated 8 Oct 2026, 9:35am · Sample data · Made with Python (python-pptx)</a:t>
+            </a:r>
+          </a:p>
+        </p:txBody>
+      </p:sp>
+      <p:sp>
+        <p:nvSpPr>
+          <p:cNvPr id="15" name="TextBox 14"/>
           <p:cNvSpPr txBox="1"/>
           <p:nvPr/>
         </p:nvSpPr>
@@ -7164,7 +9271,7 @@
           <a:noFill/>
         </p:spPr>
         <p:txBody>
-          <a:bodyPr wrap="square">
+          <a:bodyPr wrap="square" lIns="45720" rIns="45720">
             <a:spAutoFit/>
           </a:bodyPr>
           <a:lstStyle/>
@@ -7181,7 +9288,7 @@
                 </a:solidFill>
                 <a:latin typeface="Roboto"/>
               </a:rPr>
-              <a:t>Slide 6 of 11</a:t>
+              <a:t>Slide 6 of 8</a:t>
             </a:r>
           </a:p>
         </p:txBody>
@@ -7206,7 +9313,44 @@
       <p:grpSpPr/>
       <p:sp>
         <p:nvSpPr>
-          <p:cNvPr id="2" name="Rectangle 1"/>
+          <p:cNvPr id="2" name="Title 1"/>
+          <p:cNvSpPr>
+            <a:spLocks noGrp="1"/>
+          </p:cNvSpPr>
+          <p:nvPr>
+            <p:ph type="title"/>
+          </p:nvPr>
+        </p:nvSpPr>
+        <p:spPr>
+          <a:xfrm>
+            <a:off x="457200" y="384048"/>
+            <a:ext cx="11277295" cy="475488"/>
+          </a:xfrm>
+        </p:spPr>
+        <p:txBody>
+          <a:bodyPr wrap="square" lIns="45720" rIns="45720" tIns="0" bIns="0" anchor="t"/>
+          <a:lstStyle/>
+          <a:p>
+            <a:pPr algn="l">
+              <a:defRPr>
+                <a:latin typeface="Roboto"/>
+              </a:defRPr>
+            </a:pPr>
+            <a:r>
+              <a:rPr sz="2400" b="1">
+                <a:solidFill>
+                  <a:srgbClr val="25342A"/>
+                </a:solidFill>
+                <a:latin typeface="Roboto"/>
+              </a:rPr>
+              <a:t>Community meals (2025-26)</a:t>
+            </a:r>
+          </a:p>
+        </p:txBody>
+      </p:sp>
+      <p:sp>
+        <p:nvSpPr>
+          <p:cNvPr id="3" name="Rectangle 2"/>
           <p:cNvSpPr/>
           <p:nvPr/>
         </p:nvSpPr>
@@ -7253,14 +9397,14 @@
       </p:sp>
       <p:sp>
         <p:nvSpPr>
-          <p:cNvPr id="3" name="TextBox 2"/>
+          <p:cNvPr id="4" name="TextBox 3"/>
           <p:cNvSpPr txBox="1"/>
           <p:nvPr/>
         </p:nvSpPr>
         <p:spPr>
           <a:xfrm>
-            <a:off x="457200" y="164592"/>
-            <a:ext cx="7315200" cy="274320"/>
+            <a:off x="457200" y="146304"/>
+            <a:ext cx="8229600" cy="256032"/>
           </a:xfrm>
           <a:prstGeom prst="rect">
             <a:avLst/>
@@ -7268,7 +9412,7 @@
           <a:noFill/>
         </p:spPr>
         <p:txBody>
-          <a:bodyPr wrap="square">
+          <a:bodyPr wrap="square" lIns="45720" rIns="45720">
             <a:spAutoFit/>
           </a:bodyPr>
           <a:lstStyle/>
@@ -7292,14 +9436,14 @@
       </p:sp>
       <p:sp>
         <p:nvSpPr>
-          <p:cNvPr id="4" name="TextBox 3"/>
+          <p:cNvPr id="5" name="TextBox 4"/>
           <p:cNvSpPr txBox="1"/>
           <p:nvPr/>
         </p:nvSpPr>
         <p:spPr>
           <a:xfrm>
-            <a:off x="457200" y="411480"/>
-            <a:ext cx="11247120" cy="548640"/>
+            <a:off x="457200" y="914400"/>
+            <a:ext cx="11277295" cy="263652"/>
           </a:xfrm>
           <a:prstGeom prst="rect">
             <a:avLst/>
@@ -7307,7 +9451,7 @@
           <a:noFill/>
         </p:spPr>
         <p:txBody>
-          <a:bodyPr wrap="square">
+          <a:bodyPr wrap="square" lIns="45720" rIns="45720">
             <a:spAutoFit/>
           </a:bodyPr>
           <a:lstStyle/>
@@ -7318,27 +9462,45 @@
               </a:defRPr>
             </a:pPr>
             <a:r>
-              <a:rPr sz="2400" b="1">
+              <a:rPr sz="1200" b="0">
                 <a:solidFill>
-                  <a:srgbClr val="25342A"/>
+                  <a:srgbClr val="5F6F63"/>
                 </a:solidFill>
                 <a:latin typeface="Roboto"/>
               </a:rPr>
-              <a:t>What it shows · Program: Mental health first aid</a:t>
-            </a:r>
-          </a:p>
-        </p:txBody>
-      </p:sp>
-      <p:sp>
-        <p:nvSpPr>
-          <p:cNvPr id="5" name="Rectangle 4"/>
+              <a:t>Grant spending, by month · Community meals (2025-26)</a:t>
+            </a:r>
+          </a:p>
+        </p:txBody>
+      </p:sp>
+      <p:graphicFrame>
+        <p:nvGraphicFramePr>
+          <p:cNvPr id="6" name="Chart 5"/>
+          <p:cNvGraphicFramePr>
+            <a:graphicFrameLocks noGrp="1"/>
+          </p:cNvGraphicFramePr>
+          <p:nvPr/>
+        </p:nvGraphicFramePr>
+        <p:xfrm>
+          <a:off x="457200" y="1278636"/>
+          <a:ext cx="11277295" cy="3643884"/>
+        </p:xfrm>
+        <a:graphic>
+          <a:graphicData uri="http://schemas.openxmlformats.org/drawingml/2006/chart">
+            <c:chart xmlns:c="http://schemas.openxmlformats.org/drawingml/2006/chart" r:id="rId3"/>
+          </a:graphicData>
+        </a:graphic>
+      </p:graphicFrame>
+      <p:sp>
+        <p:nvSpPr>
+          <p:cNvPr id="7" name="Rectangle 6"/>
           <p:cNvSpPr/>
           <p:nvPr/>
         </p:nvSpPr>
         <p:spPr>
           <a:xfrm>
-            <a:off x="457200" y="1554480"/>
-            <a:ext cx="5501487" cy="4389120"/>
+            <a:off x="457200" y="5013960"/>
+            <a:ext cx="5501487" cy="1295400"/>
           </a:xfrm>
           <a:prstGeom prst="rect">
             <a:avLst/>
@@ -7380,14 +9542,14 @@
       </p:sp>
       <p:sp>
         <p:nvSpPr>
-          <p:cNvPr id="6" name="TextBox 5"/>
+          <p:cNvPr id="8" name="TextBox 7"/>
           <p:cNvSpPr txBox="1"/>
           <p:nvPr/>
         </p:nvSpPr>
         <p:spPr>
           <a:xfrm>
-            <a:off x="685800" y="1691640"/>
-            <a:ext cx="5044287" cy="365760"/>
+            <a:off x="594360" y="5068824"/>
+            <a:ext cx="5227167" cy="274320"/>
           </a:xfrm>
           <a:prstGeom prst="rect">
             <a:avLst/>
@@ -7395,7 +9557,7 @@
           <a:noFill/>
         </p:spPr>
         <p:txBody>
-          <a:bodyPr wrap="square">
+          <a:bodyPr wrap="square" lIns="45720" rIns="45720">
             <a:spAutoFit/>
           </a:bodyPr>
           <a:lstStyle/>
@@ -7406,7 +9568,7 @@
               </a:defRPr>
             </a:pPr>
             <a:r>
-              <a:rPr sz="1100" b="1">
+              <a:rPr sz="1000" b="1">
                 <a:solidFill>
                   <a:srgbClr val="5F6F63"/>
                 </a:solidFill>
@@ -7419,14 +9581,14 @@
       </p:sp>
       <p:sp>
         <p:nvSpPr>
-          <p:cNvPr id="7" name="TextBox 6"/>
+          <p:cNvPr id="9" name="TextBox 8"/>
           <p:cNvSpPr txBox="1"/>
           <p:nvPr/>
         </p:nvSpPr>
         <p:spPr>
           <a:xfrm>
-            <a:off x="685800" y="2103120"/>
-            <a:ext cx="5044287" cy="3749039"/>
+            <a:off x="594360" y="5343144"/>
+            <a:ext cx="5227167" cy="929640"/>
           </a:xfrm>
           <a:prstGeom prst="rect">
             <a:avLst/>
@@ -7434,7 +9596,7 @@
           <a:noFill/>
         </p:spPr>
         <p:txBody>
-          <a:bodyPr wrap="square">
+          <a:bodyPr wrap="square" lIns="45720" rIns="45720">
             <a:spAutoFit/>
           </a:bodyPr>
           <a:lstStyle/>
@@ -7445,27 +9607,27 @@
               </a:defRPr>
             </a:pPr>
             <a:r>
-              <a:rPr sz="1600" b="0">
+              <a:rPr sz="1200" b="0">
                 <a:solidFill>
                   <a:srgbClr val="25342A"/>
                 </a:solidFill>
                 <a:latin typeface="Roboto"/>
               </a:rPr>
-              <a:t>Mental health first aid cost $17,123 in full in June: $9,797 paid by the Federal health program grant, and $7,326 of shared costs no grant covers. It has spent 94.4% of its budget to date, with $91,669 left and 9 months to go.</a:t>
-            </a:r>
-          </a:p>
-        </p:txBody>
-      </p:sp>
-      <p:sp>
-        <p:nvSpPr>
-          <p:cNvPr id="8" name="Rectangle 7"/>
+              <a:t>Community meals (2025-26) cost $6,467 in full in June: $3,700 paid by the Local council community grant grant, and $2,767 of shared costs no grant covers. It has spent 97.7% of its budget to date, with $1,000 left and 0 months to go.</a:t>
+            </a:r>
+          </a:p>
+        </p:txBody>
+      </p:sp>
+      <p:sp>
+        <p:nvSpPr>
+          <p:cNvPr id="10" name="Rectangle 9"/>
           <p:cNvSpPr/>
           <p:nvPr/>
         </p:nvSpPr>
         <p:spPr>
           <a:xfrm>
-            <a:off x="6233007" y="1554480"/>
-            <a:ext cx="5501487" cy="4389120"/>
+            <a:off x="6233007" y="5013960"/>
+            <a:ext cx="5501487" cy="1295400"/>
           </a:xfrm>
           <a:prstGeom prst="rect">
             <a:avLst/>
@@ -7507,14 +9669,14 @@
       </p:sp>
       <p:sp>
         <p:nvSpPr>
-          <p:cNvPr id="9" name="TextBox 8"/>
+          <p:cNvPr id="11" name="TextBox 10"/>
           <p:cNvSpPr txBox="1"/>
           <p:nvPr/>
         </p:nvSpPr>
         <p:spPr>
           <a:xfrm>
-            <a:off x="6461607" y="1691640"/>
-            <a:ext cx="5044287" cy="365760"/>
+            <a:off x="6370167" y="5068824"/>
+            <a:ext cx="5227167" cy="274320"/>
           </a:xfrm>
           <a:prstGeom prst="rect">
             <a:avLst/>
@@ -7522,7 +9684,7 @@
           <a:noFill/>
         </p:spPr>
         <p:txBody>
-          <a:bodyPr wrap="square">
+          <a:bodyPr wrap="square" lIns="45720" rIns="45720">
             <a:spAutoFit/>
           </a:bodyPr>
           <a:lstStyle/>
@@ -7533,7 +9695,7 @@
               </a:defRPr>
             </a:pPr>
             <a:r>
-              <a:rPr sz="1100" b="1">
+              <a:rPr sz="1000" b="1">
                 <a:solidFill>
                   <a:srgbClr val="5F6F63"/>
                 </a:solidFill>
@@ -7546,14 +9708,14 @@
       </p:sp>
       <p:sp>
         <p:nvSpPr>
-          <p:cNvPr id="10" name="TextBox 9"/>
+          <p:cNvPr id="12" name="TextBox 11"/>
           <p:cNvSpPr txBox="1"/>
           <p:nvPr/>
         </p:nvSpPr>
         <p:spPr>
           <a:xfrm>
-            <a:off x="6461607" y="2103120"/>
-            <a:ext cx="5044287" cy="3749039"/>
+            <a:off x="6370167" y="5343144"/>
+            <a:ext cx="5227167" cy="929640"/>
           </a:xfrm>
           <a:prstGeom prst="rect">
             <a:avLst/>
@@ -7561,7 +9723,7 @@
           <a:noFill/>
         </p:spPr>
         <p:txBody>
-          <a:bodyPr wrap="square">
+          <a:bodyPr wrap="square" lIns="45720" rIns="45720">
             <a:spAutoFit/>
           </a:bodyPr>
           <a:lstStyle/>
@@ -7572,27 +9734,27 @@
               </a:defRPr>
             </a:pPr>
             <a:r>
-              <a:rPr sz="1600" b="0">
+              <a:rPr sz="1200" b="0">
                 <a:solidFill>
                   <a:srgbClr val="25342A"/>
                 </a:solidFill>
                 <a:latin typeface="Roboto"/>
               </a:rPr>
-              <a:t>The full cost is $17,123 a month; $7,326 of it is shared cost the grant doesn't pay for. Worth asking for as much of it as the funder allows at renewal.</a:t>
-            </a:r>
-          </a:p>
-        </p:txBody>
-      </p:sp>
-      <p:sp>
-        <p:nvSpPr>
-          <p:cNvPr id="11" name="TextBox 10"/>
+              <a:t>The full cost is $6,467 a month; $2,767 of it is shared cost the grant doesn't pay for. Worth asking for as much of it as the funder allows at renewal.</a:t>
+            </a:r>
+          </a:p>
+        </p:txBody>
+      </p:sp>
+      <p:sp>
+        <p:nvSpPr>
+          <p:cNvPr id="13" name="TextBox 12"/>
           <p:cNvSpPr txBox="1"/>
           <p:nvPr/>
         </p:nvSpPr>
         <p:spPr>
           <a:xfrm>
             <a:off x="457200" y="6492240"/>
-            <a:ext cx="3657600" cy="274320"/>
+            <a:ext cx="2926080" cy="274320"/>
           </a:xfrm>
           <a:prstGeom prst="rect">
             <a:avLst/>
@@ -7600,7 +9762,7 @@
           <a:noFill/>
         </p:spPr>
         <p:txBody>
-          <a:bodyPr wrap="square">
+          <a:bodyPr wrap="square" lIns="45720" rIns="45720">
             <a:spAutoFit/>
           </a:bodyPr>
           <a:lstStyle/>
@@ -7624,14 +9786,14 @@
       </p:sp>
       <p:sp>
         <p:nvSpPr>
-          <p:cNvPr id="12" name="TextBox 11"/>
+          <p:cNvPr id="14" name="TextBox 13"/>
           <p:cNvSpPr txBox="1"/>
           <p:nvPr/>
         </p:nvSpPr>
         <p:spPr>
           <a:xfrm>
-            <a:off x="4297680" y="6492240"/>
-            <a:ext cx="3657600" cy="274320"/>
+            <a:off x="3108960" y="6492240"/>
+            <a:ext cx="5943600" cy="274320"/>
           </a:xfrm>
           <a:prstGeom prst="rect">
             <a:avLst/>
@@ -7639,7 +9801,7 @@
           <a:noFill/>
         </p:spPr>
         <p:txBody>
-          <a:bodyPr wrap="square">
+          <a:bodyPr wrap="square" lIns="45720" rIns="45720">
             <a:spAutoFit/>
           </a:bodyPr>
           <a:lstStyle/>
@@ -7656,14 +9818,14 @@
                 </a:solidFill>
                 <a:latin typeface="Roboto"/>
               </a:rPr>
-              <a:t>Data retrieved 2pm, Tue 6 Oct 2026 · Sample data</a:t>
-            </a:r>
-          </a:p>
-        </p:txBody>
-      </p:sp>
-      <p:sp>
-        <p:nvSpPr>
-          <p:cNvPr id="13" name="TextBox 12"/>
+              <a:t>Data retrieved 2pm, Tue 6 Oct 2026 · Generated 8 Oct 2026, 9:35am · Sample data · Made with Python (python-pptx)</a:t>
+            </a:r>
+          </a:p>
+        </p:txBody>
+      </p:sp>
+      <p:sp>
+        <p:nvSpPr>
+          <p:cNvPr id="15" name="TextBox 14"/>
           <p:cNvSpPr txBox="1"/>
           <p:nvPr/>
         </p:nvSpPr>
@@ -7678,7 +9840,7 @@
           <a:noFill/>
         </p:spPr>
         <p:txBody>
-          <a:bodyPr wrap="square">
+          <a:bodyPr wrap="square" lIns="45720" rIns="45720">
             <a:spAutoFit/>
           </a:bodyPr>
           <a:lstStyle/>
@@ -7695,7 +9857,7 @@
                 </a:solidFill>
                 <a:latin typeface="Roboto"/>
               </a:rPr>
-              <a:t>Slide 7 of 11</a:t>
+              <a:t>Slide 7 of 8</a:t>
             </a:r>
           </a:p>
         </p:txBody>
@@ -7720,7 +9882,44 @@
       <p:grpSpPr/>
       <p:sp>
         <p:nvSpPr>
-          <p:cNvPr id="2" name="Rectangle 1"/>
+          <p:cNvPr id="2" name="Title 1"/>
+          <p:cNvSpPr>
+            <a:spLocks noGrp="1"/>
+          </p:cNvSpPr>
+          <p:nvPr>
+            <p:ph type="title"/>
+          </p:nvPr>
+        </p:nvSpPr>
+        <p:spPr>
+          <a:xfrm>
+            <a:off x="457200" y="384048"/>
+            <a:ext cx="11277295" cy="475488"/>
+          </a:xfrm>
+        </p:spPr>
+        <p:txBody>
+          <a:bodyPr wrap="square" lIns="45720" rIns="45720" tIns="0" bIns="0" anchor="t"/>
+          <a:lstStyle/>
+          <a:p>
+            <a:pPr algn="l">
+              <a:defRPr>
+                <a:latin typeface="Roboto"/>
+              </a:defRPr>
+            </a:pPr>
+            <a:r>
+              <a:rPr sz="2400" b="1">
+                <a:solidFill>
+                  <a:srgbClr val="25342A"/>
+                </a:solidFill>
+                <a:latin typeface="Roboto"/>
+              </a:rPr>
+              <a:t>Volunteer coordinator</a:t>
+            </a:r>
+          </a:p>
+        </p:txBody>
+      </p:sp>
+      <p:sp>
+        <p:nvSpPr>
+          <p:cNvPr id="3" name="Rectangle 2"/>
           <p:cNvSpPr/>
           <p:nvPr/>
         </p:nvSpPr>
@@ -7767,14 +9966,14 @@
       </p:sp>
       <p:sp>
         <p:nvSpPr>
-          <p:cNvPr id="3" name="TextBox 2"/>
+          <p:cNvPr id="4" name="TextBox 3"/>
           <p:cNvSpPr txBox="1"/>
           <p:nvPr/>
         </p:nvSpPr>
         <p:spPr>
           <a:xfrm>
-            <a:off x="457200" y="164592"/>
-            <a:ext cx="7315200" cy="274320"/>
+            <a:off x="457200" y="146304"/>
+            <a:ext cx="8229600" cy="256032"/>
           </a:xfrm>
           <a:prstGeom prst="rect">
             <a:avLst/>
@@ -7782,7 +9981,7 @@
           <a:noFill/>
         </p:spPr>
         <p:txBody>
-          <a:bodyPr wrap="square">
+          <a:bodyPr wrap="square" lIns="45720" rIns="45720">
             <a:spAutoFit/>
           </a:bodyPr>
           <a:lstStyle/>
@@ -7806,14 +10005,14 @@
       </p:sp>
       <p:sp>
         <p:nvSpPr>
-          <p:cNvPr id="4" name="TextBox 3"/>
+          <p:cNvPr id="5" name="TextBox 4"/>
           <p:cNvSpPr txBox="1"/>
           <p:nvPr/>
         </p:nvSpPr>
         <p:spPr>
           <a:xfrm>
-            <a:off x="457200" y="411480"/>
-            <a:ext cx="11247120" cy="548640"/>
+            <a:off x="457200" y="914400"/>
+            <a:ext cx="11277295" cy="263652"/>
           </a:xfrm>
           <a:prstGeom prst="rect">
             <a:avLst/>
@@ -7821,7 +10020,7 @@
           <a:noFill/>
         </p:spPr>
         <p:txBody>
-          <a:bodyPr wrap="square">
+          <a:bodyPr wrap="square" lIns="45720" rIns="45720">
             <a:spAutoFit/>
           </a:bodyPr>
           <a:lstStyle/>
@@ -7832,27 +10031,45 @@
               </a:defRPr>
             </a:pPr>
             <a:r>
-              <a:rPr sz="2400" b="1">
+              <a:rPr sz="1200" b="0">
                 <a:solidFill>
-                  <a:srgbClr val="25342A"/>
+                  <a:srgbClr val="5F6F63"/>
                 </a:solidFill>
                 <a:latin typeface="Roboto"/>
               </a:rPr>
-              <a:t>What it shows · Program: Digital literacy</a:t>
-            </a:r>
-          </a:p>
-        </p:txBody>
-      </p:sp>
-      <p:sp>
-        <p:nvSpPr>
-          <p:cNvPr id="5" name="Rectangle 4"/>
+              <a:t>Grant spending, by month · Volunteer coordinator</a:t>
+            </a:r>
+          </a:p>
+        </p:txBody>
+      </p:sp>
+      <p:graphicFrame>
+        <p:nvGraphicFramePr>
+          <p:cNvPr id="6" name="Chart 5"/>
+          <p:cNvGraphicFramePr>
+            <a:graphicFrameLocks noGrp="1"/>
+          </p:cNvGraphicFramePr>
+          <p:nvPr/>
+        </p:nvGraphicFramePr>
+        <p:xfrm>
+          <a:off x="457200" y="1278636"/>
+          <a:ext cx="11277295" cy="3643884"/>
+        </p:xfrm>
+        <a:graphic>
+          <a:graphicData uri="http://schemas.openxmlformats.org/drawingml/2006/chart">
+            <c:chart xmlns:c="http://schemas.openxmlformats.org/drawingml/2006/chart" r:id="rId3"/>
+          </a:graphicData>
+        </a:graphic>
+      </p:graphicFrame>
+      <p:sp>
+        <p:nvSpPr>
+          <p:cNvPr id="7" name="Rectangle 6"/>
           <p:cNvSpPr/>
           <p:nvPr/>
         </p:nvSpPr>
         <p:spPr>
           <a:xfrm>
-            <a:off x="457200" y="1554480"/>
-            <a:ext cx="5501487" cy="4389120"/>
+            <a:off x="457200" y="5013960"/>
+            <a:ext cx="5501487" cy="1295400"/>
           </a:xfrm>
           <a:prstGeom prst="rect">
             <a:avLst/>
@@ -7894,14 +10111,14 @@
       </p:sp>
       <p:sp>
         <p:nvSpPr>
-          <p:cNvPr id="6" name="TextBox 5"/>
+          <p:cNvPr id="8" name="TextBox 7"/>
           <p:cNvSpPr txBox="1"/>
           <p:nvPr/>
         </p:nvSpPr>
         <p:spPr>
           <a:xfrm>
-            <a:off x="685800" y="1691640"/>
-            <a:ext cx="5044287" cy="365760"/>
+            <a:off x="594360" y="5068824"/>
+            <a:ext cx="5227167" cy="274320"/>
           </a:xfrm>
           <a:prstGeom prst="rect">
             <a:avLst/>
@@ -7909,7 +10126,7 @@
           <a:noFill/>
         </p:spPr>
         <p:txBody>
-          <a:bodyPr wrap="square">
+          <a:bodyPr wrap="square" lIns="45720" rIns="45720">
             <a:spAutoFit/>
           </a:bodyPr>
           <a:lstStyle/>
@@ -7920,7 +10137,7 @@
               </a:defRPr>
             </a:pPr>
             <a:r>
-              <a:rPr sz="1100" b="1">
+              <a:rPr sz="1000" b="1">
                 <a:solidFill>
                   <a:srgbClr val="5F6F63"/>
                 </a:solidFill>
@@ -7933,14 +10150,14 @@
       </p:sp>
       <p:sp>
         <p:nvSpPr>
-          <p:cNvPr id="7" name="TextBox 6"/>
+          <p:cNvPr id="9" name="TextBox 8"/>
           <p:cNvSpPr txBox="1"/>
           <p:nvPr/>
         </p:nvSpPr>
         <p:spPr>
           <a:xfrm>
-            <a:off x="685800" y="2103120"/>
-            <a:ext cx="5044287" cy="3749039"/>
+            <a:off x="594360" y="5343144"/>
+            <a:ext cx="5227167" cy="929640"/>
           </a:xfrm>
           <a:prstGeom prst="rect">
             <a:avLst/>
@@ -7948,7 +10165,7 @@
           <a:noFill/>
         </p:spPr>
         <p:txBody>
-          <a:bodyPr wrap="square">
+          <a:bodyPr wrap="square" lIns="45720" rIns="45720">
             <a:spAutoFit/>
           </a:bodyPr>
           <a:lstStyle/>
@@ -7959,27 +10176,27 @@
               </a:defRPr>
             </a:pPr>
             <a:r>
-              <a:rPr sz="1600" b="0">
+              <a:rPr sz="1200" b="0">
                 <a:solidFill>
                   <a:srgbClr val="25342A"/>
                 </a:solidFill>
                 <a:latin typeface="Roboto"/>
               </a:rPr>
-              <a:t>Digital literacy cost $7,544 in full in June: $4,316 paid by the Philanthropic foundation grant, and $3,228 of shared costs no grant covers. It has spent 99.3% of its budget to date, with $45,313 left and 9 months to go.</a:t>
-            </a:r>
-          </a:p>
-        </p:txBody>
-      </p:sp>
-      <p:sp>
-        <p:nvSpPr>
-          <p:cNvPr id="8" name="Rectangle 7"/>
+              <a:t>Volunteer coordinator cost $4,717 in full in June: $2,699 paid by the State volunteering grant grant, and $2,018 of shared costs no grant covers. It has spent 98.6% of its budget to date, with $24,165 left and 8 months to go.</a:t>
+            </a:r>
+          </a:p>
+        </p:txBody>
+      </p:sp>
+      <p:sp>
+        <p:nvSpPr>
+          <p:cNvPr id="10" name="Rectangle 9"/>
           <p:cNvSpPr/>
           <p:nvPr/>
         </p:nvSpPr>
         <p:spPr>
           <a:xfrm>
-            <a:off x="6233007" y="1554480"/>
-            <a:ext cx="5501487" cy="4389120"/>
+            <a:off x="6233007" y="5013960"/>
+            <a:ext cx="5501487" cy="1295400"/>
           </a:xfrm>
           <a:prstGeom prst="rect">
             <a:avLst/>
@@ -8021,14 +10238,14 @@
       </p:sp>
       <p:sp>
         <p:nvSpPr>
-          <p:cNvPr id="9" name="TextBox 8"/>
+          <p:cNvPr id="11" name="TextBox 10"/>
           <p:cNvSpPr txBox="1"/>
           <p:nvPr/>
         </p:nvSpPr>
         <p:spPr>
           <a:xfrm>
-            <a:off x="6461607" y="1691640"/>
-            <a:ext cx="5044287" cy="365760"/>
+            <a:off x="6370167" y="5068824"/>
+            <a:ext cx="5227167" cy="274320"/>
           </a:xfrm>
           <a:prstGeom prst="rect">
             <a:avLst/>
@@ -8036,7 +10253,7 @@
           <a:noFill/>
         </p:spPr>
         <p:txBody>
-          <a:bodyPr wrap="square">
+          <a:bodyPr wrap="square" lIns="45720" rIns="45720">
             <a:spAutoFit/>
           </a:bodyPr>
           <a:lstStyle/>
@@ -8047,7 +10264,7 @@
               </a:defRPr>
             </a:pPr>
             <a:r>
-              <a:rPr sz="1100" b="1">
+              <a:rPr sz="1000" b="1">
                 <a:solidFill>
                   <a:srgbClr val="5F6F63"/>
                 </a:solidFill>
@@ -8060,14 +10277,14 @@
       </p:sp>
       <p:sp>
         <p:nvSpPr>
-          <p:cNvPr id="10" name="TextBox 9"/>
+          <p:cNvPr id="12" name="TextBox 11"/>
           <p:cNvSpPr txBox="1"/>
           <p:nvPr/>
         </p:nvSpPr>
         <p:spPr>
           <a:xfrm>
-            <a:off x="6461607" y="2103120"/>
-            <a:ext cx="5044287" cy="3749039"/>
+            <a:off x="6370167" y="5343144"/>
+            <a:ext cx="5227167" cy="929640"/>
           </a:xfrm>
           <a:prstGeom prst="rect">
             <a:avLst/>
@@ -8075,7 +10292,7 @@
           <a:noFill/>
         </p:spPr>
         <p:txBody>
-          <a:bodyPr wrap="square">
+          <a:bodyPr wrap="square" lIns="45720" rIns="45720">
             <a:spAutoFit/>
           </a:bodyPr>
           <a:lstStyle/>
@@ -8086,27 +10303,27 @@
               </a:defRPr>
             </a:pPr>
             <a:r>
-              <a:rPr sz="1600" b="0">
+              <a:rPr sz="1200" b="0">
                 <a:solidFill>
                   <a:srgbClr val="25342A"/>
                 </a:solidFill>
                 <a:latin typeface="Roboto"/>
               </a:rPr>
-              <a:t>The full cost is $7,544 a month; $3,228 of it is shared cost the grant doesn't pay for. Worth asking for as much of it as the funder allows at renewal.</a:t>
-            </a:r>
-          </a:p>
-        </p:txBody>
-      </p:sp>
-      <p:sp>
-        <p:nvSpPr>
-          <p:cNvPr id="11" name="TextBox 10"/>
+              <a:t>The full cost is $4,717 a month; $2,018 of it is shared cost the grant doesn't pay for. Worth asking for as much of it as the funder allows at renewal.</a:t>
+            </a:r>
+          </a:p>
+        </p:txBody>
+      </p:sp>
+      <p:sp>
+        <p:nvSpPr>
+          <p:cNvPr id="13" name="TextBox 12"/>
           <p:cNvSpPr txBox="1"/>
           <p:nvPr/>
         </p:nvSpPr>
         <p:spPr>
           <a:xfrm>
             <a:off x="457200" y="6492240"/>
-            <a:ext cx="3657600" cy="274320"/>
+            <a:ext cx="2926080" cy="274320"/>
           </a:xfrm>
           <a:prstGeom prst="rect">
             <a:avLst/>
@@ -8114,7 +10331,7 @@
           <a:noFill/>
         </p:spPr>
         <p:txBody>
-          <a:bodyPr wrap="square">
+          <a:bodyPr wrap="square" lIns="45720" rIns="45720">
             <a:spAutoFit/>
           </a:bodyPr>
           <a:lstStyle/>
@@ -8138,14 +10355,14 @@
       </p:sp>
       <p:sp>
         <p:nvSpPr>
-          <p:cNvPr id="12" name="TextBox 11"/>
+          <p:cNvPr id="14" name="TextBox 13"/>
           <p:cNvSpPr txBox="1"/>
           <p:nvPr/>
         </p:nvSpPr>
         <p:spPr>
           <a:xfrm>
-            <a:off x="4297680" y="6492240"/>
-            <a:ext cx="3657600" cy="274320"/>
+            <a:off x="3108960" y="6492240"/>
+            <a:ext cx="5943600" cy="274320"/>
           </a:xfrm>
           <a:prstGeom prst="rect">
             <a:avLst/>
@@ -8153,7 +10370,7 @@
           <a:noFill/>
         </p:spPr>
         <p:txBody>
-          <a:bodyPr wrap="square">
+          <a:bodyPr wrap="square" lIns="45720" rIns="45720">
             <a:spAutoFit/>
           </a:bodyPr>
           <a:lstStyle/>
@@ -8170,14 +10387,14 @@
                 </a:solidFill>
                 <a:latin typeface="Roboto"/>
               </a:rPr>
-              <a:t>Data retrieved 2pm, Tue 6 Oct 2026 · Sample data</a:t>
-            </a:r>
-          </a:p>
-        </p:txBody>
-      </p:sp>
-      <p:sp>
-        <p:nvSpPr>
-          <p:cNvPr id="13" name="TextBox 12"/>
+              <a:t>Data retrieved 2pm, Tue 6 Oct 2026 · Generated 8 Oct 2026, 9:35am · Sample data · Made with Python (python-pptx)</a:t>
+            </a:r>
+          </a:p>
+        </p:txBody>
+      </p:sp>
+      <p:sp>
+        <p:nvSpPr>
+          <p:cNvPr id="15" name="TextBox 14"/>
           <p:cNvSpPr txBox="1"/>
           <p:nvPr/>
         </p:nvSpPr>
@@ -8192,7 +10409,7 @@
           <a:noFill/>
         </p:spPr>
         <p:txBody>
-          <a:bodyPr wrap="square">
+          <a:bodyPr wrap="square" lIns="45720" rIns="45720">
             <a:spAutoFit/>
           </a:bodyPr>
           <a:lstStyle/>
@@ -8209,521 +10426,7 @@
                 </a:solidFill>
                 <a:latin typeface="Roboto"/>
               </a:rPr>
-              <a:t>Slide 8 of 11</a:t>
-            </a:r>
-          </a:p>
-        </p:txBody>
-      </p:sp>
-    </p:spTree>
-  </p:cSld>
-  <p:clrMapOvr>
-    <a:masterClrMapping/>
-  </p:clrMapOvr>
-</p:sld>
-</file>
-
-<file path=ppt/slides/slide9.xml><?xml version="1.0" encoding="utf-8"?>
-<p:sld xmlns:a="http://schemas.openxmlformats.org/drawingml/2006/main" xmlns:p="http://schemas.openxmlformats.org/presentationml/2006/main" xmlns:r="http://schemas.openxmlformats.org/officeDocument/2006/relationships">
-  <p:cSld>
-    <p:spTree>
-      <p:nvGrpSpPr>
-        <p:cNvPr id="1" name=""/>
-        <p:cNvGrpSpPr/>
-        <p:nvPr/>
-      </p:nvGrpSpPr>
-      <p:grpSpPr/>
-      <p:sp>
-        <p:nvSpPr>
-          <p:cNvPr id="2" name="Rectangle 1"/>
-          <p:cNvSpPr/>
-          <p:nvPr/>
-        </p:nvSpPr>
-        <p:spPr>
-          <a:xfrm>
-            <a:off x="0" y="0"/>
-            <a:ext cx="12191695" cy="73152"/>
-          </a:xfrm>
-          <a:prstGeom prst="rect">
-            <a:avLst/>
-          </a:prstGeom>
-          <a:solidFill>
-            <a:srgbClr val="2F7A5D"/>
-          </a:solidFill>
-          <a:ln>
-            <a:noFill/>
-          </a:ln>
-        </p:spPr>
-        <p:style>
-          <a:lnRef idx="1">
-            <a:schemeClr val="accent1"/>
-          </a:lnRef>
-          <a:fillRef idx="3">
-            <a:schemeClr val="accent1"/>
-          </a:fillRef>
-          <a:effectRef idx="2">
-            <a:schemeClr val="accent1"/>
-          </a:effectRef>
-          <a:fontRef idx="minor">
-            <a:schemeClr val="lt1"/>
-          </a:fontRef>
-        </p:style>
-        <p:txBody>
-          <a:bodyPr rtlCol="0" anchor="ctr"/>
-          <a:lstStyle/>
-          <a:p>
-            <a:pPr algn="ctr">
-              <a:defRPr>
-                <a:latin typeface="Roboto"/>
-              </a:defRPr>
-            </a:pPr>
-          </a:p>
-        </p:txBody>
-      </p:sp>
-      <p:sp>
-        <p:nvSpPr>
-          <p:cNvPr id="3" name="TextBox 2"/>
-          <p:cNvSpPr txBox="1"/>
-          <p:nvPr/>
-        </p:nvSpPr>
-        <p:spPr>
-          <a:xfrm>
-            <a:off x="457200" y="164592"/>
-            <a:ext cx="7315200" cy="274320"/>
-          </a:xfrm>
-          <a:prstGeom prst="rect">
-            <a:avLst/>
-          </a:prstGeom>
-          <a:noFill/>
-        </p:spPr>
-        <p:txBody>
-          <a:bodyPr wrap="square">
-            <a:spAutoFit/>
-          </a:bodyPr>
-          <a:lstStyle/>
-          <a:p>
-            <a:pPr>
-              <a:defRPr>
-                <a:latin typeface="Roboto"/>
-              </a:defRPr>
-            </a:pPr>
-            <a:r>
-              <a:rPr sz="1000" b="0">
-                <a:solidFill>
-                  <a:srgbClr val="5F6F63"/>
-                </a:solidFill>
-                <a:latin typeface="Roboto"/>
-              </a:rPr>
-              <a:t>Sample Community Services Ltd · What does each program really cost?</a:t>
-            </a:r>
-          </a:p>
-        </p:txBody>
-      </p:sp>
-      <p:sp>
-        <p:nvSpPr>
-          <p:cNvPr id="4" name="TextBox 3"/>
-          <p:cNvSpPr txBox="1"/>
-          <p:nvPr/>
-        </p:nvSpPr>
-        <p:spPr>
-          <a:xfrm>
-            <a:off x="457200" y="411480"/>
-            <a:ext cx="11247120" cy="548640"/>
-          </a:xfrm>
-          <a:prstGeom prst="rect">
-            <a:avLst/>
-          </a:prstGeom>
-          <a:noFill/>
-        </p:spPr>
-        <p:txBody>
-          <a:bodyPr wrap="square">
-            <a:spAutoFit/>
-          </a:bodyPr>
-          <a:lstStyle/>
-          <a:p>
-            <a:pPr>
-              <a:defRPr>
-                <a:latin typeface="Roboto"/>
-              </a:defRPr>
-            </a:pPr>
-            <a:r>
-              <a:rPr sz="2400" b="1">
-                <a:solidFill>
-                  <a:srgbClr val="25342A"/>
-                </a:solidFill>
-                <a:latin typeface="Roboto"/>
-              </a:rPr>
-              <a:t>What it shows · Program: Community meals (2025-26)</a:t>
-            </a:r>
-          </a:p>
-        </p:txBody>
-      </p:sp>
-      <p:sp>
-        <p:nvSpPr>
-          <p:cNvPr id="5" name="Rectangle 4"/>
-          <p:cNvSpPr/>
-          <p:nvPr/>
-        </p:nvSpPr>
-        <p:spPr>
-          <a:xfrm>
-            <a:off x="457200" y="1554480"/>
-            <a:ext cx="5501487" cy="4389120"/>
-          </a:xfrm>
-          <a:prstGeom prst="rect">
-            <a:avLst/>
-          </a:prstGeom>
-          <a:solidFill>
-            <a:srgbClr val="FFFFFF"/>
-          </a:solidFill>
-          <a:ln>
-            <a:solidFill>
-              <a:srgbClr val="DCE8DC"/>
-            </a:solidFill>
-          </a:ln>
-        </p:spPr>
-        <p:style>
-          <a:lnRef idx="1">
-            <a:schemeClr val="accent1"/>
-          </a:lnRef>
-          <a:fillRef idx="3">
-            <a:schemeClr val="accent1"/>
-          </a:fillRef>
-          <a:effectRef idx="2">
-            <a:schemeClr val="accent1"/>
-          </a:effectRef>
-          <a:fontRef idx="minor">
-            <a:schemeClr val="lt1"/>
-          </a:fontRef>
-        </p:style>
-        <p:txBody>
-          <a:bodyPr rtlCol="0" anchor="ctr"/>
-          <a:lstStyle/>
-          <a:p>
-            <a:pPr algn="ctr">
-              <a:defRPr>
-                <a:latin typeface="Roboto"/>
-              </a:defRPr>
-            </a:pPr>
-          </a:p>
-        </p:txBody>
-      </p:sp>
-      <p:sp>
-        <p:nvSpPr>
-          <p:cNvPr id="6" name="TextBox 5"/>
-          <p:cNvSpPr txBox="1"/>
-          <p:nvPr/>
-        </p:nvSpPr>
-        <p:spPr>
-          <a:xfrm>
-            <a:off x="685800" y="1691640"/>
-            <a:ext cx="5044287" cy="365760"/>
-          </a:xfrm>
-          <a:prstGeom prst="rect">
-            <a:avLst/>
-          </a:prstGeom>
-          <a:noFill/>
-        </p:spPr>
-        <p:txBody>
-          <a:bodyPr wrap="square">
-            <a:spAutoFit/>
-          </a:bodyPr>
-          <a:lstStyle/>
-          <a:p>
-            <a:pPr>
-              <a:defRPr>
-                <a:latin typeface="Roboto"/>
-              </a:defRPr>
-            </a:pPr>
-            <a:r>
-              <a:rPr sz="1100" b="1">
-                <a:solidFill>
-                  <a:srgbClr val="5F6F63"/>
-                </a:solidFill>
-                <a:latin typeface="Roboto"/>
-              </a:rPr>
-              <a:t>WHAT IT SHOWS</a:t>
-            </a:r>
-          </a:p>
-        </p:txBody>
-      </p:sp>
-      <p:sp>
-        <p:nvSpPr>
-          <p:cNvPr id="7" name="TextBox 6"/>
-          <p:cNvSpPr txBox="1"/>
-          <p:nvPr/>
-        </p:nvSpPr>
-        <p:spPr>
-          <a:xfrm>
-            <a:off x="685800" y="2103120"/>
-            <a:ext cx="5044287" cy="3749039"/>
-          </a:xfrm>
-          <a:prstGeom prst="rect">
-            <a:avLst/>
-          </a:prstGeom>
-          <a:noFill/>
-        </p:spPr>
-        <p:txBody>
-          <a:bodyPr wrap="square">
-            <a:spAutoFit/>
-          </a:bodyPr>
-          <a:lstStyle/>
-          <a:p>
-            <a:pPr>
-              <a:defRPr>
-                <a:latin typeface="Roboto"/>
-              </a:defRPr>
-            </a:pPr>
-            <a:r>
-              <a:rPr sz="1600" b="0">
-                <a:solidFill>
-                  <a:srgbClr val="25342A"/>
-                </a:solidFill>
-                <a:latin typeface="Roboto"/>
-              </a:rPr>
-              <a:t>Community meals (2025-26) cost $6,467 in full in June: $3,700 paid by the Local council community grant grant, and $2,767 of shared costs no grant covers. It has spent 97.7% of its budget to date, with $1,000 left and 0 months to go.</a:t>
-            </a:r>
-          </a:p>
-        </p:txBody>
-      </p:sp>
-      <p:sp>
-        <p:nvSpPr>
-          <p:cNvPr id="8" name="Rectangle 7"/>
-          <p:cNvSpPr/>
-          <p:nvPr/>
-        </p:nvSpPr>
-        <p:spPr>
-          <a:xfrm>
-            <a:off x="6233007" y="1554480"/>
-            <a:ext cx="5501487" cy="4389120"/>
-          </a:xfrm>
-          <a:prstGeom prst="rect">
-            <a:avLst/>
-          </a:prstGeom>
-          <a:solidFill>
-            <a:srgbClr val="EEF5F0"/>
-          </a:solidFill>
-          <a:ln>
-            <a:solidFill>
-              <a:srgbClr val="DCE8DC"/>
-            </a:solidFill>
-          </a:ln>
-        </p:spPr>
-        <p:style>
-          <a:lnRef idx="1">
-            <a:schemeClr val="accent1"/>
-          </a:lnRef>
-          <a:fillRef idx="3">
-            <a:schemeClr val="accent1"/>
-          </a:fillRef>
-          <a:effectRef idx="2">
-            <a:schemeClr val="accent1"/>
-          </a:effectRef>
-          <a:fontRef idx="minor">
-            <a:schemeClr val="lt1"/>
-          </a:fontRef>
-        </p:style>
-        <p:txBody>
-          <a:bodyPr rtlCol="0" anchor="ctr"/>
-          <a:lstStyle/>
-          <a:p>
-            <a:pPr algn="ctr">
-              <a:defRPr>
-                <a:latin typeface="Roboto"/>
-              </a:defRPr>
-            </a:pPr>
-          </a:p>
-        </p:txBody>
-      </p:sp>
-      <p:sp>
-        <p:nvSpPr>
-          <p:cNvPr id="9" name="TextBox 8"/>
-          <p:cNvSpPr txBox="1"/>
-          <p:nvPr/>
-        </p:nvSpPr>
-        <p:spPr>
-          <a:xfrm>
-            <a:off x="6461607" y="1691640"/>
-            <a:ext cx="5044287" cy="365760"/>
-          </a:xfrm>
-          <a:prstGeom prst="rect">
-            <a:avLst/>
-          </a:prstGeom>
-          <a:noFill/>
-        </p:spPr>
-        <p:txBody>
-          <a:bodyPr wrap="square">
-            <a:spAutoFit/>
-          </a:bodyPr>
-          <a:lstStyle/>
-          <a:p>
-            <a:pPr>
-              <a:defRPr>
-                <a:latin typeface="Roboto"/>
-              </a:defRPr>
-            </a:pPr>
-            <a:r>
-              <a:rPr sz="1100" b="1">
-                <a:solidFill>
-                  <a:srgbClr val="5F6F63"/>
-                </a:solidFill>
-                <a:latin typeface="Roboto"/>
-              </a:rPr>
-              <a:t>WHAT YOU'D DO ABOUT IT</a:t>
-            </a:r>
-          </a:p>
-        </p:txBody>
-      </p:sp>
-      <p:sp>
-        <p:nvSpPr>
-          <p:cNvPr id="10" name="TextBox 9"/>
-          <p:cNvSpPr txBox="1"/>
-          <p:nvPr/>
-        </p:nvSpPr>
-        <p:spPr>
-          <a:xfrm>
-            <a:off x="6461607" y="2103120"/>
-            <a:ext cx="5044287" cy="3749039"/>
-          </a:xfrm>
-          <a:prstGeom prst="rect">
-            <a:avLst/>
-          </a:prstGeom>
-          <a:noFill/>
-        </p:spPr>
-        <p:txBody>
-          <a:bodyPr wrap="square">
-            <a:spAutoFit/>
-          </a:bodyPr>
-          <a:lstStyle/>
-          <a:p>
-            <a:pPr>
-              <a:defRPr>
-                <a:latin typeface="Roboto"/>
-              </a:defRPr>
-            </a:pPr>
-            <a:r>
-              <a:rPr sz="1600" b="0">
-                <a:solidFill>
-                  <a:srgbClr val="25342A"/>
-                </a:solidFill>
-                <a:latin typeface="Roboto"/>
-              </a:rPr>
-              <a:t>The full cost is $6,467 a month; $2,767 of it is shared cost the grant doesn't pay for. Worth asking for as much of it as the funder allows at renewal.</a:t>
-            </a:r>
-          </a:p>
-        </p:txBody>
-      </p:sp>
-      <p:sp>
-        <p:nvSpPr>
-          <p:cNvPr id="11" name="TextBox 10"/>
-          <p:cNvSpPr txBox="1"/>
-          <p:nvPr/>
-        </p:nvSpPr>
-        <p:spPr>
-          <a:xfrm>
-            <a:off x="457200" y="6492240"/>
-            <a:ext cx="3657600" cy="274320"/>
-          </a:xfrm>
-          <a:prstGeom prst="rect">
-            <a:avLst/>
-          </a:prstGeom>
-          <a:noFill/>
-        </p:spPr>
-        <p:txBody>
-          <a:bodyPr wrap="square">
-            <a:spAutoFit/>
-          </a:bodyPr>
-          <a:lstStyle/>
-          <a:p>
-            <a:pPr>
-              <a:defRPr>
-                <a:latin typeface="Roboto"/>
-              </a:defRPr>
-            </a:pPr>
-            <a:r>
-              <a:rPr sz="900" b="0">
-                <a:solidFill>
-                  <a:srgbClr val="5F6F63"/>
-                </a:solidFill>
-                <a:latin typeface="Roboto"/>
-              </a:rPr>
-              <a:t>program-cost.pptx</a:t>
-            </a:r>
-          </a:p>
-        </p:txBody>
-      </p:sp>
-      <p:sp>
-        <p:nvSpPr>
-          <p:cNvPr id="12" name="TextBox 11"/>
-          <p:cNvSpPr txBox="1"/>
-          <p:nvPr/>
-        </p:nvSpPr>
-        <p:spPr>
-          <a:xfrm>
-            <a:off x="4297680" y="6492240"/>
-            <a:ext cx="3657600" cy="274320"/>
-          </a:xfrm>
-          <a:prstGeom prst="rect">
-            <a:avLst/>
-          </a:prstGeom>
-          <a:noFill/>
-        </p:spPr>
-        <p:txBody>
-          <a:bodyPr wrap="square">
-            <a:spAutoFit/>
-          </a:bodyPr>
-          <a:lstStyle/>
-          <a:p>
-            <a:pPr algn="ctr">
-              <a:defRPr>
-                <a:latin typeface="Roboto"/>
-              </a:defRPr>
-            </a:pPr>
-            <a:r>
-              <a:rPr sz="900" b="0">
-                <a:solidFill>
-                  <a:srgbClr val="5F6F63"/>
-                </a:solidFill>
-                <a:latin typeface="Roboto"/>
-              </a:rPr>
-              <a:t>Data retrieved 2pm, Tue 6 Oct 2026 · Sample data</a:t>
-            </a:r>
-          </a:p>
-        </p:txBody>
-      </p:sp>
-      <p:sp>
-        <p:nvSpPr>
-          <p:cNvPr id="13" name="TextBox 12"/>
-          <p:cNvSpPr txBox="1"/>
-          <p:nvPr/>
-        </p:nvSpPr>
-        <p:spPr>
-          <a:xfrm>
-            <a:off x="8503920" y="6492240"/>
-            <a:ext cx="3200400" cy="274320"/>
-          </a:xfrm>
-          <a:prstGeom prst="rect">
-            <a:avLst/>
-          </a:prstGeom>
-          <a:noFill/>
-        </p:spPr>
-        <p:txBody>
-          <a:bodyPr wrap="square">
-            <a:spAutoFit/>
-          </a:bodyPr>
-          <a:lstStyle/>
-          <a:p>
-            <a:pPr algn="r">
-              <a:defRPr>
-                <a:latin typeface="Roboto"/>
-              </a:defRPr>
-            </a:pPr>
-            <a:r>
-              <a:rPr sz="900" b="0">
-                <a:solidFill>
-                  <a:srgbClr val="5F6F63"/>
-                </a:solidFill>
-                <a:latin typeface="Roboto"/>
-              </a:rPr>
-              <a:t>Slide 9 of 11</a:t>
+              <a:t>Slide 8 of 8</a:t>
             </a:r>
           </a:p>
         </p:txBody>
@@ -8737,6 +10440,326 @@
 </file>
 
 <file path=ppt/theme/theme1.xml><?xml version="1.0" encoding="utf-8"?>
+<a:theme xmlns:a="http://schemas.openxmlformats.org/drawingml/2006/main" name="Office Theme">
+  <a:themeElements>
+    <a:clrScheme name="Office">
+      <a:dk1>
+        <a:sysClr val="windowText" lastClr="000000"/>
+      </a:dk1>
+      <a:lt1>
+        <a:sysClr val="window" lastClr="FFFFFF"/>
+      </a:lt1>
+      <a:dk2>
+        <a:srgbClr val="25342A"/>
+      </a:dk2>
+      <a:lt2>
+        <a:srgbClr val="F4F7F2"/>
+      </a:lt2>
+      <a:accent1>
+        <a:srgbClr val="2F7A5D"/>
+      </a:accent1>
+      <a:accent2>
+        <a:srgbClr val="0E9F6E"/>
+      </a:accent2>
+      <a:accent3>
+        <a:srgbClr val="7D8790"/>
+      </a:accent3>
+      <a:accent4>
+        <a:srgbClr val="8A6D3B"/>
+      </a:accent4>
+      <a:accent5>
+        <a:srgbClr val="B42318"/>
+      </a:accent5>
+      <a:accent6>
+        <a:srgbClr val="8E9CAB"/>
+      </a:accent6>
+      <a:hlink>
+        <a:srgbClr val="0000FF"/>
+      </a:hlink>
+      <a:folHlink>
+        <a:srgbClr val="800080"/>
+      </a:folHlink>
+    </a:clrScheme>
+    <a:fontScheme name="Office">
+      <a:majorFont>
+        <a:latin typeface="Roboto"/>
+        <a:ea typeface=""/>
+        <a:cs typeface=""/>
+        <a:font script="Jpan" typeface="ＭＳ Ｐゴシック"/>
+        <a:font script="Hang" typeface="맑은 고딕"/>
+        <a:font script="Hans" typeface="宋体"/>
+        <a:font script="Hant" typeface="新細明體"/>
+        <a:font script="Arab" typeface="Times New Roman"/>
+        <a:font script="Hebr" typeface="Times New Roman"/>
+        <a:font script="Thai" typeface="Angsana New"/>
+        <a:font script="Ethi" typeface="Nyala"/>
+        <a:font script="Beng" typeface="Vrinda"/>
+        <a:font script="Gujr" typeface="Shruti"/>
+        <a:font script="Khmr" typeface="MoolBoran"/>
+        <a:font script="Knda" typeface="Tunga"/>
+        <a:font script="Guru" typeface="Raavi"/>
+        <a:font script="Cans" typeface="Euphemia"/>
+        <a:font script="Cher" typeface="Plantagenet Cherokee"/>
+        <a:font script="Yiii" typeface="Microsoft Yi Baiti"/>
+        <a:font script="Tibt" typeface="Microsoft Himalaya"/>
+        <a:font script="Thaa" typeface="MV Boli"/>
+        <a:font script="Deva" typeface="Mangal"/>
+        <a:font script="Telu" typeface="Gautami"/>
+        <a:font script="Taml" typeface="Latha"/>
+        <a:font script="Syrc" typeface="Estrangelo Edessa"/>
+        <a:font script="Orya" typeface="Kalinga"/>
+        <a:font script="Mlym" typeface="Kartika"/>
+        <a:font script="Laoo" typeface="DokChampa"/>
+        <a:font script="Sinh" typeface="Iskoola Pota"/>
+        <a:font script="Mong" typeface="Mongolian Baiti"/>
+        <a:font script="Viet" typeface="Times New Roman"/>
+        <a:font script="Uigh" typeface="Microsoft Uighur"/>
+        <a:font script="Geor" typeface="Sylfaen"/>
+      </a:majorFont>
+      <a:minorFont>
+        <a:latin typeface="Roboto"/>
+        <a:ea typeface=""/>
+        <a:cs typeface=""/>
+        <a:font script="Jpan" typeface="ＭＳ Ｐゴシック"/>
+        <a:font script="Hang" typeface="맑은 고딕"/>
+        <a:font script="Hans" typeface="宋体"/>
+        <a:font script="Hant" typeface="新細明體"/>
+        <a:font script="Arab" typeface="Arial"/>
+        <a:font script="Hebr" typeface="Arial"/>
+        <a:font script="Thai" typeface="Cordia New"/>
+        <a:font script="Ethi" typeface="Nyala"/>
+        <a:font script="Beng" typeface="Vrinda"/>
+        <a:font script="Gujr" typeface="Shruti"/>
+        <a:font script="Khmr" typeface="DaunPenh"/>
+        <a:font script="Knda" typeface="Tunga"/>
+        <a:font script="Guru" typeface="Raavi"/>
+        <a:font script="Cans" typeface="Euphemia"/>
+        <a:font script="Cher" typeface="Plantagenet Cherokee"/>
+        <a:font script="Yiii" typeface="Microsoft Yi Baiti"/>
+        <a:font script="Tibt" typeface="Microsoft Himalaya"/>
+        <a:font script="Thaa" typeface="MV Boli"/>
+        <a:font script="Deva" typeface="Mangal"/>
+        <a:font script="Telu" typeface="Gautami"/>
+        <a:font script="Taml" typeface="Latha"/>
+        <a:font script="Syrc" typeface="Estrangelo Edessa"/>
+        <a:font script="Orya" typeface="Kalinga"/>
+        <a:font script="Mlym" typeface="Kartika"/>
+        <a:font script="Laoo" typeface="DokChampa"/>
+        <a:font script="Sinh" typeface="Iskoola Pota"/>
+        <a:font script="Mong" typeface="Mongolian Baiti"/>
+        <a:font script="Viet" typeface="Arial"/>
+        <a:font script="Uigh" typeface="Microsoft Uighur"/>
+        <a:font script="Geor" typeface="Sylfaen"/>
+      </a:minorFont>
+    </a:fontScheme>
+    <a:fmtScheme name="Office">
+      <a:fillStyleLst>
+        <a:solidFill>
+          <a:schemeClr val="phClr"/>
+        </a:solidFill>
+        <a:gradFill rotWithShape="1">
+          <a:gsLst>
+            <a:gs pos="0">
+              <a:schemeClr val="phClr">
+                <a:tint val="50000"/>
+                <a:satMod val="300000"/>
+              </a:schemeClr>
+            </a:gs>
+            <a:gs pos="35000">
+              <a:schemeClr val="phClr">
+                <a:tint val="37000"/>
+                <a:satMod val="300000"/>
+              </a:schemeClr>
+            </a:gs>
+            <a:gs pos="100000">
+              <a:schemeClr val="phClr">
+                <a:tint val="15000"/>
+                <a:satMod val="350000"/>
+              </a:schemeClr>
+            </a:gs>
+          </a:gsLst>
+          <a:lin ang="16200000" scaled="1"/>
+        </a:gradFill>
+        <a:gradFill rotWithShape="1">
+          <a:gsLst>
+            <a:gs pos="0">
+              <a:schemeClr val="phClr">
+                <a:tint val="100000"/>
+                <a:shade val="100000"/>
+                <a:satMod val="130000"/>
+              </a:schemeClr>
+            </a:gs>
+            <a:gs pos="100000">
+              <a:schemeClr val="phClr">
+                <a:tint val="50000"/>
+                <a:shade val="100000"/>
+                <a:satMod val="350000"/>
+              </a:schemeClr>
+            </a:gs>
+          </a:gsLst>
+          <a:lin ang="16200000" scaled="0"/>
+        </a:gradFill>
+      </a:fillStyleLst>
+      <a:lnStyleLst>
+        <a:ln w="9525" cap="flat" cmpd="sng" algn="ctr">
+          <a:solidFill>
+            <a:schemeClr val="phClr">
+              <a:shade val="95000"/>
+              <a:satMod val="105000"/>
+            </a:schemeClr>
+          </a:solidFill>
+          <a:prstDash val="solid"/>
+        </a:ln>
+        <a:ln w="25400" cap="flat" cmpd="sng" algn="ctr">
+          <a:solidFill>
+            <a:schemeClr val="phClr"/>
+          </a:solidFill>
+          <a:prstDash val="solid"/>
+        </a:ln>
+        <a:ln w="38100" cap="flat" cmpd="sng" algn="ctr">
+          <a:solidFill>
+            <a:schemeClr val="phClr"/>
+          </a:solidFill>
+          <a:prstDash val="solid"/>
+        </a:ln>
+      </a:lnStyleLst>
+      <a:effectStyleLst>
+        <a:effectStyle>
+          <a:effectLst>
+            <a:outerShdw blurRad="40000" dist="20000" dir="5400000" rotWithShape="0">
+              <a:srgbClr val="000000">
+                <a:alpha val="38000"/>
+              </a:srgbClr>
+            </a:outerShdw>
+          </a:effectLst>
+        </a:effectStyle>
+        <a:effectStyle>
+          <a:effectLst>
+            <a:outerShdw blurRad="40000" dist="23000" dir="5400000" rotWithShape="0">
+              <a:srgbClr val="000000">
+                <a:alpha val="35000"/>
+              </a:srgbClr>
+            </a:outerShdw>
+          </a:effectLst>
+        </a:effectStyle>
+        <a:effectStyle>
+          <a:effectLst>
+            <a:outerShdw blurRad="40000" dist="23000" dir="5400000" rotWithShape="0">
+              <a:srgbClr val="000000">
+                <a:alpha val="35000"/>
+              </a:srgbClr>
+            </a:outerShdw>
+          </a:effectLst>
+          <a:scene3d>
+            <a:camera prst="orthographicFront">
+              <a:rot lat="0" lon="0" rev="0"/>
+            </a:camera>
+            <a:lightRig rig="threePt" dir="t">
+              <a:rot lat="0" lon="0" rev="1200000"/>
+            </a:lightRig>
+          </a:scene3d>
+          <a:sp3d>
+            <a:bevelT w="63500" h="25400"/>
+          </a:sp3d>
+        </a:effectStyle>
+      </a:effectStyleLst>
+      <a:bgFillStyleLst>
+        <a:solidFill>
+          <a:schemeClr val="phClr"/>
+        </a:solidFill>
+        <a:gradFill rotWithShape="1">
+          <a:gsLst>
+            <a:gs pos="0">
+              <a:schemeClr val="phClr">
+                <a:tint val="40000"/>
+                <a:satMod val="350000"/>
+              </a:schemeClr>
+            </a:gs>
+            <a:gs pos="40000">
+              <a:schemeClr val="phClr">
+                <a:tint val="45000"/>
+                <a:shade val="99000"/>
+                <a:satMod val="350000"/>
+              </a:schemeClr>
+            </a:gs>
+            <a:gs pos="100000">
+              <a:schemeClr val="phClr">
+                <a:shade val="20000"/>
+                <a:satMod val="255000"/>
+              </a:schemeClr>
+            </a:gs>
+          </a:gsLst>
+          <a:path path="circle">
+            <a:fillToRect l="50000" t="-80000" r="50000" b="180000"/>
+          </a:path>
+        </a:gradFill>
+        <a:gradFill rotWithShape="1">
+          <a:gsLst>
+            <a:gs pos="0">
+              <a:schemeClr val="phClr">
+                <a:tint val="80000"/>
+                <a:satMod val="300000"/>
+              </a:schemeClr>
+            </a:gs>
+            <a:gs pos="100000">
+              <a:schemeClr val="phClr">
+                <a:shade val="30000"/>
+                <a:satMod val="200000"/>
+              </a:schemeClr>
+            </a:gs>
+          </a:gsLst>
+          <a:path path="circle">
+            <a:fillToRect l="50000" t="50000" r="50000" b="50000"/>
+          </a:path>
+        </a:gradFill>
+      </a:bgFillStyleLst>
+    </a:fmtScheme>
+  </a:themeElements>
+  <a:objectDefaults>
+    <a:spDef>
+      <a:spPr/>
+      <a:bodyPr/>
+      <a:lstStyle/>
+      <a:style>
+        <a:lnRef idx="1">
+          <a:schemeClr val="accent1"/>
+        </a:lnRef>
+        <a:fillRef idx="3">
+          <a:schemeClr val="accent1"/>
+        </a:fillRef>
+        <a:effectRef idx="2">
+          <a:schemeClr val="accent1"/>
+        </a:effectRef>
+        <a:fontRef idx="minor">
+          <a:schemeClr val="lt1"/>
+        </a:fontRef>
+      </a:style>
+    </a:spDef>
+    <a:lnDef>
+      <a:spPr/>
+      <a:bodyPr/>
+      <a:lstStyle/>
+      <a:style>
+        <a:lnRef idx="2">
+          <a:schemeClr val="accent1"/>
+        </a:lnRef>
+        <a:fillRef idx="0">
+          <a:schemeClr val="accent1"/>
+        </a:fillRef>
+        <a:effectRef idx="1">
+          <a:schemeClr val="accent1"/>
+        </a:effectRef>
+        <a:fontRef idx="minor">
+          <a:schemeClr val="tx1"/>
+        </a:fontRef>
+      </a:style>
+    </a:lnDef>
+  </a:objectDefaults>
+  <a:extraClrSchemeLst/>
+</a:theme>
+</file>
+
+<file path=ppt/theme/theme2.xml><?xml version="1.0" encoding="utf-8"?>
 <a:theme xmlns:a="http://schemas.openxmlformats.org/drawingml/2006/main" name="Office Theme">
   <a:themeElements>
     <a:clrScheme name="Office">

--- a/media/exports/reports/2026-06/program-cost.pptx
+++ b/media/exports/reports/2026-06/program-cost.pptx
@@ -2499,7 +2499,7 @@
           <a:lstStyle/>
           <a:p>
             <a:r>
-              <a:t>What does each program really cost?. Sample Community Services Ltd. Period: June 2026. Each program's full cost: what its grant pays for, plus its fair share of the costs no single grant covers (untied program costs and administration, shared by grant spending). Pick a program and every chart and note follows it.</a:t>
+              <a:t>What does each program really cost?. Sample Community Services Ltd. Period: June 2026. In short: Housing support costs $52,424 in full in June: $22,430 more than its grant spending, once its share of shared costs is added. Each program's full cost: what its grant pays for, plus its fair share of the costs no single grant covers (untied program costs and administration, shared by grant spending). Pick a program and every chart and note follows it.</a:t>
             </a:r>
           </a:p>
         </p:txBody>
@@ -6214,7 +6214,7 @@
         <p:spPr>
           <a:xfrm>
             <a:off x="457200" y="3703320"/>
-            <a:ext cx="11277295" cy="535940"/>
+            <a:ext cx="11277295" cy="980440"/>
           </a:xfrm>
           <a:prstGeom prst="rect">
             <a:avLst/>
@@ -6239,7 +6239,7 @@
                 </a:solidFill>
                 <a:latin typeface="Roboto"/>
               </a:rPr>
-              <a:t>Period: June 2026. Each program's full cost: what its grant pays for, plus its fair share of the costs no single grant covers (untied program costs and administration, shared by grant spending). Pick a program and every chart and note follows it.</a:t>
+              <a:t>Period: June 2026. In short: Housing support costs $52,424 in full in June: $22,430 more than its grant spending, once its share of shared costs is added. Each program's full cost: what its grant pays for, plus its fair share of the costs no single grant covers (untied program costs and administration, shared by grant spending). Pick a program and every chart and note follows it.</a:t>
             </a:r>
           </a:p>
         </p:txBody>
@@ -6252,7 +6252,7 @@
         </p:nvSpPr>
         <p:spPr>
           <a:xfrm>
-            <a:off x="457200" y="4330700"/>
+            <a:off x="457200" y="4775200"/>
             <a:ext cx="11277295" cy="1097280"/>
           </a:xfrm>
           <a:prstGeom prst="rect">
@@ -6404,7 +6404,7 @@
                 </a:solidFill>
                 <a:latin typeface="Roboto"/>
               </a:rPr>
-              <a:t>Data retrieved 2pm, Tue 6 Oct 2026 · Generated 8 Oct 2026, 9:35am · Sample data · Made with Python (python-pptx)</a:t>
+              <a:t>Data retrieved 2pm, Tue 6 Oct 2026 · Generated 10 Oct 2026, 9:55pm · Sample data · Made with Python (python-pptx)</a:t>
             </a:r>
           </a:p>
         </p:txBody>
@@ -6973,7 +6973,7 @@
                 </a:solidFill>
                 <a:latin typeface="Roboto"/>
               </a:rPr>
-              <a:t>Data retrieved 2pm, Tue 6 Oct 2026 · Generated 8 Oct 2026, 9:35am · Sample data · Made with Python (python-pptx)</a:t>
+              <a:t>Data retrieved 2pm, Tue 6 Oct 2026 · Generated 10 Oct 2026, 9:55pm · Sample data · Made with Python (python-pptx)</a:t>
             </a:r>
           </a:p>
         </p:txBody>
@@ -7542,7 +7542,7 @@
                 </a:solidFill>
                 <a:latin typeface="Roboto"/>
               </a:rPr>
-              <a:t>Data retrieved 2pm, Tue 6 Oct 2026 · Generated 8 Oct 2026, 9:35am · Sample data · Made with Python (python-pptx)</a:t>
+              <a:t>Data retrieved 2pm, Tue 6 Oct 2026 · Generated 10 Oct 2026, 9:55pm · Sample data · Made with Python (python-pptx)</a:t>
             </a:r>
           </a:p>
         </p:txBody>
@@ -8111,7 +8111,7 @@
                 </a:solidFill>
                 <a:latin typeface="Roboto"/>
               </a:rPr>
-              <a:t>Data retrieved 2pm, Tue 6 Oct 2026 · Generated 8 Oct 2026, 9:35am · Sample data · Made with Python (python-pptx)</a:t>
+              <a:t>Data retrieved 2pm, Tue 6 Oct 2026 · Generated 10 Oct 2026, 9:55pm · Sample data · Made with Python (python-pptx)</a:t>
             </a:r>
           </a:p>
         </p:txBody>
@@ -8680,7 +8680,7 @@
                 </a:solidFill>
                 <a:latin typeface="Roboto"/>
               </a:rPr>
-              <a:t>Data retrieved 2pm, Tue 6 Oct 2026 · Generated 8 Oct 2026, 9:35am · Sample data · Made with Python (python-pptx)</a:t>
+              <a:t>Data retrieved 2pm, Tue 6 Oct 2026 · Generated 10 Oct 2026, 9:55pm · Sample data · Made with Python (python-pptx)</a:t>
             </a:r>
           </a:p>
         </p:txBody>
@@ -9249,7 +9249,7 @@
                 </a:solidFill>
                 <a:latin typeface="Roboto"/>
               </a:rPr>
-              <a:t>Data retrieved 2pm, Tue 6 Oct 2026 · Generated 8 Oct 2026, 9:35am · Sample data · Made with Python (python-pptx)</a:t>
+              <a:t>Data retrieved 2pm, Tue 6 Oct 2026 · Generated 10 Oct 2026, 9:55pm · Sample data · Made with Python (python-pptx)</a:t>
             </a:r>
           </a:p>
         </p:txBody>
@@ -9818,7 +9818,7 @@
                 </a:solidFill>
                 <a:latin typeface="Roboto"/>
               </a:rPr>
-              <a:t>Data retrieved 2pm, Tue 6 Oct 2026 · Generated 8 Oct 2026, 9:35am · Sample data · Made with Python (python-pptx)</a:t>
+              <a:t>Data retrieved 2pm, Tue 6 Oct 2026 · Generated 10 Oct 2026, 9:55pm · Sample data · Made with Python (python-pptx)</a:t>
             </a:r>
           </a:p>
         </p:txBody>
@@ -10387,7 +10387,7 @@
                 </a:solidFill>
                 <a:latin typeface="Roboto"/>
               </a:rPr>
-              <a:t>Data retrieved 2pm, Tue 6 Oct 2026 · Generated 8 Oct 2026, 9:35am · Sample data · Made with Python (python-pptx)</a:t>
+              <a:t>Data retrieved 2pm, Tue 6 Oct 2026 · Generated 10 Oct 2026, 9:55pm · Sample data · Made with Python (python-pptx)</a:t>
             </a:r>
           </a:p>
         </p:txBody>
